--- a/outputs/fluttercon_flutter_app_functions_showcase.pptx
+++ b/outputs/fluttercon_flutter_app_functions_showcase.pptx
@@ -2,21 +2,21 @@
 <file path=ppt/presentation.xml><?xml version="1.0" encoding="utf-8"?>
 <p:presentation xmlns:p="http://schemas.openxmlformats.org/presentationml/2006/main">
   <p:sldMasterIdLst>
-    <p:sldMasterId xmlns:r="http://schemas.openxmlformats.org/officeDocument/2006/relationships" id="2147483648" r:id="Rca31728c1b0c48c7"/>
+    <p:sldMasterId xmlns:r="http://schemas.openxmlformats.org/officeDocument/2006/relationships" id="2147483648" r:id="R198970318d254992"/>
   </p:sldMasterIdLst>
   <p:notesMasterIdLst>
-    <p:notesMasterId xmlns:r="http://schemas.openxmlformats.org/officeDocument/2006/relationships" r:id="R157bf84e76f845d4"/>
+    <p:notesMasterId xmlns:r="http://schemas.openxmlformats.org/officeDocument/2006/relationships" r:id="Rbd47f7c624d84387"/>
   </p:notesMasterIdLst>
   <p:sldIdLst>
-    <p:sldId xmlns:r="http://schemas.openxmlformats.org/officeDocument/2006/relationships" id="256" r:id="R26c9cf5851c34d82"/>
-    <p:sldId xmlns:r="http://schemas.openxmlformats.org/officeDocument/2006/relationships" id="257" r:id="R13300943ed514876"/>
-    <p:sldId xmlns:r="http://schemas.openxmlformats.org/officeDocument/2006/relationships" id="258" r:id="Rb0d3461ed5df4941"/>
-    <p:sldId xmlns:r="http://schemas.openxmlformats.org/officeDocument/2006/relationships" id="259" r:id="Rfe835a64860b4516"/>
-    <p:sldId xmlns:r="http://schemas.openxmlformats.org/officeDocument/2006/relationships" id="260" r:id="R3b5cbec5a52a488a"/>
-    <p:sldId xmlns:r="http://schemas.openxmlformats.org/officeDocument/2006/relationships" id="261" r:id="R00bbf4e5f09e420f"/>
-    <p:sldId xmlns:r="http://schemas.openxmlformats.org/officeDocument/2006/relationships" id="262" r:id="Rf3dc3f2a0be64324"/>
-    <p:sldId xmlns:r="http://schemas.openxmlformats.org/officeDocument/2006/relationships" id="263" r:id="R3f3fc2eee3154f3f"/>
-    <p:sldId xmlns:r="http://schemas.openxmlformats.org/officeDocument/2006/relationships" id="264" r:id="R6f19d0b5d94c49ee"/>
+    <p:sldId xmlns:r="http://schemas.openxmlformats.org/officeDocument/2006/relationships" id="256" r:id="R46785294cc6d4fee"/>
+    <p:sldId xmlns:r="http://schemas.openxmlformats.org/officeDocument/2006/relationships" id="257" r:id="Rcfe031ec8f4e4f7d"/>
+    <p:sldId xmlns:r="http://schemas.openxmlformats.org/officeDocument/2006/relationships" id="258" r:id="Rbf8d63792c2b4f86"/>
+    <p:sldId xmlns:r="http://schemas.openxmlformats.org/officeDocument/2006/relationships" id="259" r:id="R7955fffed74144ba"/>
+    <p:sldId xmlns:r="http://schemas.openxmlformats.org/officeDocument/2006/relationships" id="260" r:id="R97ee84b93eba4ba5"/>
+    <p:sldId xmlns:r="http://schemas.openxmlformats.org/officeDocument/2006/relationships" id="261" r:id="Re89d0ca922d44654"/>
+    <p:sldId xmlns:r="http://schemas.openxmlformats.org/officeDocument/2006/relationships" id="262" r:id="R5e6a72bf0c3a46cb"/>
+    <p:sldId xmlns:r="http://schemas.openxmlformats.org/officeDocument/2006/relationships" id="263" r:id="R65fc8777514a42de"/>
+    <p:sldId xmlns:r="http://schemas.openxmlformats.org/officeDocument/2006/relationships" id="264" r:id="R8de3c93745eb462b"/>
   </p:sldIdLst>
   <p:sldSz cx="12192000" cy="6858000"/>
   <p:notesSz cx="6858000" cy="9144000"/>
@@ -1137,7 +1137,7 @@
   </p:cSld>
   <p:clrMap bg1="lt1" tx1="dk1" bg2="lt2" tx2="dk2" accent1="accent1" accent2="accent2" accent3="accent3" accent4="accent4" accent5="accent5" accent6="accent6" hlink="hlink" folHlink="folHlink"/>
   <p:sldLayoutIdLst>
-    <p:sldLayoutId xmlns:r="http://schemas.openxmlformats.org/officeDocument/2006/relationships" id="2147483649" r:id="R25e4dc0f53464afb"/>
+    <p:sldLayoutId xmlns:r="http://schemas.openxmlformats.org/officeDocument/2006/relationships" id="2147483649" r:id="R5ed20e274c344a43"/>
   </p:sldLayoutIdLst>
   <p:txStyles>
     <p:titleStyle>
@@ -1692,7 +1692,7 @@
           <p:nvPr/>
         </p:nvPicPr>
         <p:blipFill>
-          <a:blip xmlns:r="http://schemas.openxmlformats.org/officeDocument/2006/relationships" xmlns:a="http://schemas.openxmlformats.org/drawingml/2006/main" r:embed="R8904e684b79e4512"/>
+          <a:blip xmlns:r="http://schemas.openxmlformats.org/officeDocument/2006/relationships" xmlns:a="http://schemas.openxmlformats.org/drawingml/2006/main" r:embed="Reda05aac1cd5487b"/>
           <a:srcRect xmlns:a="http://schemas.openxmlformats.org/drawingml/2006/main" l="0" t="27" r="0" b="27"/>
           <a:stretch xmlns:a="http://schemas.openxmlformats.org/drawingml/2006/main">
             <a:fillRect l="0" t="0" r="0" b="0"/>
@@ -1713,7 +1713,7 @@
           <p:cNvPr id="2" name="">
             <a:extLst xmlns:a="http://schemas.openxmlformats.org/drawingml/2006/main">
               <a:ext uri="{FF2B5EF4-FFF2-40B4-BE49-F238E27FC236}">
-                <a16:creationId xmlns:a16="http://schemas.microsoft.com/office/drawing/2014/main" id="{E3B4067D-C610-40B9-BC47-C7EABDEC3FDC}"/>
+                <a16:creationId xmlns:a16="http://schemas.microsoft.com/office/drawing/2014/main" id="{25739896-5739-4318-9A7F-CB284F7F2C30}"/>
               </a:ext>
             </a:extLst>
           </p:cNvPr>
@@ -1750,7 +1750,7 @@
           <p:cNvPr id="3" name="">
             <a:extLst xmlns:a="http://schemas.openxmlformats.org/drawingml/2006/main">
               <a:ext uri="{FF2B5EF4-FFF2-40B4-BE49-F238E27FC236}">
-                <a16:creationId xmlns:a16="http://schemas.microsoft.com/office/drawing/2014/main" id="{A6D9BE73-946A-491B-9C1D-66967509A758}"/>
+                <a16:creationId xmlns:a16="http://schemas.microsoft.com/office/drawing/2014/main" id="{2445997F-B0A1-4980-A024-4C81EF68B08F}"/>
               </a:ext>
             </a:extLst>
           </p:cNvPr>
@@ -1800,7 +1800,7 @@
           <p:cNvPr id="4" name="">
             <a:extLst xmlns:a="http://schemas.openxmlformats.org/drawingml/2006/main">
               <a:ext uri="{FF2B5EF4-FFF2-40B4-BE49-F238E27FC236}">
-                <a16:creationId xmlns:a16="http://schemas.microsoft.com/office/drawing/2014/main" id="{D4541BF5-CE69-4D72-8522-F2BD01385A3A}"/>
+                <a16:creationId xmlns:a16="http://schemas.microsoft.com/office/drawing/2014/main" id="{31CF4EB3-5D72-495B-9B21-A70EA6A474E2}"/>
               </a:ext>
             </a:extLst>
           </p:cNvPr>
@@ -1850,7 +1850,7 @@
           <p:cNvPr id="5" name="">
             <a:extLst xmlns:a="http://schemas.openxmlformats.org/drawingml/2006/main">
               <a:ext uri="{FF2B5EF4-FFF2-40B4-BE49-F238E27FC236}">
-                <a16:creationId xmlns:a16="http://schemas.microsoft.com/office/drawing/2014/main" id="{C4911D23-7CB5-4704-A52E-8E8356460ABF}"/>
+                <a16:creationId xmlns:a16="http://schemas.microsoft.com/office/drawing/2014/main" id="{6F9C311D-E677-416C-8F5E-E1365412A880}"/>
               </a:ext>
             </a:extLst>
           </p:cNvPr>
@@ -1900,7 +1900,7 @@
           <p:cNvPr id="6" name="">
             <a:extLst xmlns:a="http://schemas.openxmlformats.org/drawingml/2006/main">
               <a:ext uri="{FF2B5EF4-FFF2-40B4-BE49-F238E27FC236}">
-                <a16:creationId xmlns:a16="http://schemas.microsoft.com/office/drawing/2014/main" id="{7D458F93-5562-4569-A115-F7DC62949E2A}"/>
+                <a16:creationId xmlns:a16="http://schemas.microsoft.com/office/drawing/2014/main" id="{91128FA7-8B8B-4405-9B73-CDD40F1CB9AC}"/>
               </a:ext>
             </a:extLst>
           </p:cNvPr>
@@ -1948,7 +1948,7 @@
     </p:spTree>
     <p:extLst>
       <p:ext uri="{BB962C8B-B14F-4D97-AF65-F5344CB8AC3E}">
-        <p14:creationId xmlns:p14="http://schemas.microsoft.com/office/powerpoint/2010/main" val="802141729"/>
+        <p14:creationId xmlns:p14="http://schemas.microsoft.com/office/powerpoint/2010/main" val="465977525"/>
       </p:ext>
     </p:extLst>
   </p:cSld>
@@ -1979,7 +1979,7 @@
           <p:cNvPr id="1" name="">
             <a:extLst xmlns:a="http://schemas.openxmlformats.org/drawingml/2006/main">
               <a:ext uri="{FF2B5EF4-FFF2-40B4-BE49-F238E27FC236}">
-                <a16:creationId xmlns:a16="http://schemas.microsoft.com/office/drawing/2014/main" id="{BC5EFCD8-4914-45C2-9102-9D88D41F4C19}"/>
+                <a16:creationId xmlns:a16="http://schemas.microsoft.com/office/drawing/2014/main" id="{79910ED2-40E9-40D8-B2FA-E0CEBA8F62EC}"/>
               </a:ext>
             </a:extLst>
           </p:cNvPr>
@@ -2029,7 +2029,7 @@
           <p:cNvPr id="2" name="">
             <a:extLst xmlns:a="http://schemas.openxmlformats.org/drawingml/2006/main">
               <a:ext uri="{FF2B5EF4-FFF2-40B4-BE49-F238E27FC236}">
-                <a16:creationId xmlns:a16="http://schemas.microsoft.com/office/drawing/2014/main" id="{8866A4E4-2F0B-4DE2-9982-796593663794}"/>
+                <a16:creationId xmlns:a16="http://schemas.microsoft.com/office/drawing/2014/main" id="{20403184-D744-4501-A969-CD8E79D0FA5A}"/>
               </a:ext>
             </a:extLst>
           </p:cNvPr>
@@ -2079,7 +2079,7 @@
           <p:cNvPr id="3" name="">
             <a:extLst xmlns:a="http://schemas.openxmlformats.org/drawingml/2006/main">
               <a:ext uri="{FF2B5EF4-FFF2-40B4-BE49-F238E27FC236}">
-                <a16:creationId xmlns:a16="http://schemas.microsoft.com/office/drawing/2014/main" id="{F2E58AA0-6554-4385-A49E-DD554DE4FD30}"/>
+                <a16:creationId xmlns:a16="http://schemas.microsoft.com/office/drawing/2014/main" id="{1473D50B-D1CE-4162-95F4-667BABFFBC04}"/>
               </a:ext>
             </a:extLst>
           </p:cNvPr>
@@ -2112,7 +2112,7 @@
           <p:cNvPr id="4" name="">
             <a:extLst xmlns:a="http://schemas.openxmlformats.org/drawingml/2006/main">
               <a:ext uri="{FF2B5EF4-FFF2-40B4-BE49-F238E27FC236}">
-                <a16:creationId xmlns:a16="http://schemas.microsoft.com/office/drawing/2014/main" id="{E8E0FCE9-FC1A-4202-A591-15FCC072FBF0}"/>
+                <a16:creationId xmlns:a16="http://schemas.microsoft.com/office/drawing/2014/main" id="{5CB9D45F-E6E1-4260-A188-91EC8845DE52}"/>
               </a:ext>
             </a:extLst>
           </p:cNvPr>
@@ -2162,7 +2162,7 @@
           <p:cNvPr id="5" name="">
             <a:extLst xmlns:a="http://schemas.openxmlformats.org/drawingml/2006/main">
               <a:ext uri="{FF2B5EF4-FFF2-40B4-BE49-F238E27FC236}">
-                <a16:creationId xmlns:a16="http://schemas.microsoft.com/office/drawing/2014/main" id="{0768F5CE-0BB0-4898-AFF8-F89441ACC5A4}"/>
+                <a16:creationId xmlns:a16="http://schemas.microsoft.com/office/drawing/2014/main" id="{E7F1EEAB-D64F-45A9-AE5E-61E3425F0928}"/>
               </a:ext>
             </a:extLst>
           </p:cNvPr>
@@ -2195,7 +2195,7 @@
           <p:cNvPr id="6" name="">
             <a:extLst xmlns:a="http://schemas.openxmlformats.org/drawingml/2006/main">
               <a:ext uri="{FF2B5EF4-FFF2-40B4-BE49-F238E27FC236}">
-                <a16:creationId xmlns:a16="http://schemas.microsoft.com/office/drawing/2014/main" id="{81438D91-94E7-4D3A-8471-54F838D0AD15}"/>
+                <a16:creationId xmlns:a16="http://schemas.microsoft.com/office/drawing/2014/main" id="{03E82012-96AF-4FDA-A615-8CBEDB0F6615}"/>
               </a:ext>
             </a:extLst>
           </p:cNvPr>
@@ -2245,7 +2245,7 @@
           <p:cNvPr id="7" name="">
             <a:extLst xmlns:a="http://schemas.openxmlformats.org/drawingml/2006/main">
               <a:ext uri="{FF2B5EF4-FFF2-40B4-BE49-F238E27FC236}">
-                <a16:creationId xmlns:a16="http://schemas.microsoft.com/office/drawing/2014/main" id="{5D17FFD7-71B2-45E4-A970-918212BF1EAC}"/>
+                <a16:creationId xmlns:a16="http://schemas.microsoft.com/office/drawing/2014/main" id="{B8ECDCF6-2381-408A-9C5B-781E59D2FB1E}"/>
               </a:ext>
             </a:extLst>
           </p:cNvPr>
@@ -2278,7 +2278,7 @@
           <p:cNvPr id="8" name="">
             <a:extLst xmlns:a="http://schemas.openxmlformats.org/drawingml/2006/main">
               <a:ext uri="{FF2B5EF4-FFF2-40B4-BE49-F238E27FC236}">
-                <a16:creationId xmlns:a16="http://schemas.microsoft.com/office/drawing/2014/main" id="{9473CB24-DBBF-45F2-AA34-BBC8B833FDA2}"/>
+                <a16:creationId xmlns:a16="http://schemas.microsoft.com/office/drawing/2014/main" id="{FF8B75A2-C626-4147-B019-E278CB1A7078}"/>
               </a:ext>
             </a:extLst>
           </p:cNvPr>
@@ -2328,7 +2328,7 @@
           <p:cNvPr id="9" name="">
             <a:extLst xmlns:a="http://schemas.openxmlformats.org/drawingml/2006/main">
               <a:ext uri="{FF2B5EF4-FFF2-40B4-BE49-F238E27FC236}">
-                <a16:creationId xmlns:a16="http://schemas.microsoft.com/office/drawing/2014/main" id="{26C38E61-509D-4FF9-A593-CB2910203728}"/>
+                <a16:creationId xmlns:a16="http://schemas.microsoft.com/office/drawing/2014/main" id="{76DE5131-D147-498E-9F69-F6B90EE61058}"/>
               </a:ext>
             </a:extLst>
           </p:cNvPr>
@@ -2361,7 +2361,7 @@
           <p:cNvPr id="10" name="">
             <a:extLst xmlns:a="http://schemas.openxmlformats.org/drawingml/2006/main">
               <a:ext uri="{FF2B5EF4-FFF2-40B4-BE49-F238E27FC236}">
-                <a16:creationId xmlns:a16="http://schemas.microsoft.com/office/drawing/2014/main" id="{2FF4DEBB-82F8-4C5F-97DA-F0A8FF26B63E}"/>
+                <a16:creationId xmlns:a16="http://schemas.microsoft.com/office/drawing/2014/main" id="{F730B49B-368B-4842-B8A6-CE16B9C1B2FD}"/>
               </a:ext>
             </a:extLst>
           </p:cNvPr>
@@ -2411,7 +2411,7 @@
           <p:cNvPr id="11" name="">
             <a:extLst xmlns:a="http://schemas.openxmlformats.org/drawingml/2006/main">
               <a:ext uri="{FF2B5EF4-FFF2-40B4-BE49-F238E27FC236}">
-                <a16:creationId xmlns:a16="http://schemas.microsoft.com/office/drawing/2014/main" id="{F8860230-365C-4C69-83B0-397D64303691}"/>
+                <a16:creationId xmlns:a16="http://schemas.microsoft.com/office/drawing/2014/main" id="{B082A4C0-E833-4BE9-89D1-EEC382A4C4F5}"/>
               </a:ext>
             </a:extLst>
           </p:cNvPr>
@@ -2444,7 +2444,7 @@
           <p:cNvPr id="12" name="">
             <a:extLst xmlns:a="http://schemas.openxmlformats.org/drawingml/2006/main">
               <a:ext uri="{FF2B5EF4-FFF2-40B4-BE49-F238E27FC236}">
-                <a16:creationId xmlns:a16="http://schemas.microsoft.com/office/drawing/2014/main" id="{AB3DD074-FCCA-44AB-9DA2-B86D674ED7EC}"/>
+                <a16:creationId xmlns:a16="http://schemas.microsoft.com/office/drawing/2014/main" id="{205842EF-4383-41C5-AF44-1CA2B817105F}"/>
               </a:ext>
             </a:extLst>
           </p:cNvPr>
@@ -2494,7 +2494,7 @@
           <p:cNvPr id="13" name="">
             <a:extLst xmlns:a="http://schemas.openxmlformats.org/drawingml/2006/main">
               <a:ext uri="{FF2B5EF4-FFF2-40B4-BE49-F238E27FC236}">
-                <a16:creationId xmlns:a16="http://schemas.microsoft.com/office/drawing/2014/main" id="{1584C77E-9BF5-4C23-B7AE-E29EA945EED4}"/>
+                <a16:creationId xmlns:a16="http://schemas.microsoft.com/office/drawing/2014/main" id="{19C3972E-E8EF-4FA6-9F64-AB482FE0973D}"/>
               </a:ext>
             </a:extLst>
           </p:cNvPr>
@@ -2544,7 +2544,7 @@
           <p:cNvPr id="14" name="">
             <a:extLst xmlns:a="http://schemas.openxmlformats.org/drawingml/2006/main">
               <a:ext uri="{FF2B5EF4-FFF2-40B4-BE49-F238E27FC236}">
-                <a16:creationId xmlns:a16="http://schemas.microsoft.com/office/drawing/2014/main" id="{035F0FD9-7682-479E-A025-925350D0DCDD}"/>
+                <a16:creationId xmlns:a16="http://schemas.microsoft.com/office/drawing/2014/main" id="{313C852C-8155-4F5A-B20B-E538CB1DEE44}"/>
               </a:ext>
             </a:extLst>
           </p:cNvPr>
@@ -2592,7 +2592,7 @@
     </p:spTree>
     <p:extLst>
       <p:ext uri="{BB962C8B-B14F-4D97-AF65-F5344CB8AC3E}">
-        <p14:creationId xmlns:p14="http://schemas.microsoft.com/office/powerpoint/2010/main" val="1412326172"/>
+        <p14:creationId xmlns:p14="http://schemas.microsoft.com/office/powerpoint/2010/main" val="128466967"/>
       </p:ext>
     </p:extLst>
   </p:cSld>
@@ -2623,7 +2623,7 @@
           <p:cNvPr id="1" name="">
             <a:extLst xmlns:a="http://schemas.openxmlformats.org/drawingml/2006/main">
               <a:ext uri="{FF2B5EF4-FFF2-40B4-BE49-F238E27FC236}">
-                <a16:creationId xmlns:a16="http://schemas.microsoft.com/office/drawing/2014/main" id="{E81A1837-1C93-4047-BF6D-A59C4AE48964}"/>
+                <a16:creationId xmlns:a16="http://schemas.microsoft.com/office/drawing/2014/main" id="{2A72C1F3-D9EE-49EF-9713-76456ADFC45B}"/>
               </a:ext>
             </a:extLst>
           </p:cNvPr>
@@ -2673,7 +2673,7 @@
           <p:cNvPr id="2" name="">
             <a:extLst xmlns:a="http://schemas.openxmlformats.org/drawingml/2006/main">
               <a:ext uri="{FF2B5EF4-FFF2-40B4-BE49-F238E27FC236}">
-                <a16:creationId xmlns:a16="http://schemas.microsoft.com/office/drawing/2014/main" id="{8B3243E4-206C-4843-A5FE-9AB8D4C29206}"/>
+                <a16:creationId xmlns:a16="http://schemas.microsoft.com/office/drawing/2014/main" id="{61672340-007E-4FB5-AEB2-0504BD9178AD}"/>
               </a:ext>
             </a:extLst>
           </p:cNvPr>
@@ -2723,7 +2723,7 @@
           <p:cNvPr id="3" name="">
             <a:extLst xmlns:a="http://schemas.openxmlformats.org/drawingml/2006/main">
               <a:ext uri="{FF2B5EF4-FFF2-40B4-BE49-F238E27FC236}">
-                <a16:creationId xmlns:a16="http://schemas.microsoft.com/office/drawing/2014/main" id="{19802872-60D8-4293-B6A3-33DED8BF3BA3}"/>
+                <a16:creationId xmlns:a16="http://schemas.microsoft.com/office/drawing/2014/main" id="{A78D2E6F-72C5-4916-8420-F880DD0A79C8}"/>
               </a:ext>
             </a:extLst>
           </p:cNvPr>
@@ -2756,7 +2756,7 @@
           <p:cNvPr id="4" name="">
             <a:extLst xmlns:a="http://schemas.openxmlformats.org/drawingml/2006/main">
               <a:ext uri="{FF2B5EF4-FFF2-40B4-BE49-F238E27FC236}">
-                <a16:creationId xmlns:a16="http://schemas.microsoft.com/office/drawing/2014/main" id="{E9465170-F0DC-409C-86E1-76609CD3E4E5}"/>
+                <a16:creationId xmlns:a16="http://schemas.microsoft.com/office/drawing/2014/main" id="{9D299B9D-C6B6-4E1A-B715-7B5A63D37472}"/>
               </a:ext>
             </a:extLst>
           </p:cNvPr>
@@ -2789,7 +2789,7 @@
           <p:cNvPr id="5" name="">
             <a:extLst xmlns:a="http://schemas.openxmlformats.org/drawingml/2006/main">
               <a:ext uri="{FF2B5EF4-FFF2-40B4-BE49-F238E27FC236}">
-                <a16:creationId xmlns:a16="http://schemas.microsoft.com/office/drawing/2014/main" id="{FE472309-9F61-4625-BEB9-D2E1AE5C458A}"/>
+                <a16:creationId xmlns:a16="http://schemas.microsoft.com/office/drawing/2014/main" id="{6005CC95-1E41-46E2-84D3-EDC69342C039}"/>
               </a:ext>
             </a:extLst>
           </p:cNvPr>
@@ -2839,7 +2839,7 @@
           <p:cNvPr id="6" name="">
             <a:extLst xmlns:a="http://schemas.openxmlformats.org/drawingml/2006/main">
               <a:ext uri="{FF2B5EF4-FFF2-40B4-BE49-F238E27FC236}">
-                <a16:creationId xmlns:a16="http://schemas.microsoft.com/office/drawing/2014/main" id="{96622A17-0BDE-487B-9F29-67D1217B358A}"/>
+                <a16:creationId xmlns:a16="http://schemas.microsoft.com/office/drawing/2014/main" id="{2A957EA0-257C-4BE3-97E3-CCC8B65E040A}"/>
               </a:ext>
             </a:extLst>
           </p:cNvPr>
@@ -2889,7 +2889,7 @@
           <p:cNvPr id="7" name="">
             <a:extLst xmlns:a="http://schemas.openxmlformats.org/drawingml/2006/main">
               <a:ext uri="{FF2B5EF4-FFF2-40B4-BE49-F238E27FC236}">
-                <a16:creationId xmlns:a16="http://schemas.microsoft.com/office/drawing/2014/main" id="{92F28FFA-C2A0-4739-8F34-5272919641E5}"/>
+                <a16:creationId xmlns:a16="http://schemas.microsoft.com/office/drawing/2014/main" id="{8793AE02-60F4-4F27-A457-E7C371E22474}"/>
               </a:ext>
             </a:extLst>
           </p:cNvPr>
@@ -2939,7 +2939,7 @@
           <p:cNvPr id="8" name="">
             <a:extLst xmlns:a="http://schemas.openxmlformats.org/drawingml/2006/main">
               <a:ext uri="{FF2B5EF4-FFF2-40B4-BE49-F238E27FC236}">
-                <a16:creationId xmlns:a16="http://schemas.microsoft.com/office/drawing/2014/main" id="{860B79BE-3439-4B47-AB1A-D58668A019C0}"/>
+                <a16:creationId xmlns:a16="http://schemas.microsoft.com/office/drawing/2014/main" id="{945D8EF4-9B7D-4482-B2AB-7CD0389BC26D}"/>
               </a:ext>
             </a:extLst>
           </p:cNvPr>
@@ -2972,7 +2972,7 @@
           <p:cNvPr id="9" name="">
             <a:extLst xmlns:a="http://schemas.openxmlformats.org/drawingml/2006/main">
               <a:ext uri="{FF2B5EF4-FFF2-40B4-BE49-F238E27FC236}">
-                <a16:creationId xmlns:a16="http://schemas.microsoft.com/office/drawing/2014/main" id="{FBB80DC3-954F-4B57-BF4D-11FD9CC20E17}"/>
+                <a16:creationId xmlns:a16="http://schemas.microsoft.com/office/drawing/2014/main" id="{4779792B-E989-4173-86DB-83CD56CD8839}"/>
               </a:ext>
             </a:extLst>
           </p:cNvPr>
@@ -3022,7 +3022,7 @@
           <p:cNvPr id="10" name="">
             <a:extLst xmlns:a="http://schemas.openxmlformats.org/drawingml/2006/main">
               <a:ext uri="{FF2B5EF4-FFF2-40B4-BE49-F238E27FC236}">
-                <a16:creationId xmlns:a16="http://schemas.microsoft.com/office/drawing/2014/main" id="{DF1B4C24-DEDA-4B0B-826A-805DA9B7351E}"/>
+                <a16:creationId xmlns:a16="http://schemas.microsoft.com/office/drawing/2014/main" id="{E01279D5-5EDA-4B58-B99F-4D2A21E8E049}"/>
               </a:ext>
             </a:extLst>
           </p:cNvPr>
@@ -3072,7 +3072,7 @@
           <p:cNvPr id="11" name="">
             <a:extLst xmlns:a="http://schemas.openxmlformats.org/drawingml/2006/main">
               <a:ext uri="{FF2B5EF4-FFF2-40B4-BE49-F238E27FC236}">
-                <a16:creationId xmlns:a16="http://schemas.microsoft.com/office/drawing/2014/main" id="{9139DA65-4886-4F29-B3BC-58E3D2E0A769}"/>
+                <a16:creationId xmlns:a16="http://schemas.microsoft.com/office/drawing/2014/main" id="{6693F1EF-3F85-4423-A65B-ECE796DDE972}"/>
               </a:ext>
             </a:extLst>
           </p:cNvPr>
@@ -3122,7 +3122,7 @@
           <p:cNvPr id="12" name="">
             <a:extLst xmlns:a="http://schemas.openxmlformats.org/drawingml/2006/main">
               <a:ext uri="{FF2B5EF4-FFF2-40B4-BE49-F238E27FC236}">
-                <a16:creationId xmlns:a16="http://schemas.microsoft.com/office/drawing/2014/main" id="{CC2A8071-A261-4E64-95CD-8B8396F26667}"/>
+                <a16:creationId xmlns:a16="http://schemas.microsoft.com/office/drawing/2014/main" id="{2655D907-C7EB-49B5-A54E-51D3D2DB800A}"/>
               </a:ext>
             </a:extLst>
           </p:cNvPr>
@@ -3155,7 +3155,7 @@
           <p:cNvPr id="13" name="">
             <a:extLst xmlns:a="http://schemas.openxmlformats.org/drawingml/2006/main">
               <a:ext uri="{FF2B5EF4-FFF2-40B4-BE49-F238E27FC236}">
-                <a16:creationId xmlns:a16="http://schemas.microsoft.com/office/drawing/2014/main" id="{E4A6B040-A80A-460A-A20E-4DC04D731A9B}"/>
+                <a16:creationId xmlns:a16="http://schemas.microsoft.com/office/drawing/2014/main" id="{7CFC568E-110F-455E-BC67-191F423F2B0C}"/>
               </a:ext>
             </a:extLst>
           </p:cNvPr>
@@ -3205,7 +3205,7 @@
           <p:cNvPr id="14" name="">
             <a:extLst xmlns:a="http://schemas.openxmlformats.org/drawingml/2006/main">
               <a:ext uri="{FF2B5EF4-FFF2-40B4-BE49-F238E27FC236}">
-                <a16:creationId xmlns:a16="http://schemas.microsoft.com/office/drawing/2014/main" id="{851DBB4E-F0E3-4318-BA06-4F8D44908BAD}"/>
+                <a16:creationId xmlns:a16="http://schemas.microsoft.com/office/drawing/2014/main" id="{4C3FD8A4-6263-4477-9133-4F7CE3B0417B}"/>
               </a:ext>
             </a:extLst>
           </p:cNvPr>
@@ -3255,7 +3255,7 @@
           <p:cNvPr id="15" name="">
             <a:extLst xmlns:a="http://schemas.openxmlformats.org/drawingml/2006/main">
               <a:ext uri="{FF2B5EF4-FFF2-40B4-BE49-F238E27FC236}">
-                <a16:creationId xmlns:a16="http://schemas.microsoft.com/office/drawing/2014/main" id="{A964A1F6-E0B6-4F64-9648-09792E3F1113}"/>
+                <a16:creationId xmlns:a16="http://schemas.microsoft.com/office/drawing/2014/main" id="{9E7BAFFD-34FD-4728-971C-832E31A308EB}"/>
               </a:ext>
             </a:extLst>
           </p:cNvPr>
@@ -3305,7 +3305,7 @@
           <p:cNvPr id="16" name="">
             <a:extLst xmlns:a="http://schemas.openxmlformats.org/drawingml/2006/main">
               <a:ext uri="{FF2B5EF4-FFF2-40B4-BE49-F238E27FC236}">
-                <a16:creationId xmlns:a16="http://schemas.microsoft.com/office/drawing/2014/main" id="{D3C772B8-F556-434D-9801-E13B4FCC92AF}"/>
+                <a16:creationId xmlns:a16="http://schemas.microsoft.com/office/drawing/2014/main" id="{D3668F20-E256-4779-9A9B-FAE19194D5C9}"/>
               </a:ext>
             </a:extLst>
           </p:cNvPr>
@@ -3338,7 +3338,7 @@
           <p:cNvPr id="17" name="">
             <a:extLst xmlns:a="http://schemas.openxmlformats.org/drawingml/2006/main">
               <a:ext uri="{FF2B5EF4-FFF2-40B4-BE49-F238E27FC236}">
-                <a16:creationId xmlns:a16="http://schemas.microsoft.com/office/drawing/2014/main" id="{1CA1B5E1-BA1C-49E6-828D-354EFAC0E20F}"/>
+                <a16:creationId xmlns:a16="http://schemas.microsoft.com/office/drawing/2014/main" id="{429FD343-7A88-415B-AF6E-04594912C107}"/>
               </a:ext>
             </a:extLst>
           </p:cNvPr>
@@ -3388,7 +3388,7 @@
           <p:cNvPr id="18" name="">
             <a:extLst xmlns:a="http://schemas.openxmlformats.org/drawingml/2006/main">
               <a:ext uri="{FF2B5EF4-FFF2-40B4-BE49-F238E27FC236}">
-                <a16:creationId xmlns:a16="http://schemas.microsoft.com/office/drawing/2014/main" id="{FA379550-26A8-4A04-9A71-0FF9CF0D4B34}"/>
+                <a16:creationId xmlns:a16="http://schemas.microsoft.com/office/drawing/2014/main" id="{CF65BC40-A04E-4747-830A-3AEF38E4FF7A}"/>
               </a:ext>
             </a:extLst>
           </p:cNvPr>
@@ -3438,7 +3438,7 @@
           <p:cNvPr id="19" name="">
             <a:extLst xmlns:a="http://schemas.openxmlformats.org/drawingml/2006/main">
               <a:ext uri="{FF2B5EF4-FFF2-40B4-BE49-F238E27FC236}">
-                <a16:creationId xmlns:a16="http://schemas.microsoft.com/office/drawing/2014/main" id="{C91B9014-D4BC-4D58-A3CF-1D72C1EA8DB5}"/>
+                <a16:creationId xmlns:a16="http://schemas.microsoft.com/office/drawing/2014/main" id="{C3842E8D-5C69-4663-9255-A79E2751B27D}"/>
               </a:ext>
             </a:extLst>
           </p:cNvPr>
@@ -3488,7 +3488,7 @@
           <p:cNvPr id="20" name="">
             <a:extLst xmlns:a="http://schemas.openxmlformats.org/drawingml/2006/main">
               <a:ext uri="{FF2B5EF4-FFF2-40B4-BE49-F238E27FC236}">
-                <a16:creationId xmlns:a16="http://schemas.microsoft.com/office/drawing/2014/main" id="{D27821A5-86AA-4843-B248-E7CA8902F9D9}"/>
+                <a16:creationId xmlns:a16="http://schemas.microsoft.com/office/drawing/2014/main" id="{411505DF-F93F-41D7-BB67-6CA4DC36E9E0}"/>
               </a:ext>
             </a:extLst>
           </p:cNvPr>
@@ -3538,7 +3538,7 @@
           <p:cNvPr id="21" name="">
             <a:extLst xmlns:a="http://schemas.openxmlformats.org/drawingml/2006/main">
               <a:ext uri="{FF2B5EF4-FFF2-40B4-BE49-F238E27FC236}">
-                <a16:creationId xmlns:a16="http://schemas.microsoft.com/office/drawing/2014/main" id="{8C8AE675-7267-4F96-AA0C-3DEB3B35DE9E}"/>
+                <a16:creationId xmlns:a16="http://schemas.microsoft.com/office/drawing/2014/main" id="{447C59B4-98E9-4725-9B71-354AB6E593C1}"/>
               </a:ext>
             </a:extLst>
           </p:cNvPr>
@@ -3586,7 +3586,7 @@
     </p:spTree>
     <p:extLst>
       <p:ext uri="{BB962C8B-B14F-4D97-AF65-F5344CB8AC3E}">
-        <p14:creationId xmlns:p14="http://schemas.microsoft.com/office/powerpoint/2010/main" val="405168648"/>
+        <p14:creationId xmlns:p14="http://schemas.microsoft.com/office/powerpoint/2010/main" val="786855797"/>
       </p:ext>
     </p:extLst>
   </p:cSld>
@@ -3617,7 +3617,7 @@
           <p:cNvPr id="1" name="">
             <a:extLst xmlns:a="http://schemas.openxmlformats.org/drawingml/2006/main">
               <a:ext uri="{FF2B5EF4-FFF2-40B4-BE49-F238E27FC236}">
-                <a16:creationId xmlns:a16="http://schemas.microsoft.com/office/drawing/2014/main" id="{23BA541D-5BDE-468D-8715-A1D0B8C710F4}"/>
+                <a16:creationId xmlns:a16="http://schemas.microsoft.com/office/drawing/2014/main" id="{587E86A1-BA2F-47CC-95DF-0C592371D777}"/>
               </a:ext>
             </a:extLst>
           </p:cNvPr>
@@ -3667,7 +3667,7 @@
           <p:cNvPr id="2" name="">
             <a:extLst xmlns:a="http://schemas.openxmlformats.org/drawingml/2006/main">
               <a:ext uri="{FF2B5EF4-FFF2-40B4-BE49-F238E27FC236}">
-                <a16:creationId xmlns:a16="http://schemas.microsoft.com/office/drawing/2014/main" id="{6A4159ED-F96B-4996-A658-FCC278B08A4E}"/>
+                <a16:creationId xmlns:a16="http://schemas.microsoft.com/office/drawing/2014/main" id="{1E126F6B-1B5F-45FE-B2EC-F25E8837ACD1}"/>
               </a:ext>
             </a:extLst>
           </p:cNvPr>
@@ -3707,7 +3707,7 @@
                   <a:srgbClr val="0A0F14"/>
                 </a:solidFill>
               </a:rPr>
-              <a:t>Architecture: one native entry point, many Dart tools</a:t>
+              <a:t>One native entry point, many Dart tools</a:t>
             </a:r>
           </a:p>
         </p:txBody>
@@ -3717,7 +3717,7 @@
           <p:cNvPr id="3" name="">
             <a:extLst xmlns:a="http://schemas.openxmlformats.org/drawingml/2006/main">
               <a:ext uri="{FF2B5EF4-FFF2-40B4-BE49-F238E27FC236}">
-                <a16:creationId xmlns:a16="http://schemas.microsoft.com/office/drawing/2014/main" id="{64FE0BEE-C2DD-437D-BB5D-88B3830CBA01}"/>
+                <a16:creationId xmlns:a16="http://schemas.microsoft.com/office/drawing/2014/main" id="{F66BB21C-0DEC-4A04-8092-22DD2FE90CCA}"/>
               </a:ext>
             </a:extLst>
           </p:cNvPr>
@@ -3750,7 +3750,7 @@
           <p:cNvPr id="4" name="">
             <a:extLst xmlns:a="http://schemas.openxmlformats.org/drawingml/2006/main">
               <a:ext uri="{FF2B5EF4-FFF2-40B4-BE49-F238E27FC236}">
-                <a16:creationId xmlns:a16="http://schemas.microsoft.com/office/drawing/2014/main" id="{2A980EEA-3C04-4C84-B757-20E6B279679D}"/>
+                <a16:creationId xmlns:a16="http://schemas.microsoft.com/office/drawing/2014/main" id="{A148BDF0-BD8A-48B4-879A-BA2AC59909EC}"/>
               </a:ext>
             </a:extLst>
           </p:cNvPr>
@@ -3783,7 +3783,7 @@
           <p:cNvPr id="5" name="">
             <a:extLst xmlns:a="http://schemas.openxmlformats.org/drawingml/2006/main">
               <a:ext uri="{FF2B5EF4-FFF2-40B4-BE49-F238E27FC236}">
-                <a16:creationId xmlns:a16="http://schemas.microsoft.com/office/drawing/2014/main" id="{DF512837-7D12-4BF5-ACE7-3B52BE1E25F8}"/>
+                <a16:creationId xmlns:a16="http://schemas.microsoft.com/office/drawing/2014/main" id="{33F0158B-9AE1-40F8-A951-0C12D9286187}"/>
               </a:ext>
             </a:extLst>
           </p:cNvPr>
@@ -3833,7 +3833,7 @@
           <p:cNvPr id="6" name="">
             <a:extLst xmlns:a="http://schemas.openxmlformats.org/drawingml/2006/main">
               <a:ext uri="{FF2B5EF4-FFF2-40B4-BE49-F238E27FC236}">
-                <a16:creationId xmlns:a16="http://schemas.microsoft.com/office/drawing/2014/main" id="{3F8CBB62-7B4E-4085-9E44-4B1E8D62E558}"/>
+                <a16:creationId xmlns:a16="http://schemas.microsoft.com/office/drawing/2014/main" id="{F80799A7-1428-41D3-8E29-1B85D5DCC35C}"/>
               </a:ext>
             </a:extLst>
           </p:cNvPr>
@@ -3883,7 +3883,7 @@
           <p:cNvPr id="7" name="">
             <a:extLst xmlns:a="http://schemas.openxmlformats.org/drawingml/2006/main">
               <a:ext uri="{FF2B5EF4-FFF2-40B4-BE49-F238E27FC236}">
-                <a16:creationId xmlns:a16="http://schemas.microsoft.com/office/drawing/2014/main" id="{FA75EF9E-832B-4DAB-AD37-CFA441390402}"/>
+                <a16:creationId xmlns:a16="http://schemas.microsoft.com/office/drawing/2014/main" id="{833F74A8-AC44-4B7B-B136-D0FB3B4E4B2D}"/>
               </a:ext>
             </a:extLst>
           </p:cNvPr>
@@ -3916,7 +3916,7 @@
           <p:cNvPr id="8" name="">
             <a:extLst xmlns:a="http://schemas.openxmlformats.org/drawingml/2006/main">
               <a:ext uri="{FF2B5EF4-FFF2-40B4-BE49-F238E27FC236}">
-                <a16:creationId xmlns:a16="http://schemas.microsoft.com/office/drawing/2014/main" id="{0518B384-094A-4AA4-B64F-3AF1B9E4EB4D}"/>
+                <a16:creationId xmlns:a16="http://schemas.microsoft.com/office/drawing/2014/main" id="{056D6910-727B-4ECF-B6FF-D6262B64FB45}"/>
               </a:ext>
             </a:extLst>
           </p:cNvPr>
@@ -3966,7 +3966,7 @@
           <p:cNvPr id="9" name="">
             <a:extLst xmlns:a="http://schemas.openxmlformats.org/drawingml/2006/main">
               <a:ext uri="{FF2B5EF4-FFF2-40B4-BE49-F238E27FC236}">
-                <a16:creationId xmlns:a16="http://schemas.microsoft.com/office/drawing/2014/main" id="{409289AC-B9C2-4A03-B095-274F026B874E}"/>
+                <a16:creationId xmlns:a16="http://schemas.microsoft.com/office/drawing/2014/main" id="{AE293782-1435-4FC1-B937-6C9ECDFE93A8}"/>
               </a:ext>
             </a:extLst>
           </p:cNvPr>
@@ -4016,7 +4016,7 @@
           <p:cNvPr id="10" name="">
             <a:extLst xmlns:a="http://schemas.openxmlformats.org/drawingml/2006/main">
               <a:ext uri="{FF2B5EF4-FFF2-40B4-BE49-F238E27FC236}">
-                <a16:creationId xmlns:a16="http://schemas.microsoft.com/office/drawing/2014/main" id="{A26A6E19-9D3B-4CD5-B94F-597CBD62D10D}"/>
+                <a16:creationId xmlns:a16="http://schemas.microsoft.com/office/drawing/2014/main" id="{8F139A29-C54C-49D1-86D2-348B13E94675}"/>
               </a:ext>
             </a:extLst>
           </p:cNvPr>
@@ -4049,7 +4049,7 @@
           <p:cNvPr id="11" name="">
             <a:extLst xmlns:a="http://schemas.openxmlformats.org/drawingml/2006/main">
               <a:ext uri="{FF2B5EF4-FFF2-40B4-BE49-F238E27FC236}">
-                <a16:creationId xmlns:a16="http://schemas.microsoft.com/office/drawing/2014/main" id="{40C06022-C256-4E88-8BD3-F011CD3F19AD}"/>
+                <a16:creationId xmlns:a16="http://schemas.microsoft.com/office/drawing/2014/main" id="{F4DFB008-AFD5-47F0-BF8F-D9383C39610D}"/>
               </a:ext>
             </a:extLst>
           </p:cNvPr>
@@ -4099,7 +4099,7 @@
           <p:cNvPr id="12" name="">
             <a:extLst xmlns:a="http://schemas.openxmlformats.org/drawingml/2006/main">
               <a:ext uri="{FF2B5EF4-FFF2-40B4-BE49-F238E27FC236}">
-                <a16:creationId xmlns:a16="http://schemas.microsoft.com/office/drawing/2014/main" id="{F45143E5-6DD2-4706-88A1-FC75D80506A0}"/>
+                <a16:creationId xmlns:a16="http://schemas.microsoft.com/office/drawing/2014/main" id="{DE319F71-8E8A-49F9-BC4C-89E4BCCC545E}"/>
               </a:ext>
             </a:extLst>
           </p:cNvPr>
@@ -4149,7 +4149,7 @@
           <p:cNvPr id="13" name="">
             <a:extLst xmlns:a="http://schemas.openxmlformats.org/drawingml/2006/main">
               <a:ext uri="{FF2B5EF4-FFF2-40B4-BE49-F238E27FC236}">
-                <a16:creationId xmlns:a16="http://schemas.microsoft.com/office/drawing/2014/main" id="{9E85FEEC-254E-4E56-9C5D-A7976C8F13C9}"/>
+                <a16:creationId xmlns:a16="http://schemas.microsoft.com/office/drawing/2014/main" id="{ACAD3209-2D94-4F47-A084-9765CF34953C}"/>
               </a:ext>
             </a:extLst>
           </p:cNvPr>
@@ -4182,7 +4182,7 @@
           <p:cNvPr id="14" name="">
             <a:extLst xmlns:a="http://schemas.openxmlformats.org/drawingml/2006/main">
               <a:ext uri="{FF2B5EF4-FFF2-40B4-BE49-F238E27FC236}">
-                <a16:creationId xmlns:a16="http://schemas.microsoft.com/office/drawing/2014/main" id="{A4C259F2-F010-4102-96CE-FF77852A27D8}"/>
+                <a16:creationId xmlns:a16="http://schemas.microsoft.com/office/drawing/2014/main" id="{C81D5127-C7D9-4F73-A7B9-EA30D476AD41}"/>
               </a:ext>
             </a:extLst>
           </p:cNvPr>
@@ -4232,7 +4232,7 @@
           <p:cNvPr id="15" name="">
             <a:extLst xmlns:a="http://schemas.openxmlformats.org/drawingml/2006/main">
               <a:ext uri="{FF2B5EF4-FFF2-40B4-BE49-F238E27FC236}">
-                <a16:creationId xmlns:a16="http://schemas.microsoft.com/office/drawing/2014/main" id="{6F3581AF-9E41-43A6-A6DE-B9D7EC58C2C4}"/>
+                <a16:creationId xmlns:a16="http://schemas.microsoft.com/office/drawing/2014/main" id="{B1CA230F-22EC-4EA0-8B37-39DE0CD81804}"/>
               </a:ext>
             </a:extLst>
           </p:cNvPr>
@@ -4282,7 +4282,7 @@
           <p:cNvPr id="16" name="">
             <a:extLst xmlns:a="http://schemas.openxmlformats.org/drawingml/2006/main">
               <a:ext uri="{FF2B5EF4-FFF2-40B4-BE49-F238E27FC236}">
-                <a16:creationId xmlns:a16="http://schemas.microsoft.com/office/drawing/2014/main" id="{3DEF89EA-C782-4154-9278-45046C928B22}"/>
+                <a16:creationId xmlns:a16="http://schemas.microsoft.com/office/drawing/2014/main" id="{3119C0CB-8503-4437-B5D3-03EB2E36A7F6}"/>
               </a:ext>
             </a:extLst>
           </p:cNvPr>
@@ -4313,7 +4313,7 @@
           <p:cNvPr id="17" name="">
             <a:extLst xmlns:a="http://schemas.openxmlformats.org/drawingml/2006/main">
               <a:ext uri="{FF2B5EF4-FFF2-40B4-BE49-F238E27FC236}">
-                <a16:creationId xmlns:a16="http://schemas.microsoft.com/office/drawing/2014/main" id="{5F768C9D-4862-4AB8-A2C0-1139D1AC2716}"/>
+                <a16:creationId xmlns:a16="http://schemas.microsoft.com/office/drawing/2014/main" id="{96FEAA58-68EA-4DCE-A2AC-003E82667835}"/>
               </a:ext>
             </a:extLst>
           </p:cNvPr>
@@ -4344,7 +4344,7 @@
           <p:cNvPr id="18" name="">
             <a:extLst xmlns:a="http://schemas.openxmlformats.org/drawingml/2006/main">
               <a:ext uri="{FF2B5EF4-FFF2-40B4-BE49-F238E27FC236}">
-                <a16:creationId xmlns:a16="http://schemas.microsoft.com/office/drawing/2014/main" id="{D9759CC7-C9C8-4FCA-98E0-6A6D1EB76EDF}"/>
+                <a16:creationId xmlns:a16="http://schemas.microsoft.com/office/drawing/2014/main" id="{04B1E37F-1C28-4D07-9B66-5AB909846145}"/>
               </a:ext>
             </a:extLst>
           </p:cNvPr>
@@ -4375,7 +4375,7 @@
           <p:cNvPr id="19" name="">
             <a:extLst xmlns:a="http://schemas.openxmlformats.org/drawingml/2006/main">
               <a:ext uri="{FF2B5EF4-FFF2-40B4-BE49-F238E27FC236}">
-                <a16:creationId xmlns:a16="http://schemas.microsoft.com/office/drawing/2014/main" id="{795064F1-8B96-4922-899D-864288494649}"/>
+                <a16:creationId xmlns:a16="http://schemas.microsoft.com/office/drawing/2014/main" id="{4411BB78-B272-4247-85DD-908843F21951}"/>
               </a:ext>
             </a:extLst>
           </p:cNvPr>
@@ -4403,14 +4403,14 @@
           <a:lstStyle xmlns:a="http://schemas.openxmlformats.org/drawingml/2006/main"/>
           <a:p xmlns:a="http://schemas.openxmlformats.org/drawingml/2006/main">
             <a:pPr>
-              <a:defRPr sz="1950" b="1">
-                <a:solidFill>
-                  <a:srgbClr val="0A0F14"/>
-                </a:solidFill>
-              </a:defRPr>
-            </a:pPr>
-            <a:r>
-              <a:rPr sz="1950" b="1">
+              <a:defRPr sz="1800" b="1">
+                <a:solidFill>
+                  <a:srgbClr val="0A0F14"/>
+                </a:solidFill>
+              </a:defRPr>
+            </a:pPr>
+            <a:r>
+              <a:rPr sz="1800" b="1">
                 <a:solidFill>
                   <a:srgbClr val="0A0F14"/>
                 </a:solidFill>
@@ -4425,7 +4425,7 @@
           <p:cNvPr id="20" name="">
             <a:extLst xmlns:a="http://schemas.openxmlformats.org/drawingml/2006/main">
               <a:ext uri="{FF2B5EF4-FFF2-40B4-BE49-F238E27FC236}">
-                <a16:creationId xmlns:a16="http://schemas.microsoft.com/office/drawing/2014/main" id="{030CBEDE-937D-424C-ACB7-7E5626EA5F43}"/>
+                <a16:creationId xmlns:a16="http://schemas.microsoft.com/office/drawing/2014/main" id="{9F118953-FE49-4E1B-8023-7FA4E357DD73}"/>
               </a:ext>
             </a:extLst>
           </p:cNvPr>
@@ -4473,7 +4473,7 @@
     </p:spTree>
     <p:extLst>
       <p:ext uri="{BB962C8B-B14F-4D97-AF65-F5344CB8AC3E}">
-        <p14:creationId xmlns:p14="http://schemas.microsoft.com/office/powerpoint/2010/main" val="404692823"/>
+        <p14:creationId xmlns:p14="http://schemas.microsoft.com/office/powerpoint/2010/main" val="928386206"/>
       </p:ext>
     </p:extLst>
   </p:cSld>
@@ -4504,7 +4504,7 @@
           <p:cNvPr id="1" name="">
             <a:extLst xmlns:a="http://schemas.openxmlformats.org/drawingml/2006/main">
               <a:ext uri="{FF2B5EF4-FFF2-40B4-BE49-F238E27FC236}">
-                <a16:creationId xmlns:a16="http://schemas.microsoft.com/office/drawing/2014/main" id="{063FAB0A-E540-4C76-9E9B-11087850DC39}"/>
+                <a16:creationId xmlns:a16="http://schemas.microsoft.com/office/drawing/2014/main" id="{F9A2D94E-5928-4766-B3D7-45C5A5C1DCCF}"/>
               </a:ext>
             </a:extLst>
           </p:cNvPr>
@@ -4554,7 +4554,7 @@
           <p:cNvPr id="2" name="">
             <a:extLst xmlns:a="http://schemas.openxmlformats.org/drawingml/2006/main">
               <a:ext uri="{FF2B5EF4-FFF2-40B4-BE49-F238E27FC236}">
-                <a16:creationId xmlns:a16="http://schemas.microsoft.com/office/drawing/2014/main" id="{289ED1B3-7379-4690-A32C-BBD593303C25}"/>
+                <a16:creationId xmlns:a16="http://schemas.microsoft.com/office/drawing/2014/main" id="{73B974E6-15B5-4DC4-B15C-30E683666A9F}"/>
               </a:ext>
             </a:extLst>
           </p:cNvPr>
@@ -4604,7 +4604,7 @@
           <p:cNvPr id="3" name="">
             <a:extLst xmlns:a="http://schemas.openxmlformats.org/drawingml/2006/main">
               <a:ext uri="{FF2B5EF4-FFF2-40B4-BE49-F238E27FC236}">
-                <a16:creationId xmlns:a16="http://schemas.microsoft.com/office/drawing/2014/main" id="{A5766048-8F63-4E8A-9913-B699D8A6CFF6}"/>
+                <a16:creationId xmlns:a16="http://schemas.microsoft.com/office/drawing/2014/main" id="{1822754A-1548-458C-8AE3-30272B9D931C}"/>
               </a:ext>
             </a:extLst>
           </p:cNvPr>
@@ -4637,7 +4637,7 @@
           <p:cNvPr id="4" name="">
             <a:extLst xmlns:a="http://schemas.openxmlformats.org/drawingml/2006/main">
               <a:ext uri="{FF2B5EF4-FFF2-40B4-BE49-F238E27FC236}">
-                <a16:creationId xmlns:a16="http://schemas.microsoft.com/office/drawing/2014/main" id="{06B130EB-92FD-454D-996D-D1ECAFB5244F}"/>
+                <a16:creationId xmlns:a16="http://schemas.microsoft.com/office/drawing/2014/main" id="{D8124316-D0B2-4985-9D90-53DC12E62FD3}"/>
               </a:ext>
             </a:extLst>
           </p:cNvPr>
@@ -4670,7 +4670,7 @@
           <p:cNvPr id="5" name="">
             <a:extLst xmlns:a="http://schemas.openxmlformats.org/drawingml/2006/main">
               <a:ext uri="{FF2B5EF4-FFF2-40B4-BE49-F238E27FC236}">
-                <a16:creationId xmlns:a16="http://schemas.microsoft.com/office/drawing/2014/main" id="{46DF0EDE-A838-4D4A-88BB-9E5996CC77F9}"/>
+                <a16:creationId xmlns:a16="http://schemas.microsoft.com/office/drawing/2014/main" id="{15CAB2BF-0FB3-4285-9DE1-A906CBE854A6}"/>
               </a:ext>
             </a:extLst>
           </p:cNvPr>
@@ -4941,7 +4941,7 @@
           <p:cNvPr id="6" name="">
             <a:extLst xmlns:a="http://schemas.openxmlformats.org/drawingml/2006/main">
               <a:ext uri="{FF2B5EF4-FFF2-40B4-BE49-F238E27FC236}">
-                <a16:creationId xmlns:a16="http://schemas.microsoft.com/office/drawing/2014/main" id="{04B0D64E-6489-4765-A541-C3993A5108D2}"/>
+                <a16:creationId xmlns:a16="http://schemas.microsoft.com/office/drawing/2014/main" id="{009C782A-FD01-4244-9706-436075C31F26}"/>
               </a:ext>
             </a:extLst>
           </p:cNvPr>
@@ -4974,7 +4974,7 @@
           <p:cNvPr id="7" name="">
             <a:extLst xmlns:a="http://schemas.openxmlformats.org/drawingml/2006/main">
               <a:ext uri="{FF2B5EF4-FFF2-40B4-BE49-F238E27FC236}">
-                <a16:creationId xmlns:a16="http://schemas.microsoft.com/office/drawing/2014/main" id="{B561CEB8-6F86-4CEE-BBA4-990071A0394F}"/>
+                <a16:creationId xmlns:a16="http://schemas.microsoft.com/office/drawing/2014/main" id="{07824F43-1F78-442E-A102-3A713DE76D67}"/>
               </a:ext>
             </a:extLst>
           </p:cNvPr>
@@ -5024,7 +5024,7 @@
           <p:cNvPr id="8" name="">
             <a:extLst xmlns:a="http://schemas.openxmlformats.org/drawingml/2006/main">
               <a:ext uri="{FF2B5EF4-FFF2-40B4-BE49-F238E27FC236}">
-                <a16:creationId xmlns:a16="http://schemas.microsoft.com/office/drawing/2014/main" id="{F9C0F51E-DF12-4D95-83E0-933307539DDD}"/>
+                <a16:creationId xmlns:a16="http://schemas.microsoft.com/office/drawing/2014/main" id="{71139E9F-06D0-427D-827C-35F82E1316C9}"/>
               </a:ext>
             </a:extLst>
           </p:cNvPr>
@@ -5057,7 +5057,7 @@
           <p:cNvPr id="9" name="">
             <a:extLst xmlns:a="http://schemas.openxmlformats.org/drawingml/2006/main">
               <a:ext uri="{FF2B5EF4-FFF2-40B4-BE49-F238E27FC236}">
-                <a16:creationId xmlns:a16="http://schemas.microsoft.com/office/drawing/2014/main" id="{CB7A1FA9-BC0D-4499-BE5E-A076D932CF34}"/>
+                <a16:creationId xmlns:a16="http://schemas.microsoft.com/office/drawing/2014/main" id="{D6310BA1-9168-43A8-917F-03E3474506A9}"/>
               </a:ext>
             </a:extLst>
           </p:cNvPr>
@@ -5107,7 +5107,7 @@
           <p:cNvPr id="10" name="">
             <a:extLst xmlns:a="http://schemas.openxmlformats.org/drawingml/2006/main">
               <a:ext uri="{FF2B5EF4-FFF2-40B4-BE49-F238E27FC236}">
-                <a16:creationId xmlns:a16="http://schemas.microsoft.com/office/drawing/2014/main" id="{FDDD1B6C-50DD-4001-B172-58148C6C075A}"/>
+                <a16:creationId xmlns:a16="http://schemas.microsoft.com/office/drawing/2014/main" id="{CD7D526E-E40F-43D0-9DD9-4A70355D7F4B}"/>
               </a:ext>
             </a:extLst>
           </p:cNvPr>
@@ -5140,7 +5140,7 @@
           <p:cNvPr id="11" name="">
             <a:extLst xmlns:a="http://schemas.openxmlformats.org/drawingml/2006/main">
               <a:ext uri="{FF2B5EF4-FFF2-40B4-BE49-F238E27FC236}">
-                <a16:creationId xmlns:a16="http://schemas.microsoft.com/office/drawing/2014/main" id="{194861F5-B6D3-493C-BF6A-2536BE8DA3F1}"/>
+                <a16:creationId xmlns:a16="http://schemas.microsoft.com/office/drawing/2014/main" id="{8918EC66-F8BA-4EFB-B205-CB97DB7295D9}"/>
               </a:ext>
             </a:extLst>
           </p:cNvPr>
@@ -5190,7 +5190,7 @@
           <p:cNvPr id="12" name="">
             <a:extLst xmlns:a="http://schemas.openxmlformats.org/drawingml/2006/main">
               <a:ext uri="{FF2B5EF4-FFF2-40B4-BE49-F238E27FC236}">
-                <a16:creationId xmlns:a16="http://schemas.microsoft.com/office/drawing/2014/main" id="{B6A7C91E-DEFD-413E-9442-33D366B22CF9}"/>
+                <a16:creationId xmlns:a16="http://schemas.microsoft.com/office/drawing/2014/main" id="{62832205-8FDD-4752-938A-26F5D912BFE6}"/>
               </a:ext>
             </a:extLst>
           </p:cNvPr>
@@ -5238,7 +5238,7 @@
     </p:spTree>
     <p:extLst>
       <p:ext uri="{BB962C8B-B14F-4D97-AF65-F5344CB8AC3E}">
-        <p14:creationId xmlns:p14="http://schemas.microsoft.com/office/powerpoint/2010/main" val="1278609222"/>
+        <p14:creationId xmlns:p14="http://schemas.microsoft.com/office/powerpoint/2010/main" val="2042517244"/>
       </p:ext>
     </p:extLst>
   </p:cSld>
@@ -5269,7 +5269,7 @@
           <p:cNvPr id="1" name="">
             <a:extLst xmlns:a="http://schemas.openxmlformats.org/drawingml/2006/main">
               <a:ext uri="{FF2B5EF4-FFF2-40B4-BE49-F238E27FC236}">
-                <a16:creationId xmlns:a16="http://schemas.microsoft.com/office/drawing/2014/main" id="{659AFB4C-4B5B-4F8A-9B1E-3C51F01B37D1}"/>
+                <a16:creationId xmlns:a16="http://schemas.microsoft.com/office/drawing/2014/main" id="{9A5B2645-FEE1-44ED-AE9A-19961C4AC703}"/>
               </a:ext>
             </a:extLst>
           </p:cNvPr>
@@ -5319,7 +5319,7 @@
           <p:cNvPr id="2" name="">
             <a:extLst xmlns:a="http://schemas.openxmlformats.org/drawingml/2006/main">
               <a:ext uri="{FF2B5EF4-FFF2-40B4-BE49-F238E27FC236}">
-                <a16:creationId xmlns:a16="http://schemas.microsoft.com/office/drawing/2014/main" id="{792D2892-0F72-420F-ACBB-CA69D1301049}"/>
+                <a16:creationId xmlns:a16="http://schemas.microsoft.com/office/drawing/2014/main" id="{B47E7B06-5540-49B9-922F-2559910BF4F3}"/>
               </a:ext>
             </a:extLst>
           </p:cNvPr>
@@ -5369,7 +5369,7 @@
           <p:cNvPr id="3" name="">
             <a:extLst xmlns:a="http://schemas.openxmlformats.org/drawingml/2006/main">
               <a:ext uri="{FF2B5EF4-FFF2-40B4-BE49-F238E27FC236}">
-                <a16:creationId xmlns:a16="http://schemas.microsoft.com/office/drawing/2014/main" id="{119D6D3A-F2D8-4ED7-8311-C20E90833087}"/>
+                <a16:creationId xmlns:a16="http://schemas.microsoft.com/office/drawing/2014/main" id="{B8118D33-5BA7-4C93-A214-C49B0F502088}"/>
               </a:ext>
             </a:extLst>
           </p:cNvPr>
@@ -5402,7 +5402,7 @@
           <p:cNvPr id="4" name="">
             <a:extLst xmlns:a="http://schemas.openxmlformats.org/drawingml/2006/main">
               <a:ext uri="{FF2B5EF4-FFF2-40B4-BE49-F238E27FC236}">
-                <a16:creationId xmlns:a16="http://schemas.microsoft.com/office/drawing/2014/main" id="{7BC9B314-ED0F-457F-94B8-E0DAB527AA0B}"/>
+                <a16:creationId xmlns:a16="http://schemas.microsoft.com/office/drawing/2014/main" id="{910168DC-1243-4A06-BAFC-BBFDBA6E794A}"/>
               </a:ext>
             </a:extLst>
           </p:cNvPr>
@@ -5435,7 +5435,7 @@
           <p:cNvPr id="5" name="">
             <a:extLst xmlns:a="http://schemas.openxmlformats.org/drawingml/2006/main">
               <a:ext uri="{FF2B5EF4-FFF2-40B4-BE49-F238E27FC236}">
-                <a16:creationId xmlns:a16="http://schemas.microsoft.com/office/drawing/2014/main" id="{755EEF28-0838-42C9-9E70-24DFA436BB32}"/>
+                <a16:creationId xmlns:a16="http://schemas.microsoft.com/office/drawing/2014/main" id="{CDC3221A-2EFC-48E9-BCB4-CAD3DAC734E0}"/>
               </a:ext>
             </a:extLst>
           </p:cNvPr>
@@ -5580,7 +5580,7 @@
           <p:cNvPr id="6" name="">
             <a:extLst xmlns:a="http://schemas.openxmlformats.org/drawingml/2006/main">
               <a:ext uri="{FF2B5EF4-FFF2-40B4-BE49-F238E27FC236}">
-                <a16:creationId xmlns:a16="http://schemas.microsoft.com/office/drawing/2014/main" id="{1E397A3A-B45B-463B-A1B2-8C5EF0C62BA8}"/>
+                <a16:creationId xmlns:a16="http://schemas.microsoft.com/office/drawing/2014/main" id="{006F8D4F-F952-4EB2-895C-456AA7CF2BBD}"/>
               </a:ext>
             </a:extLst>
           </p:cNvPr>
@@ -5592,7 +5592,7 @@
         <p:spPr>
           <a:xfrm xmlns:a="http://schemas.openxmlformats.org/drawingml/2006/main">
             <a:off x="6457950" y="2038350"/>
-            <a:ext cx="4476750" cy="2476500"/>
+            <a:ext cx="4762500" cy="2476500"/>
           </a:xfrm>
           <a:prstGeom xmlns:a="http://schemas.openxmlformats.org/drawingml/2006/main" prst="rect">
             <a:avLst/>
@@ -5613,47 +5613,47 @@
           <p:cNvPr id="7" name="">
             <a:extLst xmlns:a="http://schemas.openxmlformats.org/drawingml/2006/main">
               <a:ext uri="{FF2B5EF4-FFF2-40B4-BE49-F238E27FC236}">
-                <a16:creationId xmlns:a16="http://schemas.microsoft.com/office/drawing/2014/main" id="{A13EE422-FEF7-4D41-A1C8-93E0EF354CC3}"/>
-              </a:ext>
-            </a:extLst>
-          </p:cNvPr>
-          <p:cNvSpPr>
-            <a:spLocks xmlns:a="http://schemas.openxmlformats.org/drawingml/2006/main" noGrp="1"/>
-          </p:cNvSpPr>
-          <p:nvPr/>
-        </p:nvSpPr>
-        <p:spPr>
-          <a:xfrm xmlns:a="http://schemas.openxmlformats.org/drawingml/2006/main">
-            <a:off x="6877050" y="2476500"/>
-            <a:ext cx="3714750" cy="1333500"/>
-          </a:xfrm>
-          <a:prstGeom xmlns:a="http://schemas.openxmlformats.org/drawingml/2006/main" prst="rect">
-            <a:avLst/>
-          </a:prstGeom>
-          <a:noFill xmlns:a="http://schemas.openxmlformats.org/drawingml/2006/main"/>
-          <a:ln xmlns:a="http://schemas.openxmlformats.org/drawingml/2006/main" w="0">
-            <a:noFill/>
-            <a:prstDash val="solid"/>
-          </a:ln>
-        </p:spPr>
-        <p:txBody>
-          <a:bodyPr xmlns:a="http://schemas.openxmlformats.org/drawingml/2006/main"/>
-          <a:lstStyle xmlns:a="http://schemas.openxmlformats.org/drawingml/2006/main"/>
-          <a:p xmlns:a="http://schemas.openxmlformats.org/drawingml/2006/main">
-            <a:pPr>
-              <a:defRPr sz="1950" b="1">
-                <a:solidFill>
-                  <a:srgbClr val="0A0F14"/>
-                </a:solidFill>
-              </a:defRPr>
-            </a:pPr>
-            <a:r>
-              <a:rPr sz="1950" b="1">
-                <a:solidFill>
-                  <a:srgbClr val="0A0F14"/>
-                </a:solidFill>
-              </a:rPr>
-              <a:t>The plugin contributes the Android service, metadata XML, App Functions permission, MethodChannel, KSP setup, and bridge registration base class.</a:t>
+                <a16:creationId xmlns:a16="http://schemas.microsoft.com/office/drawing/2014/main" id="{F9ABDB84-E148-4470-B962-ADEC2F348845}"/>
+              </a:ext>
+            </a:extLst>
+          </p:cNvPr>
+          <p:cNvSpPr>
+            <a:spLocks xmlns:a="http://schemas.openxmlformats.org/drawingml/2006/main" noGrp="1"/>
+          </p:cNvSpPr>
+          <p:nvPr/>
+        </p:nvSpPr>
+        <p:spPr>
+          <a:xfrm xmlns:a="http://schemas.openxmlformats.org/drawingml/2006/main">
+            <a:off x="6877050" y="2419350"/>
+            <a:ext cx="3905250" cy="1066800"/>
+          </a:xfrm>
+          <a:prstGeom xmlns:a="http://schemas.openxmlformats.org/drawingml/2006/main" prst="rect">
+            <a:avLst/>
+          </a:prstGeom>
+          <a:noFill xmlns:a="http://schemas.openxmlformats.org/drawingml/2006/main"/>
+          <a:ln xmlns:a="http://schemas.openxmlformats.org/drawingml/2006/main" w="0">
+            <a:noFill/>
+            <a:prstDash val="solid"/>
+          </a:ln>
+        </p:spPr>
+        <p:txBody>
+          <a:bodyPr xmlns:a="http://schemas.openxmlformats.org/drawingml/2006/main"/>
+          <a:lstStyle xmlns:a="http://schemas.openxmlformats.org/drawingml/2006/main"/>
+          <a:p xmlns:a="http://schemas.openxmlformats.org/drawingml/2006/main">
+            <a:pPr>
+              <a:defRPr sz="1800" b="1">
+                <a:solidFill>
+                  <a:srgbClr val="0A0F14"/>
+                </a:solidFill>
+              </a:defRPr>
+            </a:pPr>
+            <a:r>
+              <a:rPr sz="1800" b="1">
+                <a:solidFill>
+                  <a:srgbClr val="0A0F14"/>
+                </a:solidFill>
+              </a:rPr>
+              <a:t>The plugin supplies service metadata, permission, MethodChannel, KSP setup, and bridge registration.</a:t>
             </a:r>
           </a:p>
         </p:txBody>
@@ -5663,19 +5663,19 @@
           <p:cNvPr id="8" name="">
             <a:extLst xmlns:a="http://schemas.openxmlformats.org/drawingml/2006/main">
               <a:ext uri="{FF2B5EF4-FFF2-40B4-BE49-F238E27FC236}">
-                <a16:creationId xmlns:a16="http://schemas.microsoft.com/office/drawing/2014/main" id="{7223149D-523B-419E-870D-C683EAE6624F}"/>
-              </a:ext>
-            </a:extLst>
-          </p:cNvPr>
-          <p:cNvSpPr>
-            <a:spLocks xmlns:a="http://schemas.openxmlformats.org/drawingml/2006/main" noGrp="1"/>
-          </p:cNvSpPr>
-          <p:nvPr/>
-        </p:nvSpPr>
-        <p:spPr>
-          <a:xfrm xmlns:a="http://schemas.openxmlformats.org/drawingml/2006/main">
-            <a:off x="6877050" y="3981450"/>
-            <a:ext cx="3543300" cy="438150"/>
+                <a16:creationId xmlns:a16="http://schemas.microsoft.com/office/drawing/2014/main" id="{F5F059C7-624B-4F2E-B5FA-1B3DB4A406FD}"/>
+              </a:ext>
+            </a:extLst>
+          </p:cNvPr>
+          <p:cNvSpPr>
+            <a:spLocks xmlns:a="http://schemas.openxmlformats.org/drawingml/2006/main" noGrp="1"/>
+          </p:cNvSpPr>
+          <p:nvPr/>
+        </p:nvSpPr>
+        <p:spPr>
+          <a:xfrm xmlns:a="http://schemas.openxmlformats.org/drawingml/2006/main">
+            <a:off x="6877050" y="3829050"/>
+            <a:ext cx="3676650" cy="514350"/>
           </a:xfrm>
           <a:prstGeom xmlns:a="http://schemas.openxmlformats.org/drawingml/2006/main" prst="rect">
             <a:avLst/>
@@ -5703,7 +5703,7 @@
                   <a:srgbClr val="4B5563"/>
                 </a:solidFill>
               </a:rPr>
-              <a:t>Host apps only provide app-specific descriptions and extend the base Application class.</a:t>
+              <a:t>Host apps add descriptions and extend the base Application class.</a:t>
             </a:r>
           </a:p>
         </p:txBody>
@@ -5713,7 +5713,7 @@
           <p:cNvPr id="9" name="">
             <a:extLst xmlns:a="http://schemas.openxmlformats.org/drawingml/2006/main">
               <a:ext uri="{FF2B5EF4-FFF2-40B4-BE49-F238E27FC236}">
-                <a16:creationId xmlns:a16="http://schemas.microsoft.com/office/drawing/2014/main" id="{EA3BA1B7-0CB6-455A-8892-5ACF54E8BEB1}"/>
+                <a16:creationId xmlns:a16="http://schemas.microsoft.com/office/drawing/2014/main" id="{D9F4CF12-9B04-4885-BDF3-8DD38790F594}"/>
               </a:ext>
             </a:extLst>
           </p:cNvPr>
@@ -5761,7 +5761,7 @@
     </p:spTree>
     <p:extLst>
       <p:ext uri="{BB962C8B-B14F-4D97-AF65-F5344CB8AC3E}">
-        <p14:creationId xmlns:p14="http://schemas.microsoft.com/office/powerpoint/2010/main" val="1210564263"/>
+        <p14:creationId xmlns:p14="http://schemas.microsoft.com/office/powerpoint/2010/main" val="1836851382"/>
       </p:ext>
     </p:extLst>
   </p:cSld>
@@ -5792,7 +5792,7 @@
           <p:cNvPr id="1" name="">
             <a:extLst xmlns:a="http://schemas.openxmlformats.org/drawingml/2006/main">
               <a:ext uri="{FF2B5EF4-FFF2-40B4-BE49-F238E27FC236}">
-                <a16:creationId xmlns:a16="http://schemas.microsoft.com/office/drawing/2014/main" id="{4AE563BF-A8ED-4A28-8485-CBDB777DED8D}"/>
+                <a16:creationId xmlns:a16="http://schemas.microsoft.com/office/drawing/2014/main" id="{DDC43A22-4CE2-4296-B32F-389101174A49}"/>
               </a:ext>
             </a:extLst>
           </p:cNvPr>
@@ -5842,7 +5842,7 @@
           <p:cNvPr id="2" name="">
             <a:extLst xmlns:a="http://schemas.openxmlformats.org/drawingml/2006/main">
               <a:ext uri="{FF2B5EF4-FFF2-40B4-BE49-F238E27FC236}">
-                <a16:creationId xmlns:a16="http://schemas.microsoft.com/office/drawing/2014/main" id="{D0220F20-507D-42EA-87E2-8208B2176E19}"/>
+                <a16:creationId xmlns:a16="http://schemas.microsoft.com/office/drawing/2014/main" id="{2FF5D160-4446-425E-AE35-026AAE8BF206}"/>
               </a:ext>
             </a:extLst>
           </p:cNvPr>
@@ -5892,7 +5892,7 @@
           <p:cNvPr id="3" name="">
             <a:extLst xmlns:a="http://schemas.openxmlformats.org/drawingml/2006/main">
               <a:ext uri="{FF2B5EF4-FFF2-40B4-BE49-F238E27FC236}">
-                <a16:creationId xmlns:a16="http://schemas.microsoft.com/office/drawing/2014/main" id="{3B59BBD9-AABB-4B20-87DC-3D5D20736028}"/>
+                <a16:creationId xmlns:a16="http://schemas.microsoft.com/office/drawing/2014/main" id="{A82792A0-FD8F-417A-A633-A9FBC3A4F519}"/>
               </a:ext>
             </a:extLst>
           </p:cNvPr>
@@ -5925,7 +5925,7 @@
           <p:cNvPr id="4" name="">
             <a:extLst xmlns:a="http://schemas.openxmlformats.org/drawingml/2006/main">
               <a:ext uri="{FF2B5EF4-FFF2-40B4-BE49-F238E27FC236}">
-                <a16:creationId xmlns:a16="http://schemas.microsoft.com/office/drawing/2014/main" id="{D6595B5C-61D7-409A-A179-9CB140B018AC}"/>
+                <a16:creationId xmlns:a16="http://schemas.microsoft.com/office/drawing/2014/main" id="{D605465B-AA84-4EEC-B3C1-22C546ECEF49}"/>
               </a:ext>
             </a:extLst>
           </p:cNvPr>
@@ -5958,7 +5958,7 @@
           <p:cNvPr id="5" name="">
             <a:extLst xmlns:a="http://schemas.openxmlformats.org/drawingml/2006/main">
               <a:ext uri="{FF2B5EF4-FFF2-40B4-BE49-F238E27FC236}">
-                <a16:creationId xmlns:a16="http://schemas.microsoft.com/office/drawing/2014/main" id="{C579E00B-3113-4AEA-B15B-ED4B69BE3FCF}"/>
+                <a16:creationId xmlns:a16="http://schemas.microsoft.com/office/drawing/2014/main" id="{D69E6DF4-9D87-4DA1-918B-31B72186223B}"/>
               </a:ext>
             </a:extLst>
           </p:cNvPr>
@@ -6008,7 +6008,7 @@
           <p:cNvPr id="6" name="">
             <a:extLst xmlns:a="http://schemas.openxmlformats.org/drawingml/2006/main">
               <a:ext uri="{FF2B5EF4-FFF2-40B4-BE49-F238E27FC236}">
-                <a16:creationId xmlns:a16="http://schemas.microsoft.com/office/drawing/2014/main" id="{18231EEE-7E68-4F74-B331-3B379607D9F1}"/>
+                <a16:creationId xmlns:a16="http://schemas.microsoft.com/office/drawing/2014/main" id="{4F1F659C-35D9-43CB-BDAA-0A9A54D8192B}"/>
               </a:ext>
             </a:extLst>
           </p:cNvPr>
@@ -6058,7 +6058,7 @@
           <p:cNvPr id="7" name="">
             <a:extLst xmlns:a="http://schemas.openxmlformats.org/drawingml/2006/main">
               <a:ext uri="{FF2B5EF4-FFF2-40B4-BE49-F238E27FC236}">
-                <a16:creationId xmlns:a16="http://schemas.microsoft.com/office/drawing/2014/main" id="{613D25C2-5BBD-40CE-8A10-D71AA0300116}"/>
+                <a16:creationId xmlns:a16="http://schemas.microsoft.com/office/drawing/2014/main" id="{CFF8BF2F-94B1-44BA-B7D7-0A47E4A5115C}"/>
               </a:ext>
             </a:extLst>
           </p:cNvPr>
@@ -6108,7 +6108,7 @@
           <p:cNvPr id="8" name="">
             <a:extLst xmlns:a="http://schemas.openxmlformats.org/drawingml/2006/main">
               <a:ext uri="{FF2B5EF4-FFF2-40B4-BE49-F238E27FC236}">
-                <a16:creationId xmlns:a16="http://schemas.microsoft.com/office/drawing/2014/main" id="{0D15CEEE-8ADB-4178-AA32-F2A1E0E485A2}"/>
+                <a16:creationId xmlns:a16="http://schemas.microsoft.com/office/drawing/2014/main" id="{7F017439-47E1-4916-BA3E-325C59414B73}"/>
               </a:ext>
             </a:extLst>
           </p:cNvPr>
@@ -6139,7 +6139,7 @@
           <p:cNvPr id="9" name="">
             <a:extLst xmlns:a="http://schemas.openxmlformats.org/drawingml/2006/main">
               <a:ext uri="{FF2B5EF4-FFF2-40B4-BE49-F238E27FC236}">
-                <a16:creationId xmlns:a16="http://schemas.microsoft.com/office/drawing/2014/main" id="{91861C9D-DD97-4235-BFD2-3C09B5B9E6CB}"/>
+                <a16:creationId xmlns:a16="http://schemas.microsoft.com/office/drawing/2014/main" id="{217DA3FA-5115-4396-AE0D-E2F0352B0B8B}"/>
               </a:ext>
             </a:extLst>
           </p:cNvPr>
@@ -6172,7 +6172,7 @@
           <p:cNvPr id="10" name="">
             <a:extLst xmlns:a="http://schemas.openxmlformats.org/drawingml/2006/main">
               <a:ext uri="{FF2B5EF4-FFF2-40B4-BE49-F238E27FC236}">
-                <a16:creationId xmlns:a16="http://schemas.microsoft.com/office/drawing/2014/main" id="{6D2D1A38-A35E-42E3-8E21-545EE1CEB55B}"/>
+                <a16:creationId xmlns:a16="http://schemas.microsoft.com/office/drawing/2014/main" id="{48DBD36A-AB10-4E1D-87BB-BC17CC7A021F}"/>
               </a:ext>
             </a:extLst>
           </p:cNvPr>
@@ -6222,7 +6222,7 @@
           <p:cNvPr id="11" name="">
             <a:extLst xmlns:a="http://schemas.openxmlformats.org/drawingml/2006/main">
               <a:ext uri="{FF2B5EF4-FFF2-40B4-BE49-F238E27FC236}">
-                <a16:creationId xmlns:a16="http://schemas.microsoft.com/office/drawing/2014/main" id="{7B66E98D-5302-4114-85FA-D17E252371D6}"/>
+                <a16:creationId xmlns:a16="http://schemas.microsoft.com/office/drawing/2014/main" id="{EED54DA6-0EF3-438D-A2F1-9833D4DF1263}"/>
               </a:ext>
             </a:extLst>
           </p:cNvPr>
@@ -6272,7 +6272,7 @@
           <p:cNvPr id="12" name="">
             <a:extLst xmlns:a="http://schemas.openxmlformats.org/drawingml/2006/main">
               <a:ext uri="{FF2B5EF4-FFF2-40B4-BE49-F238E27FC236}">
-                <a16:creationId xmlns:a16="http://schemas.microsoft.com/office/drawing/2014/main" id="{3DDD83C0-8B65-4839-B7BE-AA4442AC20F8}"/>
+                <a16:creationId xmlns:a16="http://schemas.microsoft.com/office/drawing/2014/main" id="{2CCF722C-D599-4EA1-9644-A614977B4CE3}"/>
               </a:ext>
             </a:extLst>
           </p:cNvPr>
@@ -6322,7 +6322,7 @@
           <p:cNvPr id="13" name="">
             <a:extLst xmlns:a="http://schemas.openxmlformats.org/drawingml/2006/main">
               <a:ext uri="{FF2B5EF4-FFF2-40B4-BE49-F238E27FC236}">
-                <a16:creationId xmlns:a16="http://schemas.microsoft.com/office/drawing/2014/main" id="{5F925DA5-6809-4B12-82C1-65768F84A192}"/>
+                <a16:creationId xmlns:a16="http://schemas.microsoft.com/office/drawing/2014/main" id="{A5976B0E-62D3-4A1C-8455-246C412FF7ED}"/>
               </a:ext>
             </a:extLst>
           </p:cNvPr>
@@ -6353,7 +6353,7 @@
           <p:cNvPr id="14" name="">
             <a:extLst xmlns:a="http://schemas.openxmlformats.org/drawingml/2006/main">
               <a:ext uri="{FF2B5EF4-FFF2-40B4-BE49-F238E27FC236}">
-                <a16:creationId xmlns:a16="http://schemas.microsoft.com/office/drawing/2014/main" id="{B123214B-5063-491C-AD59-F47FEF000180}"/>
+                <a16:creationId xmlns:a16="http://schemas.microsoft.com/office/drawing/2014/main" id="{D3D79397-9299-48CD-9AE1-B6192C2CBD5C}"/>
               </a:ext>
             </a:extLst>
           </p:cNvPr>
@@ -6386,7 +6386,7 @@
           <p:cNvPr id="15" name="">
             <a:extLst xmlns:a="http://schemas.openxmlformats.org/drawingml/2006/main">
               <a:ext uri="{FF2B5EF4-FFF2-40B4-BE49-F238E27FC236}">
-                <a16:creationId xmlns:a16="http://schemas.microsoft.com/office/drawing/2014/main" id="{5D625F99-AB82-4B0B-9372-6D1B0111954C}"/>
+                <a16:creationId xmlns:a16="http://schemas.microsoft.com/office/drawing/2014/main" id="{828C5C5A-E97B-40ED-B2AF-C3179DD9F95B}"/>
               </a:ext>
             </a:extLst>
           </p:cNvPr>
@@ -6436,7 +6436,7 @@
           <p:cNvPr id="16" name="">
             <a:extLst xmlns:a="http://schemas.openxmlformats.org/drawingml/2006/main">
               <a:ext uri="{FF2B5EF4-FFF2-40B4-BE49-F238E27FC236}">
-                <a16:creationId xmlns:a16="http://schemas.microsoft.com/office/drawing/2014/main" id="{B5AB701A-69D5-488B-9091-4ADAAADCC2B8}"/>
+                <a16:creationId xmlns:a16="http://schemas.microsoft.com/office/drawing/2014/main" id="{97C370A7-1BEC-4F03-8AD8-6FC394B20E22}"/>
               </a:ext>
             </a:extLst>
           </p:cNvPr>
@@ -6486,7 +6486,7 @@
           <p:cNvPr id="17" name="">
             <a:extLst xmlns:a="http://schemas.openxmlformats.org/drawingml/2006/main">
               <a:ext uri="{FF2B5EF4-FFF2-40B4-BE49-F238E27FC236}">
-                <a16:creationId xmlns:a16="http://schemas.microsoft.com/office/drawing/2014/main" id="{1B0EA825-1014-4590-8084-6A0AB7545A0A}"/>
+                <a16:creationId xmlns:a16="http://schemas.microsoft.com/office/drawing/2014/main" id="{FD4E055E-CE89-4038-AA63-F7948F81805A}"/>
               </a:ext>
             </a:extLst>
           </p:cNvPr>
@@ -6536,7 +6536,7 @@
           <p:cNvPr id="18" name="">
             <a:extLst xmlns:a="http://schemas.openxmlformats.org/drawingml/2006/main">
               <a:ext uri="{FF2B5EF4-FFF2-40B4-BE49-F238E27FC236}">
-                <a16:creationId xmlns:a16="http://schemas.microsoft.com/office/drawing/2014/main" id="{7B89FDFA-784F-4BBC-B2D5-F52A7469E174}"/>
+                <a16:creationId xmlns:a16="http://schemas.microsoft.com/office/drawing/2014/main" id="{68FB1C96-0523-44C3-BA87-61AA549933FF}"/>
               </a:ext>
             </a:extLst>
           </p:cNvPr>
@@ -6567,7 +6567,7 @@
           <p:cNvPr id="19" name="">
             <a:extLst xmlns:a="http://schemas.openxmlformats.org/drawingml/2006/main">
               <a:ext uri="{FF2B5EF4-FFF2-40B4-BE49-F238E27FC236}">
-                <a16:creationId xmlns:a16="http://schemas.microsoft.com/office/drawing/2014/main" id="{A5246E6F-D773-467B-9D35-B6CC7B68A69D}"/>
+                <a16:creationId xmlns:a16="http://schemas.microsoft.com/office/drawing/2014/main" id="{807CA643-E7A9-4C68-8BA6-76109573BC2E}"/>
               </a:ext>
             </a:extLst>
           </p:cNvPr>
@@ -6600,7 +6600,7 @@
           <p:cNvPr id="20" name="">
             <a:extLst xmlns:a="http://schemas.openxmlformats.org/drawingml/2006/main">
               <a:ext uri="{FF2B5EF4-FFF2-40B4-BE49-F238E27FC236}">
-                <a16:creationId xmlns:a16="http://schemas.microsoft.com/office/drawing/2014/main" id="{304C872F-D6C7-432F-8AB4-CC3F7DEDAEAD}"/>
+                <a16:creationId xmlns:a16="http://schemas.microsoft.com/office/drawing/2014/main" id="{56ED76AD-9A74-4C72-A369-1B0E7E7A7859}"/>
               </a:ext>
             </a:extLst>
           </p:cNvPr>
@@ -6650,7 +6650,7 @@
           <p:cNvPr id="21" name="">
             <a:extLst xmlns:a="http://schemas.openxmlformats.org/drawingml/2006/main">
               <a:ext uri="{FF2B5EF4-FFF2-40B4-BE49-F238E27FC236}">
-                <a16:creationId xmlns:a16="http://schemas.microsoft.com/office/drawing/2014/main" id="{172727FD-3945-413E-A9BD-47AE6B4F6F5C}"/>
+                <a16:creationId xmlns:a16="http://schemas.microsoft.com/office/drawing/2014/main" id="{C496CFA6-AC44-4096-A8D4-BA97E869B08E}"/>
               </a:ext>
             </a:extLst>
           </p:cNvPr>
@@ -6700,7 +6700,7 @@
           <p:cNvPr id="22" name="">
             <a:extLst xmlns:a="http://schemas.openxmlformats.org/drawingml/2006/main">
               <a:ext uri="{FF2B5EF4-FFF2-40B4-BE49-F238E27FC236}">
-                <a16:creationId xmlns:a16="http://schemas.microsoft.com/office/drawing/2014/main" id="{CBE188C2-6AB7-4BBC-B299-9C8353821924}"/>
+                <a16:creationId xmlns:a16="http://schemas.microsoft.com/office/drawing/2014/main" id="{46D2AB3D-D507-474B-81DC-6A69FAF20D78}"/>
               </a:ext>
             </a:extLst>
           </p:cNvPr>
@@ -6750,7 +6750,7 @@
           <p:cNvPr id="23" name="">
             <a:extLst xmlns:a="http://schemas.openxmlformats.org/drawingml/2006/main">
               <a:ext uri="{FF2B5EF4-FFF2-40B4-BE49-F238E27FC236}">
-                <a16:creationId xmlns:a16="http://schemas.microsoft.com/office/drawing/2014/main" id="{FA8CE424-7269-4E97-AD9D-126BDA76DF11}"/>
+                <a16:creationId xmlns:a16="http://schemas.microsoft.com/office/drawing/2014/main" id="{9E144FA1-CCE1-48E2-89C2-BC52A8BB0C8C}"/>
               </a:ext>
             </a:extLst>
           </p:cNvPr>
@@ -6800,7 +6800,7 @@
           <p:cNvPr id="24" name="">
             <a:extLst xmlns:a="http://schemas.openxmlformats.org/drawingml/2006/main">
               <a:ext uri="{FF2B5EF4-FFF2-40B4-BE49-F238E27FC236}">
-                <a16:creationId xmlns:a16="http://schemas.microsoft.com/office/drawing/2014/main" id="{D41EDE06-7B13-4053-B733-41D2C99B3DDC}"/>
+                <a16:creationId xmlns:a16="http://schemas.microsoft.com/office/drawing/2014/main" id="{49B9B310-6760-4BA3-BF32-26A102EFB60E}"/>
               </a:ext>
             </a:extLst>
           </p:cNvPr>
@@ -6848,7 +6848,7 @@
     </p:spTree>
     <p:extLst>
       <p:ext uri="{BB962C8B-B14F-4D97-AF65-F5344CB8AC3E}">
-        <p14:creationId xmlns:p14="http://schemas.microsoft.com/office/powerpoint/2010/main" val="1105018258"/>
+        <p14:creationId xmlns:p14="http://schemas.microsoft.com/office/powerpoint/2010/main" val="1385749177"/>
       </p:ext>
     </p:extLst>
   </p:cSld>
@@ -6879,7 +6879,7 @@
           <p:cNvPr id="1" name="">
             <a:extLst xmlns:a="http://schemas.openxmlformats.org/drawingml/2006/main">
               <a:ext uri="{FF2B5EF4-FFF2-40B4-BE49-F238E27FC236}">
-                <a16:creationId xmlns:a16="http://schemas.microsoft.com/office/drawing/2014/main" id="{2A72B5EB-B4C8-4EA8-9F84-9EAC8E6DD027}"/>
+                <a16:creationId xmlns:a16="http://schemas.microsoft.com/office/drawing/2014/main" id="{D5494817-FC50-420C-A11F-ECAE21A20717}"/>
               </a:ext>
             </a:extLst>
           </p:cNvPr>
@@ -6929,7 +6929,7 @@
           <p:cNvPr id="2" name="">
             <a:extLst xmlns:a="http://schemas.openxmlformats.org/drawingml/2006/main">
               <a:ext uri="{FF2B5EF4-FFF2-40B4-BE49-F238E27FC236}">
-                <a16:creationId xmlns:a16="http://schemas.microsoft.com/office/drawing/2014/main" id="{277B79B7-57FC-47FF-A4C5-EA33A1AACFD7}"/>
+                <a16:creationId xmlns:a16="http://schemas.microsoft.com/office/drawing/2014/main" id="{78B2A524-D292-4756-97E8-75C4909E58E0}"/>
               </a:ext>
             </a:extLst>
           </p:cNvPr>
@@ -6979,7 +6979,7 @@
           <p:cNvPr id="3" name="">
             <a:extLst xmlns:a="http://schemas.openxmlformats.org/drawingml/2006/main">
               <a:ext uri="{FF2B5EF4-FFF2-40B4-BE49-F238E27FC236}">
-                <a16:creationId xmlns:a16="http://schemas.microsoft.com/office/drawing/2014/main" id="{286383EF-B279-46EE-81C6-8A14E2D9657C}"/>
+                <a16:creationId xmlns:a16="http://schemas.microsoft.com/office/drawing/2014/main" id="{346AF68E-43D5-43EF-BF2B-D6DB23754EA6}"/>
               </a:ext>
             </a:extLst>
           </p:cNvPr>
@@ -7032,6 +7032,11 @@
                     <a:lstStyle/>
                     <a:p>
                       <a:r>
+                        <a:rPr sz="1275" b="1">
+                          <a:solidFill>
+                            <a:srgbClr val="FFFFFF"/>
+                          </a:solidFill>
+                        </a:rPr>
                         <a:t>Dart exception</a:t>
                       </a:r>
                     </a:p>
@@ -7048,6 +7053,11 @@
                     <a:lstStyle/>
                     <a:p>
                       <a:r>
+                        <a:rPr sz="1275" b="1">
+                          <a:solidFill>
+                            <a:srgbClr val="FFFFFF"/>
+                          </a:solidFill>
+                        </a:rPr>
                         <a:t>Android mapping</a:t>
                       </a:r>
                     </a:p>
@@ -7066,6 +7076,11 @@
                     <a:lstStyle/>
                     <a:p>
                       <a:r>
+                        <a:rPr sz="1275" b="0">
+                          <a:solidFill>
+                            <a:srgbClr val="0A0F14"/>
+                          </a:solidFill>
+                        </a:rPr>
                         <a:t>InvalidArgument</a:t>
                       </a:r>
                     </a:p>
@@ -7078,6 +7093,11 @@
                     <a:lstStyle/>
                     <a:p>
                       <a:r>
+                        <a:rPr sz="1275" b="0">
+                          <a:solidFill>
+                            <a:srgbClr val="0A0F14"/>
+                          </a:solidFill>
+                        </a:rPr>
                         <a:t>bad or missing parameter</a:t>
                       </a:r>
                     </a:p>
@@ -7092,6 +7112,11 @@
                     <a:lstStyle/>
                     <a:p>
                       <a:r>
+                        <a:rPr sz="1275" b="0">
+                          <a:solidFill>
+                            <a:srgbClr val="0A0F14"/>
+                          </a:solidFill>
+                        </a:rPr>
                         <a:t>FunctionNotFound</a:t>
                       </a:r>
                     </a:p>
@@ -7104,6 +7129,11 @@
                     <a:lstStyle/>
                     <a:p>
                       <a:r>
+                        <a:rPr sz="1275" b="0">
+                          <a:solidFill>
+                            <a:srgbClr val="0A0F14"/>
+                          </a:solidFill>
+                        </a:rPr>
                         <a:t>unknown function id</a:t>
                       </a:r>
                     </a:p>
@@ -7118,6 +7148,11 @@
                     <a:lstStyle/>
                     <a:p>
                       <a:r>
+                        <a:rPr sz="1275" b="0">
+                          <a:solidFill>
+                            <a:srgbClr val="0A0F14"/>
+                          </a:solidFill>
+                        </a:rPr>
                         <a:t>ElementNotFound</a:t>
                       </a:r>
                     </a:p>
@@ -7130,6 +7165,11 @@
                     <a:lstStyle/>
                     <a:p>
                       <a:r>
+                        <a:rPr sz="1275" b="0">
+                          <a:solidFill>
+                            <a:srgbClr val="0A0F14"/>
+                          </a:solidFill>
+                        </a:rPr>
                         <a:t>missing app record</a:t>
                       </a:r>
                     </a:p>
@@ -7144,6 +7184,11 @@
                     <a:lstStyle/>
                     <a:p>
                       <a:r>
+                        <a:rPr sz="1275" b="0">
+                          <a:solidFill>
+                            <a:srgbClr val="0A0F14"/>
+                          </a:solidFill>
+                        </a:rPr>
                         <a:t>PermissionRequired</a:t>
                       </a:r>
                     </a:p>
@@ -7156,6 +7201,11 @@
                     <a:lstStyle/>
                     <a:p>
                       <a:r>
+                        <a:rPr sz="1275" b="0">
+                          <a:solidFill>
+                            <a:srgbClr val="0A0F14"/>
+                          </a:solidFill>
+                        </a:rPr>
                         <a:t>guarded app action</a:t>
                       </a:r>
                     </a:p>
@@ -7170,6 +7220,11 @@
                     <a:lstStyle/>
                     <a:p>
                       <a:r>
+                        <a:rPr sz="1275" b="0">
+                          <a:solidFill>
+                            <a:srgbClr val="0A0F14"/>
+                          </a:solidFill>
+                        </a:rPr>
                         <a:t>Disabled / Unknown</a:t>
                       </a:r>
                     </a:p>
@@ -7182,6 +7237,11 @@
                     <a:lstStyle/>
                     <a:p>
                       <a:r>
+                        <a:rPr sz="1275" b="0">
+                          <a:solidFill>
+                            <a:srgbClr val="0A0F14"/>
+                          </a:solidFill>
+                        </a:rPr>
                         <a:t>runtime or app failure</a:t>
                       </a:r>
                     </a:p>
@@ -7198,7 +7258,7 @@
           <p:cNvPr id="5" name="">
             <a:extLst xmlns:a="http://schemas.openxmlformats.org/drawingml/2006/main">
               <a:ext uri="{FF2B5EF4-FFF2-40B4-BE49-F238E27FC236}">
-                <a16:creationId xmlns:a16="http://schemas.microsoft.com/office/drawing/2014/main" id="{161B2340-9545-4185-9DB8-C4B283981DC6}"/>
+                <a16:creationId xmlns:a16="http://schemas.microsoft.com/office/drawing/2014/main" id="{35A8C139-E8FE-4D32-931B-B45FCD066EC1}"/>
               </a:ext>
             </a:extLst>
           </p:cNvPr>
@@ -7231,7 +7291,7 @@
           <p:cNvPr id="6" name="">
             <a:extLst xmlns:a="http://schemas.openxmlformats.org/drawingml/2006/main">
               <a:ext uri="{FF2B5EF4-FFF2-40B4-BE49-F238E27FC236}">
-                <a16:creationId xmlns:a16="http://schemas.microsoft.com/office/drawing/2014/main" id="{88DD844B-266E-49A7-B544-DBD067CC94F8}"/>
+                <a16:creationId xmlns:a16="http://schemas.microsoft.com/office/drawing/2014/main" id="{78C420A3-C2C5-4C7D-A686-18E81A9761BE}"/>
               </a:ext>
             </a:extLst>
           </p:cNvPr>
@@ -7243,35 +7303,35 @@
         <p:spPr>
           <a:xfrm xmlns:a="http://schemas.openxmlformats.org/drawingml/2006/main">
             <a:off x="6991350" y="2190750"/>
-            <a:ext cx="4210050" cy="781050"/>
-          </a:xfrm>
-          <a:prstGeom xmlns:a="http://schemas.openxmlformats.org/drawingml/2006/main" prst="rect">
-            <a:avLst/>
-          </a:prstGeom>
-          <a:noFill xmlns:a="http://schemas.openxmlformats.org/drawingml/2006/main"/>
-          <a:ln xmlns:a="http://schemas.openxmlformats.org/drawingml/2006/main" w="0">
-            <a:noFill/>
-            <a:prstDash val="solid"/>
-          </a:ln>
-        </p:spPr>
-        <p:txBody>
-          <a:bodyPr xmlns:a="http://schemas.openxmlformats.org/drawingml/2006/main"/>
-          <a:lstStyle xmlns:a="http://schemas.openxmlformats.org/drawingml/2006/main"/>
-          <a:p xmlns:a="http://schemas.openxmlformats.org/drawingml/2006/main">
-            <a:pPr>
-              <a:defRPr sz="1575">
-                <a:solidFill>
-                  <a:srgbClr val="0A0F14"/>
-                </a:solidFill>
-              </a:defRPr>
-            </a:pPr>
-            <a:r>
-              <a:rPr sz="1575">
-                <a:solidFill>
-                  <a:srgbClr val="0A0F14"/>
-                </a:solidFill>
-              </a:rPr>
-              <a:t>JSON is the cross-language contract because current KSP restrictions prevent AppFunctionData as a direct @AppFunction parameter.</a:t>
+            <a:ext cx="4210050" cy="876300"/>
+          </a:xfrm>
+          <a:prstGeom xmlns:a="http://schemas.openxmlformats.org/drawingml/2006/main" prst="rect">
+            <a:avLst/>
+          </a:prstGeom>
+          <a:noFill xmlns:a="http://schemas.openxmlformats.org/drawingml/2006/main"/>
+          <a:ln xmlns:a="http://schemas.openxmlformats.org/drawingml/2006/main" w="0">
+            <a:noFill/>
+            <a:prstDash val="solid"/>
+          </a:ln>
+        </p:spPr>
+        <p:txBody>
+          <a:bodyPr xmlns:a="http://schemas.openxmlformats.org/drawingml/2006/main"/>
+          <a:lstStyle xmlns:a="http://schemas.openxmlformats.org/drawingml/2006/main"/>
+          <a:p xmlns:a="http://schemas.openxmlformats.org/drawingml/2006/main">
+            <a:pPr>
+              <a:defRPr sz="1500">
+                <a:solidFill>
+                  <a:srgbClr val="0A0F14"/>
+                </a:solidFill>
+              </a:defRPr>
+            </a:pPr>
+            <a:r>
+              <a:rPr sz="1500">
+                <a:solidFill>
+                  <a:srgbClr val="0A0F14"/>
+                </a:solidFill>
+              </a:rPr>
+              <a:t>JSON is the cross-language contract while KSP limits direct AppFunctionData parameters.</a:t>
             </a:r>
           </a:p>
         </p:txBody>
@@ -7281,18 +7341,18 @@
           <p:cNvPr id="7" name="">
             <a:extLst xmlns:a="http://schemas.openxmlformats.org/drawingml/2006/main">
               <a:ext uri="{FF2B5EF4-FFF2-40B4-BE49-F238E27FC236}">
-                <a16:creationId xmlns:a16="http://schemas.microsoft.com/office/drawing/2014/main" id="{E3A08631-2858-48CB-B336-C2CF0BB2E6C5}"/>
-              </a:ext>
-            </a:extLst>
-          </p:cNvPr>
-          <p:cNvSpPr>
-            <a:spLocks xmlns:a="http://schemas.openxmlformats.org/drawingml/2006/main" noGrp="1"/>
-          </p:cNvSpPr>
-          <p:nvPr/>
-        </p:nvSpPr>
-        <p:spPr>
-          <a:xfrm xmlns:a="http://schemas.openxmlformats.org/drawingml/2006/main">
-            <a:off x="6762750" y="3086100"/>
+                <a16:creationId xmlns:a16="http://schemas.microsoft.com/office/drawing/2014/main" id="{6B2F56FA-119A-4DED-86E8-3BC0FD9C80FC}"/>
+              </a:ext>
+            </a:extLst>
+          </p:cNvPr>
+          <p:cNvSpPr>
+            <a:spLocks xmlns:a="http://schemas.openxmlformats.org/drawingml/2006/main" noGrp="1"/>
+          </p:cNvSpPr>
+          <p:nvPr/>
+        </p:nvSpPr>
+        <p:spPr>
+          <a:xfrm xmlns:a="http://schemas.openxmlformats.org/drawingml/2006/main">
+            <a:off x="6762750" y="3181350"/>
             <a:ext cx="95250" cy="95250"/>
           </a:xfrm>
           <a:prstGeom xmlns:a="http://schemas.openxmlformats.org/drawingml/2006/main" prst="rect">
@@ -7314,47 +7374,47 @@
           <p:cNvPr id="8" name="">
             <a:extLst xmlns:a="http://schemas.openxmlformats.org/drawingml/2006/main">
               <a:ext uri="{FF2B5EF4-FFF2-40B4-BE49-F238E27FC236}">
-                <a16:creationId xmlns:a16="http://schemas.microsoft.com/office/drawing/2014/main" id="{AB66B7E1-8883-466B-8149-B87E75F86080}"/>
-              </a:ext>
-            </a:extLst>
-          </p:cNvPr>
-          <p:cNvSpPr>
-            <a:spLocks xmlns:a="http://schemas.openxmlformats.org/drawingml/2006/main" noGrp="1"/>
-          </p:cNvSpPr>
-          <p:nvPr/>
-        </p:nvSpPr>
-        <p:spPr>
-          <a:xfrm xmlns:a="http://schemas.openxmlformats.org/drawingml/2006/main">
-            <a:off x="6991350" y="3009900"/>
-            <a:ext cx="4210050" cy="781050"/>
-          </a:xfrm>
-          <a:prstGeom xmlns:a="http://schemas.openxmlformats.org/drawingml/2006/main" prst="rect">
-            <a:avLst/>
-          </a:prstGeom>
-          <a:noFill xmlns:a="http://schemas.openxmlformats.org/drawingml/2006/main"/>
-          <a:ln xmlns:a="http://schemas.openxmlformats.org/drawingml/2006/main" w="0">
-            <a:noFill/>
-            <a:prstDash val="solid"/>
-          </a:ln>
-        </p:spPr>
-        <p:txBody>
-          <a:bodyPr xmlns:a="http://schemas.openxmlformats.org/drawingml/2006/main"/>
-          <a:lstStyle xmlns:a="http://schemas.openxmlformats.org/drawingml/2006/main"/>
-          <a:p xmlns:a="http://schemas.openxmlformats.org/drawingml/2006/main">
-            <a:pPr>
-              <a:defRPr sz="1575">
-                <a:solidFill>
-                  <a:srgbClr val="0A0F14"/>
-                </a:solidFill>
-              </a:defRPr>
-            </a:pPr>
-            <a:r>
-              <a:rPr sz="1575">
-                <a:solidFill>
-                  <a:srgbClr val="0A0F14"/>
-                </a:solidFill>
-              </a:rPr>
-              <a:t>The Dart method-channel path wraps typed errors as PlatformException codes.</a:t>
+                <a16:creationId xmlns:a16="http://schemas.microsoft.com/office/drawing/2014/main" id="{FF64E495-BC80-4DB8-AF95-F3299B7D6B4A}"/>
+              </a:ext>
+            </a:extLst>
+          </p:cNvPr>
+          <p:cNvSpPr>
+            <a:spLocks xmlns:a="http://schemas.openxmlformats.org/drawingml/2006/main" noGrp="1"/>
+          </p:cNvSpPr>
+          <p:nvPr/>
+        </p:nvSpPr>
+        <p:spPr>
+          <a:xfrm xmlns:a="http://schemas.openxmlformats.org/drawingml/2006/main">
+            <a:off x="6991350" y="3105150"/>
+            <a:ext cx="4210050" cy="876300"/>
+          </a:xfrm>
+          <a:prstGeom xmlns:a="http://schemas.openxmlformats.org/drawingml/2006/main" prst="rect">
+            <a:avLst/>
+          </a:prstGeom>
+          <a:noFill xmlns:a="http://schemas.openxmlformats.org/drawingml/2006/main"/>
+          <a:ln xmlns:a="http://schemas.openxmlformats.org/drawingml/2006/main" w="0">
+            <a:noFill/>
+            <a:prstDash val="solid"/>
+          </a:ln>
+        </p:spPr>
+        <p:txBody>
+          <a:bodyPr xmlns:a="http://schemas.openxmlformats.org/drawingml/2006/main"/>
+          <a:lstStyle xmlns:a="http://schemas.openxmlformats.org/drawingml/2006/main"/>
+          <a:p xmlns:a="http://schemas.openxmlformats.org/drawingml/2006/main">
+            <a:pPr>
+              <a:defRPr sz="1500">
+                <a:solidFill>
+                  <a:srgbClr val="0A0F14"/>
+                </a:solidFill>
+              </a:defRPr>
+            </a:pPr>
+            <a:r>
+              <a:rPr sz="1500">
+                <a:solidFill>
+                  <a:srgbClr val="0A0F14"/>
+                </a:solidFill>
+              </a:rPr>
+              <a:t>Dart wraps typed errors as stable PlatformException codes.</a:t>
             </a:r>
           </a:p>
         </p:txBody>
@@ -7364,18 +7424,18 @@
           <p:cNvPr id="9" name="">
             <a:extLst xmlns:a="http://schemas.openxmlformats.org/drawingml/2006/main">
               <a:ext uri="{FF2B5EF4-FFF2-40B4-BE49-F238E27FC236}">
-                <a16:creationId xmlns:a16="http://schemas.microsoft.com/office/drawing/2014/main" id="{1330FA49-641A-43EA-B655-59712B7B4043}"/>
-              </a:ext>
-            </a:extLst>
-          </p:cNvPr>
-          <p:cNvSpPr>
-            <a:spLocks xmlns:a="http://schemas.openxmlformats.org/drawingml/2006/main" noGrp="1"/>
-          </p:cNvSpPr>
-          <p:nvPr/>
-        </p:nvSpPr>
-        <p:spPr>
-          <a:xfrm xmlns:a="http://schemas.openxmlformats.org/drawingml/2006/main">
-            <a:off x="6762750" y="3905250"/>
+                <a16:creationId xmlns:a16="http://schemas.microsoft.com/office/drawing/2014/main" id="{6BDF9C4A-7A88-4FF7-82C4-8C97641E99FA}"/>
+              </a:ext>
+            </a:extLst>
+          </p:cNvPr>
+          <p:cNvSpPr>
+            <a:spLocks xmlns:a="http://schemas.openxmlformats.org/drawingml/2006/main" noGrp="1"/>
+          </p:cNvSpPr>
+          <p:nvPr/>
+        </p:nvSpPr>
+        <p:spPr>
+          <a:xfrm xmlns:a="http://schemas.openxmlformats.org/drawingml/2006/main">
+            <a:off x="6762750" y="4095750"/>
             <a:ext cx="95250" cy="95250"/>
           </a:xfrm>
           <a:prstGeom xmlns:a="http://schemas.openxmlformats.org/drawingml/2006/main" prst="rect">
@@ -7397,47 +7457,47 @@
           <p:cNvPr id="10" name="">
             <a:extLst xmlns:a="http://schemas.openxmlformats.org/drawingml/2006/main">
               <a:ext uri="{FF2B5EF4-FFF2-40B4-BE49-F238E27FC236}">
-                <a16:creationId xmlns:a16="http://schemas.microsoft.com/office/drawing/2014/main" id="{E8B3B4FC-CCFF-4796-B342-E84AF4BBEDCF}"/>
-              </a:ext>
-            </a:extLst>
-          </p:cNvPr>
-          <p:cNvSpPr>
-            <a:spLocks xmlns:a="http://schemas.openxmlformats.org/drawingml/2006/main" noGrp="1"/>
-          </p:cNvSpPr>
-          <p:nvPr/>
-        </p:nvSpPr>
-        <p:spPr>
-          <a:xfrm xmlns:a="http://schemas.openxmlformats.org/drawingml/2006/main">
-            <a:off x="6991350" y="3829050"/>
-            <a:ext cx="4210050" cy="781050"/>
-          </a:xfrm>
-          <a:prstGeom xmlns:a="http://schemas.openxmlformats.org/drawingml/2006/main" prst="rect">
-            <a:avLst/>
-          </a:prstGeom>
-          <a:noFill xmlns:a="http://schemas.openxmlformats.org/drawingml/2006/main"/>
-          <a:ln xmlns:a="http://schemas.openxmlformats.org/drawingml/2006/main" w="0">
-            <a:noFill/>
-            <a:prstDash val="solid"/>
-          </a:ln>
-        </p:spPr>
-        <p:txBody>
-          <a:bodyPr xmlns:a="http://schemas.openxmlformats.org/drawingml/2006/main"/>
-          <a:lstStyle xmlns:a="http://schemas.openxmlformats.org/drawingml/2006/main"/>
-          <a:p xmlns:a="http://schemas.openxmlformats.org/drawingml/2006/main">
-            <a:pPr>
-              <a:defRPr sz="1575">
-                <a:solidFill>
-                  <a:srgbClr val="0A0F14"/>
-                </a:solidFill>
-              </a:defRPr>
-            </a:pPr>
-            <a:r>
-              <a:rPr sz="1575">
-                <a:solidFill>
-                  <a:srgbClr val="0A0F14"/>
-                </a:solidFill>
-              </a:rPr>
-              <a:t>The Kotlin bridge maps those codes back to AndroidX AppFunction*Exception classes.</a:t>
+                <a16:creationId xmlns:a16="http://schemas.microsoft.com/office/drawing/2014/main" id="{CB4914C4-9497-469E-AB00-7A2235262A2A}"/>
+              </a:ext>
+            </a:extLst>
+          </p:cNvPr>
+          <p:cNvSpPr>
+            <a:spLocks xmlns:a="http://schemas.openxmlformats.org/drawingml/2006/main" noGrp="1"/>
+          </p:cNvSpPr>
+          <p:nvPr/>
+        </p:nvSpPr>
+        <p:spPr>
+          <a:xfrm xmlns:a="http://schemas.openxmlformats.org/drawingml/2006/main">
+            <a:off x="6991350" y="4019550"/>
+            <a:ext cx="4210050" cy="876300"/>
+          </a:xfrm>
+          <a:prstGeom xmlns:a="http://schemas.openxmlformats.org/drawingml/2006/main" prst="rect">
+            <a:avLst/>
+          </a:prstGeom>
+          <a:noFill xmlns:a="http://schemas.openxmlformats.org/drawingml/2006/main"/>
+          <a:ln xmlns:a="http://schemas.openxmlformats.org/drawingml/2006/main" w="0">
+            <a:noFill/>
+            <a:prstDash val="solid"/>
+          </a:ln>
+        </p:spPr>
+        <p:txBody>
+          <a:bodyPr xmlns:a="http://schemas.openxmlformats.org/drawingml/2006/main"/>
+          <a:lstStyle xmlns:a="http://schemas.openxmlformats.org/drawingml/2006/main"/>
+          <a:p xmlns:a="http://schemas.openxmlformats.org/drawingml/2006/main">
+            <a:pPr>
+              <a:defRPr sz="1500">
+                <a:solidFill>
+                  <a:srgbClr val="0A0F14"/>
+                </a:solidFill>
+              </a:defRPr>
+            </a:pPr>
+            <a:r>
+              <a:rPr sz="1500">
+                <a:solidFill>
+                  <a:srgbClr val="0A0F14"/>
+                </a:solidFill>
+              </a:rPr>
+              <a:t>Kotlin maps those codes back to AndroidX AppFunction*Exception classes.</a:t>
             </a:r>
           </a:p>
         </p:txBody>
@@ -7447,7 +7507,7 @@
           <p:cNvPr id="11" name="">
             <a:extLst xmlns:a="http://schemas.openxmlformats.org/drawingml/2006/main">
               <a:ext uri="{FF2B5EF4-FFF2-40B4-BE49-F238E27FC236}">
-                <a16:creationId xmlns:a16="http://schemas.microsoft.com/office/drawing/2014/main" id="{0FC44F33-2147-4C81-AC49-2CF1ACDA5730}"/>
+                <a16:creationId xmlns:a16="http://schemas.microsoft.com/office/drawing/2014/main" id="{6F15C1F7-D2FD-44DC-B1A2-2396BE537BCD}"/>
               </a:ext>
             </a:extLst>
           </p:cNvPr>
@@ -7495,7 +7555,7 @@
     </p:spTree>
     <p:extLst>
       <p:ext uri="{BB962C8B-B14F-4D97-AF65-F5344CB8AC3E}">
-        <p14:creationId xmlns:p14="http://schemas.microsoft.com/office/powerpoint/2010/main" val="453241796"/>
+        <p14:creationId xmlns:p14="http://schemas.microsoft.com/office/powerpoint/2010/main" val="999191118"/>
       </p:ext>
     </p:extLst>
   </p:cSld>
@@ -7526,7 +7586,7 @@
           <p:cNvPr id="1" name="">
             <a:extLst xmlns:a="http://schemas.openxmlformats.org/drawingml/2006/main">
               <a:ext uri="{FF2B5EF4-FFF2-40B4-BE49-F238E27FC236}">
-                <a16:creationId xmlns:a16="http://schemas.microsoft.com/office/drawing/2014/main" id="{2893E01D-B846-4A21-BFE7-F3037EF38089}"/>
+                <a16:creationId xmlns:a16="http://schemas.microsoft.com/office/drawing/2014/main" id="{ED3ADD3B-FFAF-42D2-9CA5-A7DE42994B9C}"/>
               </a:ext>
             </a:extLst>
           </p:cNvPr>
@@ -7576,7 +7636,7 @@
           <p:cNvPr id="2" name="">
             <a:extLst xmlns:a="http://schemas.openxmlformats.org/drawingml/2006/main">
               <a:ext uri="{FF2B5EF4-FFF2-40B4-BE49-F238E27FC236}">
-                <a16:creationId xmlns:a16="http://schemas.microsoft.com/office/drawing/2014/main" id="{8F90BD12-B1DF-4145-B9AF-DABB2F9FBEF0}"/>
+                <a16:creationId xmlns:a16="http://schemas.microsoft.com/office/drawing/2014/main" id="{AE3EC688-155E-4D0C-A7C9-78B74C64DDBF}"/>
               </a:ext>
             </a:extLst>
           </p:cNvPr>
@@ -7626,7 +7686,7 @@
           <p:cNvPr id="3" name="">
             <a:extLst xmlns:a="http://schemas.openxmlformats.org/drawingml/2006/main">
               <a:ext uri="{FF2B5EF4-FFF2-40B4-BE49-F238E27FC236}">
-                <a16:creationId xmlns:a16="http://schemas.microsoft.com/office/drawing/2014/main" id="{69DF20F4-B195-4298-8BAD-0087F368C0E5}"/>
+                <a16:creationId xmlns:a16="http://schemas.microsoft.com/office/drawing/2014/main" id="{BEEAA6DF-11DE-47CD-9BC4-E8B5AA95060F}"/>
               </a:ext>
             </a:extLst>
           </p:cNvPr>
@@ -7659,7 +7719,7 @@
           <p:cNvPr id="4" name="">
             <a:extLst xmlns:a="http://schemas.openxmlformats.org/drawingml/2006/main">
               <a:ext uri="{FF2B5EF4-FFF2-40B4-BE49-F238E27FC236}">
-                <a16:creationId xmlns:a16="http://schemas.microsoft.com/office/drawing/2014/main" id="{9CB6551E-7FA1-44D0-B2AF-B4F234883D2D}"/>
+                <a16:creationId xmlns:a16="http://schemas.microsoft.com/office/drawing/2014/main" id="{E2DBBAB4-4EB9-4866-BB13-F69EC0834C27}"/>
               </a:ext>
             </a:extLst>
           </p:cNvPr>
@@ -7709,7 +7769,7 @@
           <p:cNvPr id="5" name="">
             <a:extLst xmlns:a="http://schemas.openxmlformats.org/drawingml/2006/main">
               <a:ext uri="{FF2B5EF4-FFF2-40B4-BE49-F238E27FC236}">
-                <a16:creationId xmlns:a16="http://schemas.microsoft.com/office/drawing/2014/main" id="{2C8157A3-759A-4276-A96B-DFA2E7864C97}"/>
+                <a16:creationId xmlns:a16="http://schemas.microsoft.com/office/drawing/2014/main" id="{35911BAC-20D7-4F20-B2E8-268F432B41E1}"/>
               </a:ext>
             </a:extLst>
           </p:cNvPr>
@@ -7742,7 +7802,7 @@
           <p:cNvPr id="6" name="">
             <a:extLst xmlns:a="http://schemas.openxmlformats.org/drawingml/2006/main">
               <a:ext uri="{FF2B5EF4-FFF2-40B4-BE49-F238E27FC236}">
-                <a16:creationId xmlns:a16="http://schemas.microsoft.com/office/drawing/2014/main" id="{104519D3-62A0-4ADD-901D-479C25BD9E73}"/>
+                <a16:creationId xmlns:a16="http://schemas.microsoft.com/office/drawing/2014/main" id="{69CF3490-60C0-4EBB-B1C4-8325DFD67903}"/>
               </a:ext>
             </a:extLst>
           </p:cNvPr>
@@ -7792,7 +7852,7 @@
           <p:cNvPr id="7" name="">
             <a:extLst xmlns:a="http://schemas.openxmlformats.org/drawingml/2006/main">
               <a:ext uri="{FF2B5EF4-FFF2-40B4-BE49-F238E27FC236}">
-                <a16:creationId xmlns:a16="http://schemas.microsoft.com/office/drawing/2014/main" id="{CC5202A7-D904-41EB-B01A-AD709140FE5C}"/>
+                <a16:creationId xmlns:a16="http://schemas.microsoft.com/office/drawing/2014/main" id="{841C11B9-DBAA-40A9-BB4C-8BD87ED158EB}"/>
               </a:ext>
             </a:extLst>
           </p:cNvPr>
@@ -7842,7 +7902,7 @@
           <p:cNvPr id="8" name="">
             <a:extLst xmlns:a="http://schemas.openxmlformats.org/drawingml/2006/main">
               <a:ext uri="{FF2B5EF4-FFF2-40B4-BE49-F238E27FC236}">
-                <a16:creationId xmlns:a16="http://schemas.microsoft.com/office/drawing/2014/main" id="{033EA24F-B47A-4CED-8596-7A67BE5F51AF}"/>
+                <a16:creationId xmlns:a16="http://schemas.microsoft.com/office/drawing/2014/main" id="{07F0DE7C-780D-46D4-849D-81DAECBF36F4}"/>
               </a:ext>
             </a:extLst>
           </p:cNvPr>
@@ -7875,7 +7935,7 @@
           <p:cNvPr id="9" name="">
             <a:extLst xmlns:a="http://schemas.openxmlformats.org/drawingml/2006/main">
               <a:ext uri="{FF2B5EF4-FFF2-40B4-BE49-F238E27FC236}">
-                <a16:creationId xmlns:a16="http://schemas.microsoft.com/office/drawing/2014/main" id="{C445316B-849D-40EB-B45B-FDF2509FA5B8}"/>
+                <a16:creationId xmlns:a16="http://schemas.microsoft.com/office/drawing/2014/main" id="{FCC907A5-D452-455B-B39E-455A184648B2}"/>
               </a:ext>
             </a:extLst>
           </p:cNvPr>
@@ -7925,7 +7985,7 @@
           <p:cNvPr id="10" name="">
             <a:extLst xmlns:a="http://schemas.openxmlformats.org/drawingml/2006/main">
               <a:ext uri="{FF2B5EF4-FFF2-40B4-BE49-F238E27FC236}">
-                <a16:creationId xmlns:a16="http://schemas.microsoft.com/office/drawing/2014/main" id="{2210FE4C-784D-40C6-BA57-B50F449EAB29}"/>
+                <a16:creationId xmlns:a16="http://schemas.microsoft.com/office/drawing/2014/main" id="{D18BE0F1-9178-4ADD-B163-AE098E0BD407}"/>
               </a:ext>
             </a:extLst>
           </p:cNvPr>
@@ -7975,7 +8035,7 @@
           <p:cNvPr id="11" name="">
             <a:extLst xmlns:a="http://schemas.openxmlformats.org/drawingml/2006/main">
               <a:ext uri="{FF2B5EF4-FFF2-40B4-BE49-F238E27FC236}">
-                <a16:creationId xmlns:a16="http://schemas.microsoft.com/office/drawing/2014/main" id="{C4B683F0-980E-40C6-95A8-C3FAD60569C7}"/>
+                <a16:creationId xmlns:a16="http://schemas.microsoft.com/office/drawing/2014/main" id="{C78E31FB-B010-4F94-B3F8-85D1875BAE8D}"/>
               </a:ext>
             </a:extLst>
           </p:cNvPr>
@@ -8008,7 +8068,7 @@
           <p:cNvPr id="12" name="">
             <a:extLst xmlns:a="http://schemas.openxmlformats.org/drawingml/2006/main">
               <a:ext uri="{FF2B5EF4-FFF2-40B4-BE49-F238E27FC236}">
-                <a16:creationId xmlns:a16="http://schemas.microsoft.com/office/drawing/2014/main" id="{D0BE2F29-C27C-4469-BB7E-1CC02CF549B4}"/>
+                <a16:creationId xmlns:a16="http://schemas.microsoft.com/office/drawing/2014/main" id="{F213B7A6-73AF-45B4-86DC-A5BE1732E687}"/>
               </a:ext>
             </a:extLst>
           </p:cNvPr>
@@ -8058,7 +8118,7 @@
           <p:cNvPr id="13" name="">
             <a:extLst xmlns:a="http://schemas.openxmlformats.org/drawingml/2006/main">
               <a:ext uri="{FF2B5EF4-FFF2-40B4-BE49-F238E27FC236}">
-                <a16:creationId xmlns:a16="http://schemas.microsoft.com/office/drawing/2014/main" id="{86A80626-3A4E-41C3-8655-1B4A3DC4CA60}"/>
+                <a16:creationId xmlns:a16="http://schemas.microsoft.com/office/drawing/2014/main" id="{1489FA62-E32A-4E65-8042-635CD1E5F343}"/>
               </a:ext>
             </a:extLst>
           </p:cNvPr>
@@ -8108,7 +8168,7 @@
           <p:cNvPr id="14" name="">
             <a:extLst xmlns:a="http://schemas.openxmlformats.org/drawingml/2006/main">
               <a:ext uri="{FF2B5EF4-FFF2-40B4-BE49-F238E27FC236}">
-                <a16:creationId xmlns:a16="http://schemas.microsoft.com/office/drawing/2014/main" id="{B532B24E-7DC1-453D-B05F-13FB0926EF75}"/>
+                <a16:creationId xmlns:a16="http://schemas.microsoft.com/office/drawing/2014/main" id="{9D34670F-23DA-4077-AAAE-F8A6068A577E}"/>
               </a:ext>
             </a:extLst>
           </p:cNvPr>
@@ -8158,7 +8218,7 @@
           <p:cNvPr id="15" name="">
             <a:extLst xmlns:a="http://schemas.openxmlformats.org/drawingml/2006/main">
               <a:ext uri="{FF2B5EF4-FFF2-40B4-BE49-F238E27FC236}">
-                <a16:creationId xmlns:a16="http://schemas.microsoft.com/office/drawing/2014/main" id="{5B2B7B55-DC0C-419A-AE9D-B8EF9A131C43}"/>
+                <a16:creationId xmlns:a16="http://schemas.microsoft.com/office/drawing/2014/main" id="{D5CCB2E5-59B3-4D09-B917-2FD3C8155373}"/>
               </a:ext>
             </a:extLst>
           </p:cNvPr>
@@ -8206,7 +8266,7 @@
     </p:spTree>
     <p:extLst>
       <p:ext uri="{BB962C8B-B14F-4D97-AF65-F5344CB8AC3E}">
-        <p14:creationId xmlns:p14="http://schemas.microsoft.com/office/powerpoint/2010/main" val="822672079"/>
+        <p14:creationId xmlns:p14="http://schemas.microsoft.com/office/powerpoint/2010/main" val="1632632877"/>
       </p:ext>
     </p:extLst>
   </p:cSld>

--- a/outputs/fluttercon_flutter_app_functions_showcase.pptx
+++ b/outputs/fluttercon_flutter_app_functions_showcase.pptx
@@ -2,21 +2,21 @@
 <file path=ppt/presentation.xml><?xml version="1.0" encoding="utf-8"?>
 <p:presentation xmlns:p="http://schemas.openxmlformats.org/presentationml/2006/main">
   <p:sldMasterIdLst>
-    <p:sldMasterId xmlns:r="http://schemas.openxmlformats.org/officeDocument/2006/relationships" id="2147483648" r:id="R198970318d254992"/>
+    <p:sldMasterId xmlns:r="http://schemas.openxmlformats.org/officeDocument/2006/relationships" id="2147483648" r:id="R3a6fcd9b891946dc"/>
   </p:sldMasterIdLst>
   <p:notesMasterIdLst>
-    <p:notesMasterId xmlns:r="http://schemas.openxmlformats.org/officeDocument/2006/relationships" r:id="Rbd47f7c624d84387"/>
+    <p:notesMasterId xmlns:r="http://schemas.openxmlformats.org/officeDocument/2006/relationships" r:id="R0e4e7f2b589c4f89"/>
   </p:notesMasterIdLst>
   <p:sldIdLst>
-    <p:sldId xmlns:r="http://schemas.openxmlformats.org/officeDocument/2006/relationships" id="256" r:id="R46785294cc6d4fee"/>
-    <p:sldId xmlns:r="http://schemas.openxmlformats.org/officeDocument/2006/relationships" id="257" r:id="Rcfe031ec8f4e4f7d"/>
-    <p:sldId xmlns:r="http://schemas.openxmlformats.org/officeDocument/2006/relationships" id="258" r:id="Rbf8d63792c2b4f86"/>
-    <p:sldId xmlns:r="http://schemas.openxmlformats.org/officeDocument/2006/relationships" id="259" r:id="R7955fffed74144ba"/>
-    <p:sldId xmlns:r="http://schemas.openxmlformats.org/officeDocument/2006/relationships" id="260" r:id="R97ee84b93eba4ba5"/>
-    <p:sldId xmlns:r="http://schemas.openxmlformats.org/officeDocument/2006/relationships" id="261" r:id="Re89d0ca922d44654"/>
-    <p:sldId xmlns:r="http://schemas.openxmlformats.org/officeDocument/2006/relationships" id="262" r:id="R5e6a72bf0c3a46cb"/>
-    <p:sldId xmlns:r="http://schemas.openxmlformats.org/officeDocument/2006/relationships" id="263" r:id="R65fc8777514a42de"/>
-    <p:sldId xmlns:r="http://schemas.openxmlformats.org/officeDocument/2006/relationships" id="264" r:id="R8de3c93745eb462b"/>
+    <p:sldId xmlns:r="http://schemas.openxmlformats.org/officeDocument/2006/relationships" id="256" r:id="R316c5f1799a84fbf"/>
+    <p:sldId xmlns:r="http://schemas.openxmlformats.org/officeDocument/2006/relationships" id="257" r:id="Re5fa6aec6c814634"/>
+    <p:sldId xmlns:r="http://schemas.openxmlformats.org/officeDocument/2006/relationships" id="258" r:id="R62c2d32e30cb4b36"/>
+    <p:sldId xmlns:r="http://schemas.openxmlformats.org/officeDocument/2006/relationships" id="259" r:id="R038d24d358d14bc9"/>
+    <p:sldId xmlns:r="http://schemas.openxmlformats.org/officeDocument/2006/relationships" id="260" r:id="R68b6133f91db4a5c"/>
+    <p:sldId xmlns:r="http://schemas.openxmlformats.org/officeDocument/2006/relationships" id="261" r:id="R2583ced14ce84f78"/>
+    <p:sldId xmlns:r="http://schemas.openxmlformats.org/officeDocument/2006/relationships" id="262" r:id="R90f1c0dd1a824e7d"/>
+    <p:sldId xmlns:r="http://schemas.openxmlformats.org/officeDocument/2006/relationships" id="263" r:id="R8c7572859e494247"/>
+    <p:sldId xmlns:r="http://schemas.openxmlformats.org/officeDocument/2006/relationships" id="264" r:id="Rd5fd8747566e488d"/>
   </p:sldIdLst>
   <p:sldSz cx="12192000" cy="6858000"/>
   <p:notesSz cx="6858000" cy="9144000"/>
@@ -1137,7 +1137,7 @@
   </p:cSld>
   <p:clrMap bg1="lt1" tx1="dk1" bg2="lt2" tx2="dk2" accent1="accent1" accent2="accent2" accent3="accent3" accent4="accent4" accent5="accent5" accent6="accent6" hlink="hlink" folHlink="folHlink"/>
   <p:sldLayoutIdLst>
-    <p:sldLayoutId xmlns:r="http://schemas.openxmlformats.org/officeDocument/2006/relationships" id="2147483649" r:id="R5ed20e274c344a43"/>
+    <p:sldLayoutId xmlns:r="http://schemas.openxmlformats.org/officeDocument/2006/relationships" id="2147483649" r:id="Rceaf7654245a4d55"/>
   </p:sldLayoutIdLst>
   <p:txStyles>
     <p:titleStyle>
@@ -1692,7 +1692,7 @@
           <p:nvPr/>
         </p:nvPicPr>
         <p:blipFill>
-          <a:blip xmlns:r="http://schemas.openxmlformats.org/officeDocument/2006/relationships" xmlns:a="http://schemas.openxmlformats.org/drawingml/2006/main" r:embed="Reda05aac1cd5487b"/>
+          <a:blip xmlns:r="http://schemas.openxmlformats.org/officeDocument/2006/relationships" xmlns:a="http://schemas.openxmlformats.org/drawingml/2006/main" r:embed="Rc1f64a2043504d98"/>
           <a:srcRect xmlns:a="http://schemas.openxmlformats.org/drawingml/2006/main" l="0" t="27" r="0" b="27"/>
           <a:stretch xmlns:a="http://schemas.openxmlformats.org/drawingml/2006/main">
             <a:fillRect l="0" t="0" r="0" b="0"/>
@@ -1713,7 +1713,7 @@
           <p:cNvPr id="2" name="">
             <a:extLst xmlns:a="http://schemas.openxmlformats.org/drawingml/2006/main">
               <a:ext uri="{FF2B5EF4-FFF2-40B4-BE49-F238E27FC236}">
-                <a16:creationId xmlns:a16="http://schemas.microsoft.com/office/drawing/2014/main" id="{25739896-5739-4318-9A7F-CB284F7F2C30}"/>
+                <a16:creationId xmlns:a16="http://schemas.microsoft.com/office/drawing/2014/main" id="{CFDB1520-21BE-4C99-A118-219E0F9737D8}"/>
               </a:ext>
             </a:extLst>
           </p:cNvPr>
@@ -1750,7 +1750,7 @@
           <p:cNvPr id="3" name="">
             <a:extLst xmlns:a="http://schemas.openxmlformats.org/drawingml/2006/main">
               <a:ext uri="{FF2B5EF4-FFF2-40B4-BE49-F238E27FC236}">
-                <a16:creationId xmlns:a16="http://schemas.microsoft.com/office/drawing/2014/main" id="{2445997F-B0A1-4980-A024-4C81EF68B08F}"/>
+                <a16:creationId xmlns:a16="http://schemas.microsoft.com/office/drawing/2014/main" id="{6E2E54A7-B90A-4E7D-B14C-4A7E8AA0253A}"/>
               </a:ext>
             </a:extLst>
           </p:cNvPr>
@@ -1800,7 +1800,7 @@
           <p:cNvPr id="4" name="">
             <a:extLst xmlns:a="http://schemas.openxmlformats.org/drawingml/2006/main">
               <a:ext uri="{FF2B5EF4-FFF2-40B4-BE49-F238E27FC236}">
-                <a16:creationId xmlns:a16="http://schemas.microsoft.com/office/drawing/2014/main" id="{31CF4EB3-5D72-495B-9B21-A70EA6A474E2}"/>
+                <a16:creationId xmlns:a16="http://schemas.microsoft.com/office/drawing/2014/main" id="{F9CD031D-A042-444B-A0DB-F3D6D5BCF254}"/>
               </a:ext>
             </a:extLst>
           </p:cNvPr>
@@ -1850,7 +1850,7 @@
           <p:cNvPr id="5" name="">
             <a:extLst xmlns:a="http://schemas.openxmlformats.org/drawingml/2006/main">
               <a:ext uri="{FF2B5EF4-FFF2-40B4-BE49-F238E27FC236}">
-                <a16:creationId xmlns:a16="http://schemas.microsoft.com/office/drawing/2014/main" id="{6F9C311D-E677-416C-8F5E-E1365412A880}"/>
+                <a16:creationId xmlns:a16="http://schemas.microsoft.com/office/drawing/2014/main" id="{70DCEE1A-98AD-47C5-A795-43059600FAAE}"/>
               </a:ext>
             </a:extLst>
           </p:cNvPr>
@@ -1900,7 +1900,7 @@
           <p:cNvPr id="6" name="">
             <a:extLst xmlns:a="http://schemas.openxmlformats.org/drawingml/2006/main">
               <a:ext uri="{FF2B5EF4-FFF2-40B4-BE49-F238E27FC236}">
-                <a16:creationId xmlns:a16="http://schemas.microsoft.com/office/drawing/2014/main" id="{91128FA7-8B8B-4405-9B73-CDD40F1CB9AC}"/>
+                <a16:creationId xmlns:a16="http://schemas.microsoft.com/office/drawing/2014/main" id="{5CA44B4A-9D00-450C-8BDF-82B0F77C7C5D}"/>
               </a:ext>
             </a:extLst>
           </p:cNvPr>
@@ -1948,7 +1948,7 @@
     </p:spTree>
     <p:extLst>
       <p:ext uri="{BB962C8B-B14F-4D97-AF65-F5344CB8AC3E}">
-        <p14:creationId xmlns:p14="http://schemas.microsoft.com/office/powerpoint/2010/main" val="465977525"/>
+        <p14:creationId xmlns:p14="http://schemas.microsoft.com/office/powerpoint/2010/main" val="643165845"/>
       </p:ext>
     </p:extLst>
   </p:cSld>
@@ -1979,7 +1979,7 @@
           <p:cNvPr id="1" name="">
             <a:extLst xmlns:a="http://schemas.openxmlformats.org/drawingml/2006/main">
               <a:ext uri="{FF2B5EF4-FFF2-40B4-BE49-F238E27FC236}">
-                <a16:creationId xmlns:a16="http://schemas.microsoft.com/office/drawing/2014/main" id="{79910ED2-40E9-40D8-B2FA-E0CEBA8F62EC}"/>
+                <a16:creationId xmlns:a16="http://schemas.microsoft.com/office/drawing/2014/main" id="{75A5FB04-AF02-4615-9F45-4457A62AD422}"/>
               </a:ext>
             </a:extLst>
           </p:cNvPr>
@@ -2029,7 +2029,7 @@
           <p:cNvPr id="2" name="">
             <a:extLst xmlns:a="http://schemas.openxmlformats.org/drawingml/2006/main">
               <a:ext uri="{FF2B5EF4-FFF2-40B4-BE49-F238E27FC236}">
-                <a16:creationId xmlns:a16="http://schemas.microsoft.com/office/drawing/2014/main" id="{20403184-D744-4501-A969-CD8E79D0FA5A}"/>
+                <a16:creationId xmlns:a16="http://schemas.microsoft.com/office/drawing/2014/main" id="{CD3A6176-839F-4E04-8515-BC7B75F33B44}"/>
               </a:ext>
             </a:extLst>
           </p:cNvPr>
@@ -2079,7 +2079,7 @@
           <p:cNvPr id="3" name="">
             <a:extLst xmlns:a="http://schemas.openxmlformats.org/drawingml/2006/main">
               <a:ext uri="{FF2B5EF4-FFF2-40B4-BE49-F238E27FC236}">
-                <a16:creationId xmlns:a16="http://schemas.microsoft.com/office/drawing/2014/main" id="{1473D50B-D1CE-4162-95F4-667BABFFBC04}"/>
+                <a16:creationId xmlns:a16="http://schemas.microsoft.com/office/drawing/2014/main" id="{5AED17D9-311E-452A-BFB3-0AA2783C6C16}"/>
               </a:ext>
             </a:extLst>
           </p:cNvPr>
@@ -2112,7 +2112,7 @@
           <p:cNvPr id="4" name="">
             <a:extLst xmlns:a="http://schemas.openxmlformats.org/drawingml/2006/main">
               <a:ext uri="{FF2B5EF4-FFF2-40B4-BE49-F238E27FC236}">
-                <a16:creationId xmlns:a16="http://schemas.microsoft.com/office/drawing/2014/main" id="{5CB9D45F-E6E1-4260-A188-91EC8845DE52}"/>
+                <a16:creationId xmlns:a16="http://schemas.microsoft.com/office/drawing/2014/main" id="{6E45932B-3381-4C03-9964-B72F0C41BD40}"/>
               </a:ext>
             </a:extLst>
           </p:cNvPr>
@@ -2162,7 +2162,7 @@
           <p:cNvPr id="5" name="">
             <a:extLst xmlns:a="http://schemas.openxmlformats.org/drawingml/2006/main">
               <a:ext uri="{FF2B5EF4-FFF2-40B4-BE49-F238E27FC236}">
-                <a16:creationId xmlns:a16="http://schemas.microsoft.com/office/drawing/2014/main" id="{E7F1EEAB-D64F-45A9-AE5E-61E3425F0928}"/>
+                <a16:creationId xmlns:a16="http://schemas.microsoft.com/office/drawing/2014/main" id="{0C60DDAD-E909-4A5F-A506-A98F8EDA9E74}"/>
               </a:ext>
             </a:extLst>
           </p:cNvPr>
@@ -2195,7 +2195,7 @@
           <p:cNvPr id="6" name="">
             <a:extLst xmlns:a="http://schemas.openxmlformats.org/drawingml/2006/main">
               <a:ext uri="{FF2B5EF4-FFF2-40B4-BE49-F238E27FC236}">
-                <a16:creationId xmlns:a16="http://schemas.microsoft.com/office/drawing/2014/main" id="{03E82012-96AF-4FDA-A615-8CBEDB0F6615}"/>
+                <a16:creationId xmlns:a16="http://schemas.microsoft.com/office/drawing/2014/main" id="{4F8BF3C3-5285-45CD-ABE3-B950125740BA}"/>
               </a:ext>
             </a:extLst>
           </p:cNvPr>
@@ -2245,7 +2245,7 @@
           <p:cNvPr id="7" name="">
             <a:extLst xmlns:a="http://schemas.openxmlformats.org/drawingml/2006/main">
               <a:ext uri="{FF2B5EF4-FFF2-40B4-BE49-F238E27FC236}">
-                <a16:creationId xmlns:a16="http://schemas.microsoft.com/office/drawing/2014/main" id="{B8ECDCF6-2381-408A-9C5B-781E59D2FB1E}"/>
+                <a16:creationId xmlns:a16="http://schemas.microsoft.com/office/drawing/2014/main" id="{EF6073F2-3FED-41AE-BFCC-0F64F6F3F9A8}"/>
               </a:ext>
             </a:extLst>
           </p:cNvPr>
@@ -2278,7 +2278,7 @@
           <p:cNvPr id="8" name="">
             <a:extLst xmlns:a="http://schemas.openxmlformats.org/drawingml/2006/main">
               <a:ext uri="{FF2B5EF4-FFF2-40B4-BE49-F238E27FC236}">
-                <a16:creationId xmlns:a16="http://schemas.microsoft.com/office/drawing/2014/main" id="{FF8B75A2-C626-4147-B019-E278CB1A7078}"/>
+                <a16:creationId xmlns:a16="http://schemas.microsoft.com/office/drawing/2014/main" id="{3BF9E04A-D1B6-4ACE-8E0C-2182810E7BE1}"/>
               </a:ext>
             </a:extLst>
           </p:cNvPr>
@@ -2328,7 +2328,7 @@
           <p:cNvPr id="9" name="">
             <a:extLst xmlns:a="http://schemas.openxmlformats.org/drawingml/2006/main">
               <a:ext uri="{FF2B5EF4-FFF2-40B4-BE49-F238E27FC236}">
-                <a16:creationId xmlns:a16="http://schemas.microsoft.com/office/drawing/2014/main" id="{76DE5131-D147-498E-9F69-F6B90EE61058}"/>
+                <a16:creationId xmlns:a16="http://schemas.microsoft.com/office/drawing/2014/main" id="{2FFFEF7C-5E5C-4DFC-AD95-85797153CA7E}"/>
               </a:ext>
             </a:extLst>
           </p:cNvPr>
@@ -2361,7 +2361,7 @@
           <p:cNvPr id="10" name="">
             <a:extLst xmlns:a="http://schemas.openxmlformats.org/drawingml/2006/main">
               <a:ext uri="{FF2B5EF4-FFF2-40B4-BE49-F238E27FC236}">
-                <a16:creationId xmlns:a16="http://schemas.microsoft.com/office/drawing/2014/main" id="{F730B49B-368B-4842-B8A6-CE16B9C1B2FD}"/>
+                <a16:creationId xmlns:a16="http://schemas.microsoft.com/office/drawing/2014/main" id="{4DCDE3DA-B44A-41AE-8D07-CD087CFDE42B}"/>
               </a:ext>
             </a:extLst>
           </p:cNvPr>
@@ -2411,7 +2411,7 @@
           <p:cNvPr id="11" name="">
             <a:extLst xmlns:a="http://schemas.openxmlformats.org/drawingml/2006/main">
               <a:ext uri="{FF2B5EF4-FFF2-40B4-BE49-F238E27FC236}">
-                <a16:creationId xmlns:a16="http://schemas.microsoft.com/office/drawing/2014/main" id="{B082A4C0-E833-4BE9-89D1-EEC382A4C4F5}"/>
+                <a16:creationId xmlns:a16="http://schemas.microsoft.com/office/drawing/2014/main" id="{93BD3F90-4252-4AAD-B1FF-D253649AD9BD}"/>
               </a:ext>
             </a:extLst>
           </p:cNvPr>
@@ -2444,7 +2444,7 @@
           <p:cNvPr id="12" name="">
             <a:extLst xmlns:a="http://schemas.openxmlformats.org/drawingml/2006/main">
               <a:ext uri="{FF2B5EF4-FFF2-40B4-BE49-F238E27FC236}">
-                <a16:creationId xmlns:a16="http://schemas.microsoft.com/office/drawing/2014/main" id="{205842EF-4383-41C5-AF44-1CA2B817105F}"/>
+                <a16:creationId xmlns:a16="http://schemas.microsoft.com/office/drawing/2014/main" id="{AE0432D7-A9C5-4923-940B-283F103246FE}"/>
               </a:ext>
             </a:extLst>
           </p:cNvPr>
@@ -2494,7 +2494,7 @@
           <p:cNvPr id="13" name="">
             <a:extLst xmlns:a="http://schemas.openxmlformats.org/drawingml/2006/main">
               <a:ext uri="{FF2B5EF4-FFF2-40B4-BE49-F238E27FC236}">
-                <a16:creationId xmlns:a16="http://schemas.microsoft.com/office/drawing/2014/main" id="{19C3972E-E8EF-4FA6-9F64-AB482FE0973D}"/>
+                <a16:creationId xmlns:a16="http://schemas.microsoft.com/office/drawing/2014/main" id="{4F555884-EA79-40E6-9C6B-D08368F09AB7}"/>
               </a:ext>
             </a:extLst>
           </p:cNvPr>
@@ -2544,7 +2544,7 @@
           <p:cNvPr id="14" name="">
             <a:extLst xmlns:a="http://schemas.openxmlformats.org/drawingml/2006/main">
               <a:ext uri="{FF2B5EF4-FFF2-40B4-BE49-F238E27FC236}">
-                <a16:creationId xmlns:a16="http://schemas.microsoft.com/office/drawing/2014/main" id="{313C852C-8155-4F5A-B20B-E538CB1DEE44}"/>
+                <a16:creationId xmlns:a16="http://schemas.microsoft.com/office/drawing/2014/main" id="{FB1F3EBF-5BF3-40A9-B81A-F7FDC952FE1D}"/>
               </a:ext>
             </a:extLst>
           </p:cNvPr>
@@ -2592,7 +2592,7 @@
     </p:spTree>
     <p:extLst>
       <p:ext uri="{BB962C8B-B14F-4D97-AF65-F5344CB8AC3E}">
-        <p14:creationId xmlns:p14="http://schemas.microsoft.com/office/powerpoint/2010/main" val="128466967"/>
+        <p14:creationId xmlns:p14="http://schemas.microsoft.com/office/powerpoint/2010/main" val="68083843"/>
       </p:ext>
     </p:extLst>
   </p:cSld>
@@ -2623,7 +2623,7 @@
           <p:cNvPr id="1" name="">
             <a:extLst xmlns:a="http://schemas.openxmlformats.org/drawingml/2006/main">
               <a:ext uri="{FF2B5EF4-FFF2-40B4-BE49-F238E27FC236}">
-                <a16:creationId xmlns:a16="http://schemas.microsoft.com/office/drawing/2014/main" id="{2A72C1F3-D9EE-49EF-9713-76456ADFC45B}"/>
+                <a16:creationId xmlns:a16="http://schemas.microsoft.com/office/drawing/2014/main" id="{35D8BD08-441F-4FBA-8DB5-5A4049FE1663}"/>
               </a:ext>
             </a:extLst>
           </p:cNvPr>
@@ -2673,7 +2673,7 @@
           <p:cNvPr id="2" name="">
             <a:extLst xmlns:a="http://schemas.openxmlformats.org/drawingml/2006/main">
               <a:ext uri="{FF2B5EF4-FFF2-40B4-BE49-F238E27FC236}">
-                <a16:creationId xmlns:a16="http://schemas.microsoft.com/office/drawing/2014/main" id="{61672340-007E-4FB5-AEB2-0504BD9178AD}"/>
+                <a16:creationId xmlns:a16="http://schemas.microsoft.com/office/drawing/2014/main" id="{B0F95D68-37C9-43CA-B858-21494B502A45}"/>
               </a:ext>
             </a:extLst>
           </p:cNvPr>
@@ -2723,7 +2723,7 @@
           <p:cNvPr id="3" name="">
             <a:extLst xmlns:a="http://schemas.openxmlformats.org/drawingml/2006/main">
               <a:ext uri="{FF2B5EF4-FFF2-40B4-BE49-F238E27FC236}">
-                <a16:creationId xmlns:a16="http://schemas.microsoft.com/office/drawing/2014/main" id="{A78D2E6F-72C5-4916-8420-F880DD0A79C8}"/>
+                <a16:creationId xmlns:a16="http://schemas.microsoft.com/office/drawing/2014/main" id="{6CD73928-223D-45B2-B210-767F9AA384D5}"/>
               </a:ext>
             </a:extLst>
           </p:cNvPr>
@@ -2756,7 +2756,7 @@
           <p:cNvPr id="4" name="">
             <a:extLst xmlns:a="http://schemas.openxmlformats.org/drawingml/2006/main">
               <a:ext uri="{FF2B5EF4-FFF2-40B4-BE49-F238E27FC236}">
-                <a16:creationId xmlns:a16="http://schemas.microsoft.com/office/drawing/2014/main" id="{9D299B9D-C6B6-4E1A-B715-7B5A63D37472}"/>
+                <a16:creationId xmlns:a16="http://schemas.microsoft.com/office/drawing/2014/main" id="{AB530B5E-0BBD-410D-8D0C-342E2C6EE441}"/>
               </a:ext>
             </a:extLst>
           </p:cNvPr>
@@ -2789,7 +2789,7 @@
           <p:cNvPr id="5" name="">
             <a:extLst xmlns:a="http://schemas.openxmlformats.org/drawingml/2006/main">
               <a:ext uri="{FF2B5EF4-FFF2-40B4-BE49-F238E27FC236}">
-                <a16:creationId xmlns:a16="http://schemas.microsoft.com/office/drawing/2014/main" id="{6005CC95-1E41-46E2-84D3-EDC69342C039}"/>
+                <a16:creationId xmlns:a16="http://schemas.microsoft.com/office/drawing/2014/main" id="{19518616-B111-4A4C-8BAD-234C8071F287}"/>
               </a:ext>
             </a:extLst>
           </p:cNvPr>
@@ -2839,7 +2839,7 @@
           <p:cNvPr id="6" name="">
             <a:extLst xmlns:a="http://schemas.openxmlformats.org/drawingml/2006/main">
               <a:ext uri="{FF2B5EF4-FFF2-40B4-BE49-F238E27FC236}">
-                <a16:creationId xmlns:a16="http://schemas.microsoft.com/office/drawing/2014/main" id="{2A957EA0-257C-4BE3-97E3-CCC8B65E040A}"/>
+                <a16:creationId xmlns:a16="http://schemas.microsoft.com/office/drawing/2014/main" id="{90481011-749E-4490-A850-663FAFFFC318}"/>
               </a:ext>
             </a:extLst>
           </p:cNvPr>
@@ -2889,7 +2889,7 @@
           <p:cNvPr id="7" name="">
             <a:extLst xmlns:a="http://schemas.openxmlformats.org/drawingml/2006/main">
               <a:ext uri="{FF2B5EF4-FFF2-40B4-BE49-F238E27FC236}">
-                <a16:creationId xmlns:a16="http://schemas.microsoft.com/office/drawing/2014/main" id="{8793AE02-60F4-4F27-A457-E7C371E22474}"/>
+                <a16:creationId xmlns:a16="http://schemas.microsoft.com/office/drawing/2014/main" id="{A3D8F1A1-8350-4D1D-BA13-3AD49B9D8FD9}"/>
               </a:ext>
             </a:extLst>
           </p:cNvPr>
@@ -2939,7 +2939,7 @@
           <p:cNvPr id="8" name="">
             <a:extLst xmlns:a="http://schemas.openxmlformats.org/drawingml/2006/main">
               <a:ext uri="{FF2B5EF4-FFF2-40B4-BE49-F238E27FC236}">
-                <a16:creationId xmlns:a16="http://schemas.microsoft.com/office/drawing/2014/main" id="{945D8EF4-9B7D-4482-B2AB-7CD0389BC26D}"/>
+                <a16:creationId xmlns:a16="http://schemas.microsoft.com/office/drawing/2014/main" id="{6884A8C4-8AAA-499C-A880-CD46103F32CB}"/>
               </a:ext>
             </a:extLst>
           </p:cNvPr>
@@ -2972,7 +2972,7 @@
           <p:cNvPr id="9" name="">
             <a:extLst xmlns:a="http://schemas.openxmlformats.org/drawingml/2006/main">
               <a:ext uri="{FF2B5EF4-FFF2-40B4-BE49-F238E27FC236}">
-                <a16:creationId xmlns:a16="http://schemas.microsoft.com/office/drawing/2014/main" id="{4779792B-E989-4173-86DB-83CD56CD8839}"/>
+                <a16:creationId xmlns:a16="http://schemas.microsoft.com/office/drawing/2014/main" id="{0813ABFA-E7E9-47C5-8675-BD5D2261B20D}"/>
               </a:ext>
             </a:extLst>
           </p:cNvPr>
@@ -3022,7 +3022,7 @@
           <p:cNvPr id="10" name="">
             <a:extLst xmlns:a="http://schemas.openxmlformats.org/drawingml/2006/main">
               <a:ext uri="{FF2B5EF4-FFF2-40B4-BE49-F238E27FC236}">
-                <a16:creationId xmlns:a16="http://schemas.microsoft.com/office/drawing/2014/main" id="{E01279D5-5EDA-4B58-B99F-4D2A21E8E049}"/>
+                <a16:creationId xmlns:a16="http://schemas.microsoft.com/office/drawing/2014/main" id="{FD1F8B03-92FF-4A41-A86E-EC9E3938F589}"/>
               </a:ext>
             </a:extLst>
           </p:cNvPr>
@@ -3072,7 +3072,7 @@
           <p:cNvPr id="11" name="">
             <a:extLst xmlns:a="http://schemas.openxmlformats.org/drawingml/2006/main">
               <a:ext uri="{FF2B5EF4-FFF2-40B4-BE49-F238E27FC236}">
-                <a16:creationId xmlns:a16="http://schemas.microsoft.com/office/drawing/2014/main" id="{6693F1EF-3F85-4423-A65B-ECE796DDE972}"/>
+                <a16:creationId xmlns:a16="http://schemas.microsoft.com/office/drawing/2014/main" id="{D2D266A7-3781-4E8A-BA2F-C6329E5C5DCD}"/>
               </a:ext>
             </a:extLst>
           </p:cNvPr>
@@ -3122,7 +3122,7 @@
           <p:cNvPr id="12" name="">
             <a:extLst xmlns:a="http://schemas.openxmlformats.org/drawingml/2006/main">
               <a:ext uri="{FF2B5EF4-FFF2-40B4-BE49-F238E27FC236}">
-                <a16:creationId xmlns:a16="http://schemas.microsoft.com/office/drawing/2014/main" id="{2655D907-C7EB-49B5-A54E-51D3D2DB800A}"/>
+                <a16:creationId xmlns:a16="http://schemas.microsoft.com/office/drawing/2014/main" id="{CB6DDAF9-E6AD-4A2A-AA39-1A58ABEB9A9C}"/>
               </a:ext>
             </a:extLst>
           </p:cNvPr>
@@ -3155,7 +3155,7 @@
           <p:cNvPr id="13" name="">
             <a:extLst xmlns:a="http://schemas.openxmlformats.org/drawingml/2006/main">
               <a:ext uri="{FF2B5EF4-FFF2-40B4-BE49-F238E27FC236}">
-                <a16:creationId xmlns:a16="http://schemas.microsoft.com/office/drawing/2014/main" id="{7CFC568E-110F-455E-BC67-191F423F2B0C}"/>
+                <a16:creationId xmlns:a16="http://schemas.microsoft.com/office/drawing/2014/main" id="{B77F1939-D9DF-4CB7-9794-2694A0C90486}"/>
               </a:ext>
             </a:extLst>
           </p:cNvPr>
@@ -3205,7 +3205,7 @@
           <p:cNvPr id="14" name="">
             <a:extLst xmlns:a="http://schemas.openxmlformats.org/drawingml/2006/main">
               <a:ext uri="{FF2B5EF4-FFF2-40B4-BE49-F238E27FC236}">
-                <a16:creationId xmlns:a16="http://schemas.microsoft.com/office/drawing/2014/main" id="{4C3FD8A4-6263-4477-9133-4F7CE3B0417B}"/>
+                <a16:creationId xmlns:a16="http://schemas.microsoft.com/office/drawing/2014/main" id="{9F74A926-152C-4BF0-B7E8-910FA738D1EC}"/>
               </a:ext>
             </a:extLst>
           </p:cNvPr>
@@ -3255,7 +3255,7 @@
           <p:cNvPr id="15" name="">
             <a:extLst xmlns:a="http://schemas.openxmlformats.org/drawingml/2006/main">
               <a:ext uri="{FF2B5EF4-FFF2-40B4-BE49-F238E27FC236}">
-                <a16:creationId xmlns:a16="http://schemas.microsoft.com/office/drawing/2014/main" id="{9E7BAFFD-34FD-4728-971C-832E31A308EB}"/>
+                <a16:creationId xmlns:a16="http://schemas.microsoft.com/office/drawing/2014/main" id="{01E947FD-5A8F-4464-8442-8E6F044077F0}"/>
               </a:ext>
             </a:extLst>
           </p:cNvPr>
@@ -3305,7 +3305,7 @@
           <p:cNvPr id="16" name="">
             <a:extLst xmlns:a="http://schemas.openxmlformats.org/drawingml/2006/main">
               <a:ext uri="{FF2B5EF4-FFF2-40B4-BE49-F238E27FC236}">
-                <a16:creationId xmlns:a16="http://schemas.microsoft.com/office/drawing/2014/main" id="{D3668F20-E256-4779-9A9B-FAE19194D5C9}"/>
+                <a16:creationId xmlns:a16="http://schemas.microsoft.com/office/drawing/2014/main" id="{656EE22F-2F8E-49AE-98B8-1BC5FF8C8184}"/>
               </a:ext>
             </a:extLst>
           </p:cNvPr>
@@ -3338,7 +3338,7 @@
           <p:cNvPr id="17" name="">
             <a:extLst xmlns:a="http://schemas.openxmlformats.org/drawingml/2006/main">
               <a:ext uri="{FF2B5EF4-FFF2-40B4-BE49-F238E27FC236}">
-                <a16:creationId xmlns:a16="http://schemas.microsoft.com/office/drawing/2014/main" id="{429FD343-7A88-415B-AF6E-04594912C107}"/>
+                <a16:creationId xmlns:a16="http://schemas.microsoft.com/office/drawing/2014/main" id="{1598911A-7583-4ED2-84FD-EA392E8BBB57}"/>
               </a:ext>
             </a:extLst>
           </p:cNvPr>
@@ -3388,7 +3388,7 @@
           <p:cNvPr id="18" name="">
             <a:extLst xmlns:a="http://schemas.openxmlformats.org/drawingml/2006/main">
               <a:ext uri="{FF2B5EF4-FFF2-40B4-BE49-F238E27FC236}">
-                <a16:creationId xmlns:a16="http://schemas.microsoft.com/office/drawing/2014/main" id="{CF65BC40-A04E-4747-830A-3AEF38E4FF7A}"/>
+                <a16:creationId xmlns:a16="http://schemas.microsoft.com/office/drawing/2014/main" id="{CC69C8DD-3CAF-46CB-91B9-8A3DA86E6120}"/>
               </a:ext>
             </a:extLst>
           </p:cNvPr>
@@ -3438,7 +3438,7 @@
           <p:cNvPr id="19" name="">
             <a:extLst xmlns:a="http://schemas.openxmlformats.org/drawingml/2006/main">
               <a:ext uri="{FF2B5EF4-FFF2-40B4-BE49-F238E27FC236}">
-                <a16:creationId xmlns:a16="http://schemas.microsoft.com/office/drawing/2014/main" id="{C3842E8D-5C69-4663-9255-A79E2751B27D}"/>
+                <a16:creationId xmlns:a16="http://schemas.microsoft.com/office/drawing/2014/main" id="{92E3092B-A107-4249-A15C-E4F751BC9826}"/>
               </a:ext>
             </a:extLst>
           </p:cNvPr>
@@ -3488,7 +3488,7 @@
           <p:cNvPr id="20" name="">
             <a:extLst xmlns:a="http://schemas.openxmlformats.org/drawingml/2006/main">
               <a:ext uri="{FF2B5EF4-FFF2-40B4-BE49-F238E27FC236}">
-                <a16:creationId xmlns:a16="http://schemas.microsoft.com/office/drawing/2014/main" id="{411505DF-F93F-41D7-BB67-6CA4DC36E9E0}"/>
+                <a16:creationId xmlns:a16="http://schemas.microsoft.com/office/drawing/2014/main" id="{1117F56C-13A1-4C31-BC71-D0A23F234E5A}"/>
               </a:ext>
             </a:extLst>
           </p:cNvPr>
@@ -3538,7 +3538,7 @@
           <p:cNvPr id="21" name="">
             <a:extLst xmlns:a="http://schemas.openxmlformats.org/drawingml/2006/main">
               <a:ext uri="{FF2B5EF4-FFF2-40B4-BE49-F238E27FC236}">
-                <a16:creationId xmlns:a16="http://schemas.microsoft.com/office/drawing/2014/main" id="{447C59B4-98E9-4725-9B71-354AB6E593C1}"/>
+                <a16:creationId xmlns:a16="http://schemas.microsoft.com/office/drawing/2014/main" id="{A8D5F7F9-C4F6-4DF3-9079-0CC127108CE6}"/>
               </a:ext>
             </a:extLst>
           </p:cNvPr>
@@ -3586,7 +3586,7 @@
     </p:spTree>
     <p:extLst>
       <p:ext uri="{BB962C8B-B14F-4D97-AF65-F5344CB8AC3E}">
-        <p14:creationId xmlns:p14="http://schemas.microsoft.com/office/powerpoint/2010/main" val="786855797"/>
+        <p14:creationId xmlns:p14="http://schemas.microsoft.com/office/powerpoint/2010/main" val="467218292"/>
       </p:ext>
     </p:extLst>
   </p:cSld>
@@ -3617,7 +3617,7 @@
           <p:cNvPr id="1" name="">
             <a:extLst xmlns:a="http://schemas.openxmlformats.org/drawingml/2006/main">
               <a:ext uri="{FF2B5EF4-FFF2-40B4-BE49-F238E27FC236}">
-                <a16:creationId xmlns:a16="http://schemas.microsoft.com/office/drawing/2014/main" id="{587E86A1-BA2F-47CC-95DF-0C592371D777}"/>
+                <a16:creationId xmlns:a16="http://schemas.microsoft.com/office/drawing/2014/main" id="{082715B0-3865-4125-A6CC-F57F4A5FCA53}"/>
               </a:ext>
             </a:extLst>
           </p:cNvPr>
@@ -3667,7 +3667,7 @@
           <p:cNvPr id="2" name="">
             <a:extLst xmlns:a="http://schemas.openxmlformats.org/drawingml/2006/main">
               <a:ext uri="{FF2B5EF4-FFF2-40B4-BE49-F238E27FC236}">
-                <a16:creationId xmlns:a16="http://schemas.microsoft.com/office/drawing/2014/main" id="{1E126F6B-1B5F-45FE-B2EC-F25E8837ACD1}"/>
+                <a16:creationId xmlns:a16="http://schemas.microsoft.com/office/drawing/2014/main" id="{9669DE62-7733-49A2-8E23-B5D7E0226519}"/>
               </a:ext>
             </a:extLst>
           </p:cNvPr>
@@ -3717,7 +3717,7 @@
           <p:cNvPr id="3" name="">
             <a:extLst xmlns:a="http://schemas.openxmlformats.org/drawingml/2006/main">
               <a:ext uri="{FF2B5EF4-FFF2-40B4-BE49-F238E27FC236}">
-                <a16:creationId xmlns:a16="http://schemas.microsoft.com/office/drawing/2014/main" id="{F66BB21C-0DEC-4A04-8092-22DD2FE90CCA}"/>
+                <a16:creationId xmlns:a16="http://schemas.microsoft.com/office/drawing/2014/main" id="{7F72BE54-054B-40CC-93C0-E94B0AFAAEE1}"/>
               </a:ext>
             </a:extLst>
           </p:cNvPr>
@@ -3750,7 +3750,7 @@
           <p:cNvPr id="4" name="">
             <a:extLst xmlns:a="http://schemas.openxmlformats.org/drawingml/2006/main">
               <a:ext uri="{FF2B5EF4-FFF2-40B4-BE49-F238E27FC236}">
-                <a16:creationId xmlns:a16="http://schemas.microsoft.com/office/drawing/2014/main" id="{A148BDF0-BD8A-48B4-879A-BA2AC59909EC}"/>
+                <a16:creationId xmlns:a16="http://schemas.microsoft.com/office/drawing/2014/main" id="{FB65BB66-64E7-4F46-A6CB-5C4DD27191DE}"/>
               </a:ext>
             </a:extLst>
           </p:cNvPr>
@@ -3783,7 +3783,7 @@
           <p:cNvPr id="5" name="">
             <a:extLst xmlns:a="http://schemas.openxmlformats.org/drawingml/2006/main">
               <a:ext uri="{FF2B5EF4-FFF2-40B4-BE49-F238E27FC236}">
-                <a16:creationId xmlns:a16="http://schemas.microsoft.com/office/drawing/2014/main" id="{33F0158B-9AE1-40F8-A951-0C12D9286187}"/>
+                <a16:creationId xmlns:a16="http://schemas.microsoft.com/office/drawing/2014/main" id="{CBDBFAF3-A2E2-444C-8ADB-CFB4CA14D6B8}"/>
               </a:ext>
             </a:extLst>
           </p:cNvPr>
@@ -3833,7 +3833,7 @@
           <p:cNvPr id="6" name="">
             <a:extLst xmlns:a="http://schemas.openxmlformats.org/drawingml/2006/main">
               <a:ext uri="{FF2B5EF4-FFF2-40B4-BE49-F238E27FC236}">
-                <a16:creationId xmlns:a16="http://schemas.microsoft.com/office/drawing/2014/main" id="{F80799A7-1428-41D3-8E29-1B85D5DCC35C}"/>
+                <a16:creationId xmlns:a16="http://schemas.microsoft.com/office/drawing/2014/main" id="{81E2F674-7DB3-49C6-BFAF-DEB92AEDE81F}"/>
               </a:ext>
             </a:extLst>
           </p:cNvPr>
@@ -3883,7 +3883,7 @@
           <p:cNvPr id="7" name="">
             <a:extLst xmlns:a="http://schemas.openxmlformats.org/drawingml/2006/main">
               <a:ext uri="{FF2B5EF4-FFF2-40B4-BE49-F238E27FC236}">
-                <a16:creationId xmlns:a16="http://schemas.microsoft.com/office/drawing/2014/main" id="{833F74A8-AC44-4B7B-B136-D0FB3B4E4B2D}"/>
+                <a16:creationId xmlns:a16="http://schemas.microsoft.com/office/drawing/2014/main" id="{7EA70E69-3586-4860-B988-0446A59C2534}"/>
               </a:ext>
             </a:extLst>
           </p:cNvPr>
@@ -3916,7 +3916,7 @@
           <p:cNvPr id="8" name="">
             <a:extLst xmlns:a="http://schemas.openxmlformats.org/drawingml/2006/main">
               <a:ext uri="{FF2B5EF4-FFF2-40B4-BE49-F238E27FC236}">
-                <a16:creationId xmlns:a16="http://schemas.microsoft.com/office/drawing/2014/main" id="{056D6910-727B-4ECF-B6FF-D6262B64FB45}"/>
+                <a16:creationId xmlns:a16="http://schemas.microsoft.com/office/drawing/2014/main" id="{0314598B-59C0-4A68-B1E3-0B83B4900D87}"/>
               </a:ext>
             </a:extLst>
           </p:cNvPr>
@@ -3966,7 +3966,7 @@
           <p:cNvPr id="9" name="">
             <a:extLst xmlns:a="http://schemas.openxmlformats.org/drawingml/2006/main">
               <a:ext uri="{FF2B5EF4-FFF2-40B4-BE49-F238E27FC236}">
-                <a16:creationId xmlns:a16="http://schemas.microsoft.com/office/drawing/2014/main" id="{AE293782-1435-4FC1-B937-6C9ECDFE93A8}"/>
+                <a16:creationId xmlns:a16="http://schemas.microsoft.com/office/drawing/2014/main" id="{8F5AC540-D476-4E40-8BC1-37E4C1C363FA}"/>
               </a:ext>
             </a:extLst>
           </p:cNvPr>
@@ -4016,7 +4016,7 @@
           <p:cNvPr id="10" name="">
             <a:extLst xmlns:a="http://schemas.openxmlformats.org/drawingml/2006/main">
               <a:ext uri="{FF2B5EF4-FFF2-40B4-BE49-F238E27FC236}">
-                <a16:creationId xmlns:a16="http://schemas.microsoft.com/office/drawing/2014/main" id="{8F139A29-C54C-49D1-86D2-348B13E94675}"/>
+                <a16:creationId xmlns:a16="http://schemas.microsoft.com/office/drawing/2014/main" id="{FE202588-BC24-47CA-9DD3-08A0899416E7}"/>
               </a:ext>
             </a:extLst>
           </p:cNvPr>
@@ -4049,7 +4049,7 @@
           <p:cNvPr id="11" name="">
             <a:extLst xmlns:a="http://schemas.openxmlformats.org/drawingml/2006/main">
               <a:ext uri="{FF2B5EF4-FFF2-40B4-BE49-F238E27FC236}">
-                <a16:creationId xmlns:a16="http://schemas.microsoft.com/office/drawing/2014/main" id="{F4DFB008-AFD5-47F0-BF8F-D9383C39610D}"/>
+                <a16:creationId xmlns:a16="http://schemas.microsoft.com/office/drawing/2014/main" id="{BF7BBF2A-A473-4DA4-A504-7066F9596288}"/>
               </a:ext>
             </a:extLst>
           </p:cNvPr>
@@ -4099,7 +4099,7 @@
           <p:cNvPr id="12" name="">
             <a:extLst xmlns:a="http://schemas.openxmlformats.org/drawingml/2006/main">
               <a:ext uri="{FF2B5EF4-FFF2-40B4-BE49-F238E27FC236}">
-                <a16:creationId xmlns:a16="http://schemas.microsoft.com/office/drawing/2014/main" id="{DE319F71-8E8A-49F9-BC4C-89E4BCCC545E}"/>
+                <a16:creationId xmlns:a16="http://schemas.microsoft.com/office/drawing/2014/main" id="{865DA000-0A4C-470B-8A00-3A837524A000}"/>
               </a:ext>
             </a:extLst>
           </p:cNvPr>
@@ -4149,7 +4149,7 @@
           <p:cNvPr id="13" name="">
             <a:extLst xmlns:a="http://schemas.openxmlformats.org/drawingml/2006/main">
               <a:ext uri="{FF2B5EF4-FFF2-40B4-BE49-F238E27FC236}">
-                <a16:creationId xmlns:a16="http://schemas.microsoft.com/office/drawing/2014/main" id="{ACAD3209-2D94-4F47-A084-9765CF34953C}"/>
+                <a16:creationId xmlns:a16="http://schemas.microsoft.com/office/drawing/2014/main" id="{D14CEB05-CB97-4B45-AC2F-B72177B4385B}"/>
               </a:ext>
             </a:extLst>
           </p:cNvPr>
@@ -4182,7 +4182,7 @@
           <p:cNvPr id="14" name="">
             <a:extLst xmlns:a="http://schemas.openxmlformats.org/drawingml/2006/main">
               <a:ext uri="{FF2B5EF4-FFF2-40B4-BE49-F238E27FC236}">
-                <a16:creationId xmlns:a16="http://schemas.microsoft.com/office/drawing/2014/main" id="{C81D5127-C7D9-4F73-A7B9-EA30D476AD41}"/>
+                <a16:creationId xmlns:a16="http://schemas.microsoft.com/office/drawing/2014/main" id="{4A7E5F3A-1D27-4304-81F3-EA5F14861C20}"/>
               </a:ext>
             </a:extLst>
           </p:cNvPr>
@@ -4232,7 +4232,7 @@
           <p:cNvPr id="15" name="">
             <a:extLst xmlns:a="http://schemas.openxmlformats.org/drawingml/2006/main">
               <a:ext uri="{FF2B5EF4-FFF2-40B4-BE49-F238E27FC236}">
-                <a16:creationId xmlns:a16="http://schemas.microsoft.com/office/drawing/2014/main" id="{B1CA230F-22EC-4EA0-8B37-39DE0CD81804}"/>
+                <a16:creationId xmlns:a16="http://schemas.microsoft.com/office/drawing/2014/main" id="{EBA39EB0-CC52-4E5E-A0A0-564ADC66A704}"/>
               </a:ext>
             </a:extLst>
           </p:cNvPr>
@@ -4282,7 +4282,7 @@
           <p:cNvPr id="16" name="">
             <a:extLst xmlns:a="http://schemas.openxmlformats.org/drawingml/2006/main">
               <a:ext uri="{FF2B5EF4-FFF2-40B4-BE49-F238E27FC236}">
-                <a16:creationId xmlns:a16="http://schemas.microsoft.com/office/drawing/2014/main" id="{3119C0CB-8503-4437-B5D3-03EB2E36A7F6}"/>
+                <a16:creationId xmlns:a16="http://schemas.microsoft.com/office/drawing/2014/main" id="{300A73AD-54AE-4549-B5D1-191A2A76E007}"/>
               </a:ext>
             </a:extLst>
           </p:cNvPr>
@@ -4313,7 +4313,7 @@
           <p:cNvPr id="17" name="">
             <a:extLst xmlns:a="http://schemas.openxmlformats.org/drawingml/2006/main">
               <a:ext uri="{FF2B5EF4-FFF2-40B4-BE49-F238E27FC236}">
-                <a16:creationId xmlns:a16="http://schemas.microsoft.com/office/drawing/2014/main" id="{96FEAA58-68EA-4DCE-A2AC-003E82667835}"/>
+                <a16:creationId xmlns:a16="http://schemas.microsoft.com/office/drawing/2014/main" id="{26DF160B-C77A-4644-A7B7-B810ACC8EA6B}"/>
               </a:ext>
             </a:extLst>
           </p:cNvPr>
@@ -4344,7 +4344,7 @@
           <p:cNvPr id="18" name="">
             <a:extLst xmlns:a="http://schemas.openxmlformats.org/drawingml/2006/main">
               <a:ext uri="{FF2B5EF4-FFF2-40B4-BE49-F238E27FC236}">
-                <a16:creationId xmlns:a16="http://schemas.microsoft.com/office/drawing/2014/main" id="{04B1E37F-1C28-4D07-9B66-5AB909846145}"/>
+                <a16:creationId xmlns:a16="http://schemas.microsoft.com/office/drawing/2014/main" id="{AA90AE2B-B460-420D-9FE2-575A78C999A8}"/>
               </a:ext>
             </a:extLst>
           </p:cNvPr>
@@ -4375,7 +4375,7 @@
           <p:cNvPr id="19" name="">
             <a:extLst xmlns:a="http://schemas.openxmlformats.org/drawingml/2006/main">
               <a:ext uri="{FF2B5EF4-FFF2-40B4-BE49-F238E27FC236}">
-                <a16:creationId xmlns:a16="http://schemas.microsoft.com/office/drawing/2014/main" id="{4411BB78-B272-4247-85DD-908843F21951}"/>
+                <a16:creationId xmlns:a16="http://schemas.microsoft.com/office/drawing/2014/main" id="{C23B2D72-8192-4212-B610-EAC14E1952CA}"/>
               </a:ext>
             </a:extLst>
           </p:cNvPr>
@@ -4425,7 +4425,7 @@
           <p:cNvPr id="20" name="">
             <a:extLst xmlns:a="http://schemas.openxmlformats.org/drawingml/2006/main">
               <a:ext uri="{FF2B5EF4-FFF2-40B4-BE49-F238E27FC236}">
-                <a16:creationId xmlns:a16="http://schemas.microsoft.com/office/drawing/2014/main" id="{9F118953-FE49-4E1B-8023-7FA4E357DD73}"/>
+                <a16:creationId xmlns:a16="http://schemas.microsoft.com/office/drawing/2014/main" id="{4D814F41-4ED6-4628-9047-E36F9EB438B8}"/>
               </a:ext>
             </a:extLst>
           </p:cNvPr>
@@ -4473,7 +4473,7 @@
     </p:spTree>
     <p:extLst>
       <p:ext uri="{BB962C8B-B14F-4D97-AF65-F5344CB8AC3E}">
-        <p14:creationId xmlns:p14="http://schemas.microsoft.com/office/powerpoint/2010/main" val="928386206"/>
+        <p14:creationId xmlns:p14="http://schemas.microsoft.com/office/powerpoint/2010/main" val="1688565718"/>
       </p:ext>
     </p:extLst>
   </p:cSld>
@@ -4504,7 +4504,7 @@
           <p:cNvPr id="1" name="">
             <a:extLst xmlns:a="http://schemas.openxmlformats.org/drawingml/2006/main">
               <a:ext uri="{FF2B5EF4-FFF2-40B4-BE49-F238E27FC236}">
-                <a16:creationId xmlns:a16="http://schemas.microsoft.com/office/drawing/2014/main" id="{F9A2D94E-5928-4766-B3D7-45C5A5C1DCCF}"/>
+                <a16:creationId xmlns:a16="http://schemas.microsoft.com/office/drawing/2014/main" id="{ECFA8398-E683-492C-9139-6EE971956D29}"/>
               </a:ext>
             </a:extLst>
           </p:cNvPr>
@@ -4554,7 +4554,7 @@
           <p:cNvPr id="2" name="">
             <a:extLst xmlns:a="http://schemas.openxmlformats.org/drawingml/2006/main">
               <a:ext uri="{FF2B5EF4-FFF2-40B4-BE49-F238E27FC236}">
-                <a16:creationId xmlns:a16="http://schemas.microsoft.com/office/drawing/2014/main" id="{73B974E6-15B5-4DC4-B15C-30E683666A9F}"/>
+                <a16:creationId xmlns:a16="http://schemas.microsoft.com/office/drawing/2014/main" id="{2D5B6974-9F7B-46CE-895E-C26C25511968}"/>
               </a:ext>
             </a:extLst>
           </p:cNvPr>
@@ -4604,7 +4604,7 @@
           <p:cNvPr id="3" name="">
             <a:extLst xmlns:a="http://schemas.openxmlformats.org/drawingml/2006/main">
               <a:ext uri="{FF2B5EF4-FFF2-40B4-BE49-F238E27FC236}">
-                <a16:creationId xmlns:a16="http://schemas.microsoft.com/office/drawing/2014/main" id="{1822754A-1548-458C-8AE3-30272B9D931C}"/>
+                <a16:creationId xmlns:a16="http://schemas.microsoft.com/office/drawing/2014/main" id="{8CECD3D8-3C7C-478A-A176-87C98679AF1A}"/>
               </a:ext>
             </a:extLst>
           </p:cNvPr>
@@ -4637,7 +4637,7 @@
           <p:cNvPr id="4" name="">
             <a:extLst xmlns:a="http://schemas.openxmlformats.org/drawingml/2006/main">
               <a:ext uri="{FF2B5EF4-FFF2-40B4-BE49-F238E27FC236}">
-                <a16:creationId xmlns:a16="http://schemas.microsoft.com/office/drawing/2014/main" id="{D8124316-D0B2-4985-9D90-53DC12E62FD3}"/>
+                <a16:creationId xmlns:a16="http://schemas.microsoft.com/office/drawing/2014/main" id="{24000A8F-5F85-4BD4-A9EE-FA93E41B015B}"/>
               </a:ext>
             </a:extLst>
           </p:cNvPr>
@@ -4670,7 +4670,7 @@
           <p:cNvPr id="5" name="">
             <a:extLst xmlns:a="http://schemas.openxmlformats.org/drawingml/2006/main">
               <a:ext uri="{FF2B5EF4-FFF2-40B4-BE49-F238E27FC236}">
-                <a16:creationId xmlns:a16="http://schemas.microsoft.com/office/drawing/2014/main" id="{15CAB2BF-0FB3-4285-9DE1-A906CBE854A6}"/>
+                <a16:creationId xmlns:a16="http://schemas.microsoft.com/office/drawing/2014/main" id="{EA537E9B-A125-45BF-A0DF-70648A82541E}"/>
               </a:ext>
             </a:extLst>
           </p:cNvPr>
@@ -4941,7 +4941,7 @@
           <p:cNvPr id="6" name="">
             <a:extLst xmlns:a="http://schemas.openxmlformats.org/drawingml/2006/main">
               <a:ext uri="{FF2B5EF4-FFF2-40B4-BE49-F238E27FC236}">
-                <a16:creationId xmlns:a16="http://schemas.microsoft.com/office/drawing/2014/main" id="{009C782A-FD01-4244-9706-436075C31F26}"/>
+                <a16:creationId xmlns:a16="http://schemas.microsoft.com/office/drawing/2014/main" id="{AC344967-0D48-4B6A-9327-F0334C793B2F}"/>
               </a:ext>
             </a:extLst>
           </p:cNvPr>
@@ -4974,7 +4974,7 @@
           <p:cNvPr id="7" name="">
             <a:extLst xmlns:a="http://schemas.openxmlformats.org/drawingml/2006/main">
               <a:ext uri="{FF2B5EF4-FFF2-40B4-BE49-F238E27FC236}">
-                <a16:creationId xmlns:a16="http://schemas.microsoft.com/office/drawing/2014/main" id="{07824F43-1F78-442E-A102-3A713DE76D67}"/>
+                <a16:creationId xmlns:a16="http://schemas.microsoft.com/office/drawing/2014/main" id="{1D8FA084-D760-40F2-AB26-1C018E9116FD}"/>
               </a:ext>
             </a:extLst>
           </p:cNvPr>
@@ -5024,7 +5024,7 @@
           <p:cNvPr id="8" name="">
             <a:extLst xmlns:a="http://schemas.openxmlformats.org/drawingml/2006/main">
               <a:ext uri="{FF2B5EF4-FFF2-40B4-BE49-F238E27FC236}">
-                <a16:creationId xmlns:a16="http://schemas.microsoft.com/office/drawing/2014/main" id="{71139E9F-06D0-427D-827C-35F82E1316C9}"/>
+                <a16:creationId xmlns:a16="http://schemas.microsoft.com/office/drawing/2014/main" id="{34275335-1533-4EC2-8399-DC1B72726D7B}"/>
               </a:ext>
             </a:extLst>
           </p:cNvPr>
@@ -5057,7 +5057,7 @@
           <p:cNvPr id="9" name="">
             <a:extLst xmlns:a="http://schemas.openxmlformats.org/drawingml/2006/main">
               <a:ext uri="{FF2B5EF4-FFF2-40B4-BE49-F238E27FC236}">
-                <a16:creationId xmlns:a16="http://schemas.microsoft.com/office/drawing/2014/main" id="{D6310BA1-9168-43A8-917F-03E3474506A9}"/>
+                <a16:creationId xmlns:a16="http://schemas.microsoft.com/office/drawing/2014/main" id="{3BA74DF7-B9C8-44C1-8C1B-BAA11C238097}"/>
               </a:ext>
             </a:extLst>
           </p:cNvPr>
@@ -5107,7 +5107,7 @@
           <p:cNvPr id="10" name="">
             <a:extLst xmlns:a="http://schemas.openxmlformats.org/drawingml/2006/main">
               <a:ext uri="{FF2B5EF4-FFF2-40B4-BE49-F238E27FC236}">
-                <a16:creationId xmlns:a16="http://schemas.microsoft.com/office/drawing/2014/main" id="{CD7D526E-E40F-43D0-9DD9-4A70355D7F4B}"/>
+                <a16:creationId xmlns:a16="http://schemas.microsoft.com/office/drawing/2014/main" id="{DA071C2E-9080-42F9-8452-317CC4156E63}"/>
               </a:ext>
             </a:extLst>
           </p:cNvPr>
@@ -5140,7 +5140,7 @@
           <p:cNvPr id="11" name="">
             <a:extLst xmlns:a="http://schemas.openxmlformats.org/drawingml/2006/main">
               <a:ext uri="{FF2B5EF4-FFF2-40B4-BE49-F238E27FC236}">
-                <a16:creationId xmlns:a16="http://schemas.microsoft.com/office/drawing/2014/main" id="{8918EC66-F8BA-4EFB-B205-CB97DB7295D9}"/>
+                <a16:creationId xmlns:a16="http://schemas.microsoft.com/office/drawing/2014/main" id="{12C30AC4-EFD0-4E07-8BC4-7975A91D2496}"/>
               </a:ext>
             </a:extLst>
           </p:cNvPr>
@@ -5190,7 +5190,7 @@
           <p:cNvPr id="12" name="">
             <a:extLst xmlns:a="http://schemas.openxmlformats.org/drawingml/2006/main">
               <a:ext uri="{FF2B5EF4-FFF2-40B4-BE49-F238E27FC236}">
-                <a16:creationId xmlns:a16="http://schemas.microsoft.com/office/drawing/2014/main" id="{62832205-8FDD-4752-938A-26F5D912BFE6}"/>
+                <a16:creationId xmlns:a16="http://schemas.microsoft.com/office/drawing/2014/main" id="{85DC27FC-8057-41A5-B6E0-27A94C891D12}"/>
               </a:ext>
             </a:extLst>
           </p:cNvPr>
@@ -5238,7 +5238,7 @@
     </p:spTree>
     <p:extLst>
       <p:ext uri="{BB962C8B-B14F-4D97-AF65-F5344CB8AC3E}">
-        <p14:creationId xmlns:p14="http://schemas.microsoft.com/office/powerpoint/2010/main" val="2042517244"/>
+        <p14:creationId xmlns:p14="http://schemas.microsoft.com/office/powerpoint/2010/main" val="120938372"/>
       </p:ext>
     </p:extLst>
   </p:cSld>
@@ -5269,7 +5269,7 @@
           <p:cNvPr id="1" name="">
             <a:extLst xmlns:a="http://schemas.openxmlformats.org/drawingml/2006/main">
               <a:ext uri="{FF2B5EF4-FFF2-40B4-BE49-F238E27FC236}">
-                <a16:creationId xmlns:a16="http://schemas.microsoft.com/office/drawing/2014/main" id="{9A5B2645-FEE1-44ED-AE9A-19961C4AC703}"/>
+                <a16:creationId xmlns:a16="http://schemas.microsoft.com/office/drawing/2014/main" id="{47E9EA0C-D2C2-4CD6-A25F-C2F901A8121C}"/>
               </a:ext>
             </a:extLst>
           </p:cNvPr>
@@ -5319,7 +5319,7 @@
           <p:cNvPr id="2" name="">
             <a:extLst xmlns:a="http://schemas.openxmlformats.org/drawingml/2006/main">
               <a:ext uri="{FF2B5EF4-FFF2-40B4-BE49-F238E27FC236}">
-                <a16:creationId xmlns:a16="http://schemas.microsoft.com/office/drawing/2014/main" id="{B47E7B06-5540-49B9-922F-2559910BF4F3}"/>
+                <a16:creationId xmlns:a16="http://schemas.microsoft.com/office/drawing/2014/main" id="{B792B9C5-67DD-4004-80CC-91877F10C46D}"/>
               </a:ext>
             </a:extLst>
           </p:cNvPr>
@@ -5369,7 +5369,7 @@
           <p:cNvPr id="3" name="">
             <a:extLst xmlns:a="http://schemas.openxmlformats.org/drawingml/2006/main">
               <a:ext uri="{FF2B5EF4-FFF2-40B4-BE49-F238E27FC236}">
-                <a16:creationId xmlns:a16="http://schemas.microsoft.com/office/drawing/2014/main" id="{B8118D33-5BA7-4C93-A214-C49B0F502088}"/>
+                <a16:creationId xmlns:a16="http://schemas.microsoft.com/office/drawing/2014/main" id="{F0B42E4B-4F40-4637-A2E5-C5DEAA8603C5}"/>
               </a:ext>
             </a:extLst>
           </p:cNvPr>
@@ -5402,7 +5402,7 @@
           <p:cNvPr id="4" name="">
             <a:extLst xmlns:a="http://schemas.openxmlformats.org/drawingml/2006/main">
               <a:ext uri="{FF2B5EF4-FFF2-40B4-BE49-F238E27FC236}">
-                <a16:creationId xmlns:a16="http://schemas.microsoft.com/office/drawing/2014/main" id="{910168DC-1243-4A06-BAFC-BBFDBA6E794A}"/>
+                <a16:creationId xmlns:a16="http://schemas.microsoft.com/office/drawing/2014/main" id="{05C87E79-35F6-4FA4-86E3-DDFB5E606213}"/>
               </a:ext>
             </a:extLst>
           </p:cNvPr>
@@ -5435,7 +5435,7 @@
           <p:cNvPr id="5" name="">
             <a:extLst xmlns:a="http://schemas.openxmlformats.org/drawingml/2006/main">
               <a:ext uri="{FF2B5EF4-FFF2-40B4-BE49-F238E27FC236}">
-                <a16:creationId xmlns:a16="http://schemas.microsoft.com/office/drawing/2014/main" id="{CDC3221A-2EFC-48E9-BCB4-CAD3DAC734E0}"/>
+                <a16:creationId xmlns:a16="http://schemas.microsoft.com/office/drawing/2014/main" id="{653FC574-19C7-43BE-9412-30A5E63D0D70}"/>
               </a:ext>
             </a:extLst>
           </p:cNvPr>
@@ -5492,7 +5492,7 @@
                   <a:srgbClr val="F8FAFC"/>
                 </a:solidFill>
               </a:rPr>
-              <a:t>    FlutterAppFunctionsApplication()</a:t>
+              <a:t>  FlutterAppFunctionsApplication()</a:t>
             </a:r>
           </a:p>
           <a:p xmlns:a="http://schemas.openxmlformats.org/drawingml/2006/main">
@@ -5565,12 +5565,7 @@
                   <a:srgbClr val="F8FAFC"/>
                 </a:solidFill>
               </a:rPr>
-              <a:t>  appfn:displayDescription="@string/appfn_display_description"&gt;</a:t>
-            </a:r>
-          </a:p>
-          <a:p xmlns:a="http://schemas.openxmlformats.org/drawingml/2006/main">
-            <a:r>
-              <a:t/>
+              <a:t>  appfn:displayDescription="@string/appfn_display" /&gt;</a:t>
             </a:r>
           </a:p>
         </p:txBody>
@@ -5580,7 +5575,7 @@
           <p:cNvPr id="6" name="">
             <a:extLst xmlns:a="http://schemas.openxmlformats.org/drawingml/2006/main">
               <a:ext uri="{FF2B5EF4-FFF2-40B4-BE49-F238E27FC236}">
-                <a16:creationId xmlns:a16="http://schemas.microsoft.com/office/drawing/2014/main" id="{006F8D4F-F952-4EB2-895C-456AA7CF2BBD}"/>
+                <a16:creationId xmlns:a16="http://schemas.microsoft.com/office/drawing/2014/main" id="{6D48A684-31BD-4F94-AD59-37D247A47DD8}"/>
               </a:ext>
             </a:extLst>
           </p:cNvPr>
@@ -5613,7 +5608,7 @@
           <p:cNvPr id="7" name="">
             <a:extLst xmlns:a="http://schemas.openxmlformats.org/drawingml/2006/main">
               <a:ext uri="{FF2B5EF4-FFF2-40B4-BE49-F238E27FC236}">
-                <a16:creationId xmlns:a16="http://schemas.microsoft.com/office/drawing/2014/main" id="{F9ABDB84-E148-4470-B962-ADEC2F348845}"/>
+                <a16:creationId xmlns:a16="http://schemas.microsoft.com/office/drawing/2014/main" id="{8A05AB2E-635B-4869-974D-092FCAA1ABE0}"/>
               </a:ext>
             </a:extLst>
           </p:cNvPr>
@@ -5663,7 +5658,7 @@
           <p:cNvPr id="8" name="">
             <a:extLst xmlns:a="http://schemas.openxmlformats.org/drawingml/2006/main">
               <a:ext uri="{FF2B5EF4-FFF2-40B4-BE49-F238E27FC236}">
-                <a16:creationId xmlns:a16="http://schemas.microsoft.com/office/drawing/2014/main" id="{F5F059C7-624B-4F2E-B5FA-1B3DB4A406FD}"/>
+                <a16:creationId xmlns:a16="http://schemas.microsoft.com/office/drawing/2014/main" id="{B7274C1E-4B58-4EC7-8AF3-81F3C72E9BF6}"/>
               </a:ext>
             </a:extLst>
           </p:cNvPr>
@@ -5713,7 +5708,7 @@
           <p:cNvPr id="9" name="">
             <a:extLst xmlns:a="http://schemas.openxmlformats.org/drawingml/2006/main">
               <a:ext uri="{FF2B5EF4-FFF2-40B4-BE49-F238E27FC236}">
-                <a16:creationId xmlns:a16="http://schemas.microsoft.com/office/drawing/2014/main" id="{D9F4CF12-9B04-4885-BDF3-8DD38790F594}"/>
+                <a16:creationId xmlns:a16="http://schemas.microsoft.com/office/drawing/2014/main" id="{81DBC497-139E-48BD-B8A0-B311FEC75AAA}"/>
               </a:ext>
             </a:extLst>
           </p:cNvPr>
@@ -5761,7 +5756,7 @@
     </p:spTree>
     <p:extLst>
       <p:ext uri="{BB962C8B-B14F-4D97-AF65-F5344CB8AC3E}">
-        <p14:creationId xmlns:p14="http://schemas.microsoft.com/office/powerpoint/2010/main" val="1836851382"/>
+        <p14:creationId xmlns:p14="http://schemas.microsoft.com/office/powerpoint/2010/main" val="1383259486"/>
       </p:ext>
     </p:extLst>
   </p:cSld>
@@ -5792,7 +5787,7 @@
           <p:cNvPr id="1" name="">
             <a:extLst xmlns:a="http://schemas.openxmlformats.org/drawingml/2006/main">
               <a:ext uri="{FF2B5EF4-FFF2-40B4-BE49-F238E27FC236}">
-                <a16:creationId xmlns:a16="http://schemas.microsoft.com/office/drawing/2014/main" id="{DDC43A22-4CE2-4296-B32F-389101174A49}"/>
+                <a16:creationId xmlns:a16="http://schemas.microsoft.com/office/drawing/2014/main" id="{FB737FA5-FB96-49A4-BCD1-55606ED2AA70}"/>
               </a:ext>
             </a:extLst>
           </p:cNvPr>
@@ -5842,7 +5837,7 @@
           <p:cNvPr id="2" name="">
             <a:extLst xmlns:a="http://schemas.openxmlformats.org/drawingml/2006/main">
               <a:ext uri="{FF2B5EF4-FFF2-40B4-BE49-F238E27FC236}">
-                <a16:creationId xmlns:a16="http://schemas.microsoft.com/office/drawing/2014/main" id="{2FF5D160-4446-425E-AE35-026AAE8BF206}"/>
+                <a16:creationId xmlns:a16="http://schemas.microsoft.com/office/drawing/2014/main" id="{E99DB060-26EF-4761-BFE5-D2E092035DE4}"/>
               </a:ext>
             </a:extLst>
           </p:cNvPr>
@@ -5892,7 +5887,7 @@
           <p:cNvPr id="3" name="">
             <a:extLst xmlns:a="http://schemas.openxmlformats.org/drawingml/2006/main">
               <a:ext uri="{FF2B5EF4-FFF2-40B4-BE49-F238E27FC236}">
-                <a16:creationId xmlns:a16="http://schemas.microsoft.com/office/drawing/2014/main" id="{A82792A0-FD8F-417A-A633-A9FBC3A4F519}"/>
+                <a16:creationId xmlns:a16="http://schemas.microsoft.com/office/drawing/2014/main" id="{77E2F1BF-F255-4C54-8F80-440B74BE8AD2}"/>
               </a:ext>
             </a:extLst>
           </p:cNvPr>
@@ -5925,7 +5920,7 @@
           <p:cNvPr id="4" name="">
             <a:extLst xmlns:a="http://schemas.openxmlformats.org/drawingml/2006/main">
               <a:ext uri="{FF2B5EF4-FFF2-40B4-BE49-F238E27FC236}">
-                <a16:creationId xmlns:a16="http://schemas.microsoft.com/office/drawing/2014/main" id="{D605465B-AA84-4EEC-B3C1-22C546ECEF49}"/>
+                <a16:creationId xmlns:a16="http://schemas.microsoft.com/office/drawing/2014/main" id="{E08354E0-196A-417E-B983-5A377D66DFBB}"/>
               </a:ext>
             </a:extLst>
           </p:cNvPr>
@@ -5958,7 +5953,7 @@
           <p:cNvPr id="5" name="">
             <a:extLst xmlns:a="http://schemas.openxmlformats.org/drawingml/2006/main">
               <a:ext uri="{FF2B5EF4-FFF2-40B4-BE49-F238E27FC236}">
-                <a16:creationId xmlns:a16="http://schemas.microsoft.com/office/drawing/2014/main" id="{D69E6DF4-9D87-4DA1-918B-31B72186223B}"/>
+                <a16:creationId xmlns:a16="http://schemas.microsoft.com/office/drawing/2014/main" id="{4023FA60-29D2-4E2B-97BE-7E63E26E8380}"/>
               </a:ext>
             </a:extLst>
           </p:cNvPr>
@@ -6008,7 +6003,7 @@
           <p:cNvPr id="6" name="">
             <a:extLst xmlns:a="http://schemas.openxmlformats.org/drawingml/2006/main">
               <a:ext uri="{FF2B5EF4-FFF2-40B4-BE49-F238E27FC236}">
-                <a16:creationId xmlns:a16="http://schemas.microsoft.com/office/drawing/2014/main" id="{4F1F659C-35D9-43CB-BDAA-0A9A54D8192B}"/>
+                <a16:creationId xmlns:a16="http://schemas.microsoft.com/office/drawing/2014/main" id="{3356FE5E-8D1C-4D1B-A0ED-8E0D0781ACD0}"/>
               </a:ext>
             </a:extLst>
           </p:cNvPr>
@@ -6058,7 +6053,7 @@
           <p:cNvPr id="7" name="">
             <a:extLst xmlns:a="http://schemas.openxmlformats.org/drawingml/2006/main">
               <a:ext uri="{FF2B5EF4-FFF2-40B4-BE49-F238E27FC236}">
-                <a16:creationId xmlns:a16="http://schemas.microsoft.com/office/drawing/2014/main" id="{CFF8BF2F-94B1-44BA-B7D7-0A47E4A5115C}"/>
+                <a16:creationId xmlns:a16="http://schemas.microsoft.com/office/drawing/2014/main" id="{5E9359E8-8715-4F62-9A64-4900B905827B}"/>
               </a:ext>
             </a:extLst>
           </p:cNvPr>
@@ -6108,7 +6103,7 @@
           <p:cNvPr id="8" name="">
             <a:extLst xmlns:a="http://schemas.openxmlformats.org/drawingml/2006/main">
               <a:ext uri="{FF2B5EF4-FFF2-40B4-BE49-F238E27FC236}">
-                <a16:creationId xmlns:a16="http://schemas.microsoft.com/office/drawing/2014/main" id="{7F017439-47E1-4916-BA3E-325C59414B73}"/>
+                <a16:creationId xmlns:a16="http://schemas.microsoft.com/office/drawing/2014/main" id="{3EE3F7E7-B5E0-420E-B6C9-E979CBE49DC1}"/>
               </a:ext>
             </a:extLst>
           </p:cNvPr>
@@ -6139,7 +6134,7 @@
           <p:cNvPr id="9" name="">
             <a:extLst xmlns:a="http://schemas.openxmlformats.org/drawingml/2006/main">
               <a:ext uri="{FF2B5EF4-FFF2-40B4-BE49-F238E27FC236}">
-                <a16:creationId xmlns:a16="http://schemas.microsoft.com/office/drawing/2014/main" id="{217DA3FA-5115-4396-AE0D-E2F0352B0B8B}"/>
+                <a16:creationId xmlns:a16="http://schemas.microsoft.com/office/drawing/2014/main" id="{CF4CB402-A493-4573-B49C-0A4A08236A1E}"/>
               </a:ext>
             </a:extLst>
           </p:cNvPr>
@@ -6172,7 +6167,7 @@
           <p:cNvPr id="10" name="">
             <a:extLst xmlns:a="http://schemas.openxmlformats.org/drawingml/2006/main">
               <a:ext uri="{FF2B5EF4-FFF2-40B4-BE49-F238E27FC236}">
-                <a16:creationId xmlns:a16="http://schemas.microsoft.com/office/drawing/2014/main" id="{48DBD36A-AB10-4E1D-87BB-BC17CC7A021F}"/>
+                <a16:creationId xmlns:a16="http://schemas.microsoft.com/office/drawing/2014/main" id="{6A7C3376-4F3A-43BC-B63D-2D115E252C15}"/>
               </a:ext>
             </a:extLst>
           </p:cNvPr>
@@ -6222,7 +6217,7 @@
           <p:cNvPr id="11" name="">
             <a:extLst xmlns:a="http://schemas.openxmlformats.org/drawingml/2006/main">
               <a:ext uri="{FF2B5EF4-FFF2-40B4-BE49-F238E27FC236}">
-                <a16:creationId xmlns:a16="http://schemas.microsoft.com/office/drawing/2014/main" id="{EED54DA6-0EF3-438D-A2F1-9833D4DF1263}"/>
+                <a16:creationId xmlns:a16="http://schemas.microsoft.com/office/drawing/2014/main" id="{0C61420F-9C01-4447-80E2-13C5E0A7FC69}"/>
               </a:ext>
             </a:extLst>
           </p:cNvPr>
@@ -6272,7 +6267,7 @@
           <p:cNvPr id="12" name="">
             <a:extLst xmlns:a="http://schemas.openxmlformats.org/drawingml/2006/main">
               <a:ext uri="{FF2B5EF4-FFF2-40B4-BE49-F238E27FC236}">
-                <a16:creationId xmlns:a16="http://schemas.microsoft.com/office/drawing/2014/main" id="{2CCF722C-D599-4EA1-9644-A614977B4CE3}"/>
+                <a16:creationId xmlns:a16="http://schemas.microsoft.com/office/drawing/2014/main" id="{A6F0C57E-8501-4C64-B2AE-2FD34430176F}"/>
               </a:ext>
             </a:extLst>
           </p:cNvPr>
@@ -6322,7 +6317,7 @@
           <p:cNvPr id="13" name="">
             <a:extLst xmlns:a="http://schemas.openxmlformats.org/drawingml/2006/main">
               <a:ext uri="{FF2B5EF4-FFF2-40B4-BE49-F238E27FC236}">
-                <a16:creationId xmlns:a16="http://schemas.microsoft.com/office/drawing/2014/main" id="{A5976B0E-62D3-4A1C-8455-246C412FF7ED}"/>
+                <a16:creationId xmlns:a16="http://schemas.microsoft.com/office/drawing/2014/main" id="{E0429CE1-9998-48EA-8E98-45CF182EF1D2}"/>
               </a:ext>
             </a:extLst>
           </p:cNvPr>
@@ -6353,7 +6348,7 @@
           <p:cNvPr id="14" name="">
             <a:extLst xmlns:a="http://schemas.openxmlformats.org/drawingml/2006/main">
               <a:ext uri="{FF2B5EF4-FFF2-40B4-BE49-F238E27FC236}">
-                <a16:creationId xmlns:a16="http://schemas.microsoft.com/office/drawing/2014/main" id="{D3D79397-9299-48CD-9AE1-B6192C2CBD5C}"/>
+                <a16:creationId xmlns:a16="http://schemas.microsoft.com/office/drawing/2014/main" id="{6B3AA6CF-847D-4404-8522-77FC90C5E693}"/>
               </a:ext>
             </a:extLst>
           </p:cNvPr>
@@ -6386,7 +6381,7 @@
           <p:cNvPr id="15" name="">
             <a:extLst xmlns:a="http://schemas.openxmlformats.org/drawingml/2006/main">
               <a:ext uri="{FF2B5EF4-FFF2-40B4-BE49-F238E27FC236}">
-                <a16:creationId xmlns:a16="http://schemas.microsoft.com/office/drawing/2014/main" id="{828C5C5A-E97B-40ED-B2AF-C3179DD9F95B}"/>
+                <a16:creationId xmlns:a16="http://schemas.microsoft.com/office/drawing/2014/main" id="{BC8262FB-0978-4AA5-97C6-0A2BF49E79B2}"/>
               </a:ext>
             </a:extLst>
           </p:cNvPr>
@@ -6436,7 +6431,7 @@
           <p:cNvPr id="16" name="">
             <a:extLst xmlns:a="http://schemas.openxmlformats.org/drawingml/2006/main">
               <a:ext uri="{FF2B5EF4-FFF2-40B4-BE49-F238E27FC236}">
-                <a16:creationId xmlns:a16="http://schemas.microsoft.com/office/drawing/2014/main" id="{97C370A7-1BEC-4F03-8AD8-6FC394B20E22}"/>
+                <a16:creationId xmlns:a16="http://schemas.microsoft.com/office/drawing/2014/main" id="{C1604D76-257F-43CA-9F40-54BBF1A53463}"/>
               </a:ext>
             </a:extLst>
           </p:cNvPr>
@@ -6486,7 +6481,7 @@
           <p:cNvPr id="17" name="">
             <a:extLst xmlns:a="http://schemas.openxmlformats.org/drawingml/2006/main">
               <a:ext uri="{FF2B5EF4-FFF2-40B4-BE49-F238E27FC236}">
-                <a16:creationId xmlns:a16="http://schemas.microsoft.com/office/drawing/2014/main" id="{FD4E055E-CE89-4038-AA63-F7948F81805A}"/>
+                <a16:creationId xmlns:a16="http://schemas.microsoft.com/office/drawing/2014/main" id="{9EC06232-0F96-4989-8ED5-17A2D720FAA6}"/>
               </a:ext>
             </a:extLst>
           </p:cNvPr>
@@ -6536,7 +6531,7 @@
           <p:cNvPr id="18" name="">
             <a:extLst xmlns:a="http://schemas.openxmlformats.org/drawingml/2006/main">
               <a:ext uri="{FF2B5EF4-FFF2-40B4-BE49-F238E27FC236}">
-                <a16:creationId xmlns:a16="http://schemas.microsoft.com/office/drawing/2014/main" id="{68FB1C96-0523-44C3-BA87-61AA549933FF}"/>
+                <a16:creationId xmlns:a16="http://schemas.microsoft.com/office/drawing/2014/main" id="{1B70F0EF-6791-4E31-9D9A-BFD6442AE99A}"/>
               </a:ext>
             </a:extLst>
           </p:cNvPr>
@@ -6567,7 +6562,7 @@
           <p:cNvPr id="19" name="">
             <a:extLst xmlns:a="http://schemas.openxmlformats.org/drawingml/2006/main">
               <a:ext uri="{FF2B5EF4-FFF2-40B4-BE49-F238E27FC236}">
-                <a16:creationId xmlns:a16="http://schemas.microsoft.com/office/drawing/2014/main" id="{807CA643-E7A9-4C68-8BA6-76109573BC2E}"/>
+                <a16:creationId xmlns:a16="http://schemas.microsoft.com/office/drawing/2014/main" id="{FB998752-0BB9-41A3-9CD2-43E374A0DD6F}"/>
               </a:ext>
             </a:extLst>
           </p:cNvPr>
@@ -6600,7 +6595,7 @@
           <p:cNvPr id="20" name="">
             <a:extLst xmlns:a="http://schemas.openxmlformats.org/drawingml/2006/main">
               <a:ext uri="{FF2B5EF4-FFF2-40B4-BE49-F238E27FC236}">
-                <a16:creationId xmlns:a16="http://schemas.microsoft.com/office/drawing/2014/main" id="{56ED76AD-9A74-4C72-A369-1B0E7E7A7859}"/>
+                <a16:creationId xmlns:a16="http://schemas.microsoft.com/office/drawing/2014/main" id="{C7018A98-4B37-4DBA-AC4D-E28DF5E8E8F0}"/>
               </a:ext>
             </a:extLst>
           </p:cNvPr>
@@ -6650,7 +6645,7 @@
           <p:cNvPr id="21" name="">
             <a:extLst xmlns:a="http://schemas.openxmlformats.org/drawingml/2006/main">
               <a:ext uri="{FF2B5EF4-FFF2-40B4-BE49-F238E27FC236}">
-                <a16:creationId xmlns:a16="http://schemas.microsoft.com/office/drawing/2014/main" id="{C496CFA6-AC44-4096-A8D4-BA97E869B08E}"/>
+                <a16:creationId xmlns:a16="http://schemas.microsoft.com/office/drawing/2014/main" id="{2C7DA7E1-A33C-400A-9A80-E3A938F0A8E5}"/>
               </a:ext>
             </a:extLst>
           </p:cNvPr>
@@ -6700,7 +6695,7 @@
           <p:cNvPr id="22" name="">
             <a:extLst xmlns:a="http://schemas.openxmlformats.org/drawingml/2006/main">
               <a:ext uri="{FF2B5EF4-FFF2-40B4-BE49-F238E27FC236}">
-                <a16:creationId xmlns:a16="http://schemas.microsoft.com/office/drawing/2014/main" id="{46D2AB3D-D507-474B-81DC-6A69FAF20D78}"/>
+                <a16:creationId xmlns:a16="http://schemas.microsoft.com/office/drawing/2014/main" id="{99372E35-99CA-41F0-9367-29D656E91E3B}"/>
               </a:ext>
             </a:extLst>
           </p:cNvPr>
@@ -6750,7 +6745,7 @@
           <p:cNvPr id="23" name="">
             <a:extLst xmlns:a="http://schemas.openxmlformats.org/drawingml/2006/main">
               <a:ext uri="{FF2B5EF4-FFF2-40B4-BE49-F238E27FC236}">
-                <a16:creationId xmlns:a16="http://schemas.microsoft.com/office/drawing/2014/main" id="{9E144FA1-CCE1-48E2-89C2-BC52A8BB0C8C}"/>
+                <a16:creationId xmlns:a16="http://schemas.microsoft.com/office/drawing/2014/main" id="{DBA32CD5-40D8-4599-A472-11290DC57212}"/>
               </a:ext>
             </a:extLst>
           </p:cNvPr>
@@ -6800,7 +6795,7 @@
           <p:cNvPr id="24" name="">
             <a:extLst xmlns:a="http://schemas.openxmlformats.org/drawingml/2006/main">
               <a:ext uri="{FF2B5EF4-FFF2-40B4-BE49-F238E27FC236}">
-                <a16:creationId xmlns:a16="http://schemas.microsoft.com/office/drawing/2014/main" id="{49B9B310-6760-4BA3-BF32-26A102EFB60E}"/>
+                <a16:creationId xmlns:a16="http://schemas.microsoft.com/office/drawing/2014/main" id="{42F158EC-B71C-46F7-8A98-5D575BAA162E}"/>
               </a:ext>
             </a:extLst>
           </p:cNvPr>
@@ -6848,7 +6843,7 @@
     </p:spTree>
     <p:extLst>
       <p:ext uri="{BB962C8B-B14F-4D97-AF65-F5344CB8AC3E}">
-        <p14:creationId xmlns:p14="http://schemas.microsoft.com/office/powerpoint/2010/main" val="1385749177"/>
+        <p14:creationId xmlns:p14="http://schemas.microsoft.com/office/powerpoint/2010/main" val="13341834"/>
       </p:ext>
     </p:extLst>
   </p:cSld>
@@ -6879,7 +6874,7 @@
           <p:cNvPr id="1" name="">
             <a:extLst xmlns:a="http://schemas.openxmlformats.org/drawingml/2006/main">
               <a:ext uri="{FF2B5EF4-FFF2-40B4-BE49-F238E27FC236}">
-                <a16:creationId xmlns:a16="http://schemas.microsoft.com/office/drawing/2014/main" id="{D5494817-FC50-420C-A11F-ECAE21A20717}"/>
+                <a16:creationId xmlns:a16="http://schemas.microsoft.com/office/drawing/2014/main" id="{E3E7E661-0D74-4862-BEA7-C843A5211AE1}"/>
               </a:ext>
             </a:extLst>
           </p:cNvPr>
@@ -6929,7 +6924,7 @@
           <p:cNvPr id="2" name="">
             <a:extLst xmlns:a="http://schemas.openxmlformats.org/drawingml/2006/main">
               <a:ext uri="{FF2B5EF4-FFF2-40B4-BE49-F238E27FC236}">
-                <a16:creationId xmlns:a16="http://schemas.microsoft.com/office/drawing/2014/main" id="{78B2A524-D292-4756-97E8-75C4909E58E0}"/>
+                <a16:creationId xmlns:a16="http://schemas.microsoft.com/office/drawing/2014/main" id="{B9FC8991-D21C-4A95-A922-75CD9880EBC5}"/>
               </a:ext>
             </a:extLst>
           </p:cNvPr>
@@ -6969,7 +6964,7 @@
                   <a:srgbClr val="0A0F14"/>
                 </a:solidFill>
               </a:rPr>
-              <a:t>Reliability comes from matching Android semantics</a:t>
+              <a:t>Typed errors match Android semantics</a:t>
             </a:r>
           </a:p>
         </p:txBody>
@@ -6979,7 +6974,7 @@
           <p:cNvPr id="3" name="">
             <a:extLst xmlns:a="http://schemas.openxmlformats.org/drawingml/2006/main">
               <a:ext uri="{FF2B5EF4-FFF2-40B4-BE49-F238E27FC236}">
-                <a16:creationId xmlns:a16="http://schemas.microsoft.com/office/drawing/2014/main" id="{346AF68E-43D5-43EF-BF2B-D6DB23754EA6}"/>
+                <a16:creationId xmlns:a16="http://schemas.microsoft.com/office/drawing/2014/main" id="{B9537822-B2EA-45A2-BF55-2CFB533C5C74}"/>
               </a:ext>
             </a:extLst>
           </p:cNvPr>
@@ -7258,7 +7253,7 @@
           <p:cNvPr id="5" name="">
             <a:extLst xmlns:a="http://schemas.openxmlformats.org/drawingml/2006/main">
               <a:ext uri="{FF2B5EF4-FFF2-40B4-BE49-F238E27FC236}">
-                <a16:creationId xmlns:a16="http://schemas.microsoft.com/office/drawing/2014/main" id="{35A8C139-E8FE-4D32-931B-B45FCD066EC1}"/>
+                <a16:creationId xmlns:a16="http://schemas.microsoft.com/office/drawing/2014/main" id="{66FFE159-4C54-4E76-BC35-8886D1ED7C00}"/>
               </a:ext>
             </a:extLst>
           </p:cNvPr>
@@ -7291,7 +7286,7 @@
           <p:cNvPr id="6" name="">
             <a:extLst xmlns:a="http://schemas.openxmlformats.org/drawingml/2006/main">
               <a:ext uri="{FF2B5EF4-FFF2-40B4-BE49-F238E27FC236}">
-                <a16:creationId xmlns:a16="http://schemas.microsoft.com/office/drawing/2014/main" id="{78C420A3-C2C5-4C7D-A686-18E81A9761BE}"/>
+                <a16:creationId xmlns:a16="http://schemas.microsoft.com/office/drawing/2014/main" id="{F8D926BE-715C-4295-B8D8-2B701C82DBF8}"/>
               </a:ext>
             </a:extLst>
           </p:cNvPr>
@@ -7341,7 +7336,7 @@
           <p:cNvPr id="7" name="">
             <a:extLst xmlns:a="http://schemas.openxmlformats.org/drawingml/2006/main">
               <a:ext uri="{FF2B5EF4-FFF2-40B4-BE49-F238E27FC236}">
-                <a16:creationId xmlns:a16="http://schemas.microsoft.com/office/drawing/2014/main" id="{6B2F56FA-119A-4DED-86E8-3BC0FD9C80FC}"/>
+                <a16:creationId xmlns:a16="http://schemas.microsoft.com/office/drawing/2014/main" id="{B0F2E34F-47E1-4A23-856A-E1A24D391F4F}"/>
               </a:ext>
             </a:extLst>
           </p:cNvPr>
@@ -7374,7 +7369,7 @@
           <p:cNvPr id="8" name="">
             <a:extLst xmlns:a="http://schemas.openxmlformats.org/drawingml/2006/main">
               <a:ext uri="{FF2B5EF4-FFF2-40B4-BE49-F238E27FC236}">
-                <a16:creationId xmlns:a16="http://schemas.microsoft.com/office/drawing/2014/main" id="{FF64E495-BC80-4DB8-AF95-F3299B7D6B4A}"/>
+                <a16:creationId xmlns:a16="http://schemas.microsoft.com/office/drawing/2014/main" id="{E7955BA3-6E2C-490C-9908-A85BC0E9FB25}"/>
               </a:ext>
             </a:extLst>
           </p:cNvPr>
@@ -7424,7 +7419,7 @@
           <p:cNvPr id="9" name="">
             <a:extLst xmlns:a="http://schemas.openxmlformats.org/drawingml/2006/main">
               <a:ext uri="{FF2B5EF4-FFF2-40B4-BE49-F238E27FC236}">
-                <a16:creationId xmlns:a16="http://schemas.microsoft.com/office/drawing/2014/main" id="{6BDF9C4A-7A88-4FF7-82C4-8C97641E99FA}"/>
+                <a16:creationId xmlns:a16="http://schemas.microsoft.com/office/drawing/2014/main" id="{EC943716-6774-43FC-8042-8B75A58EA978}"/>
               </a:ext>
             </a:extLst>
           </p:cNvPr>
@@ -7457,7 +7452,7 @@
           <p:cNvPr id="10" name="">
             <a:extLst xmlns:a="http://schemas.openxmlformats.org/drawingml/2006/main">
               <a:ext uri="{FF2B5EF4-FFF2-40B4-BE49-F238E27FC236}">
-                <a16:creationId xmlns:a16="http://schemas.microsoft.com/office/drawing/2014/main" id="{CB4914C4-9497-469E-AB00-7A2235262A2A}"/>
+                <a16:creationId xmlns:a16="http://schemas.microsoft.com/office/drawing/2014/main" id="{381F8F76-69B8-41C8-9020-3AA138DC9BBF}"/>
               </a:ext>
             </a:extLst>
           </p:cNvPr>
@@ -7507,7 +7502,7 @@
           <p:cNvPr id="11" name="">
             <a:extLst xmlns:a="http://schemas.openxmlformats.org/drawingml/2006/main">
               <a:ext uri="{FF2B5EF4-FFF2-40B4-BE49-F238E27FC236}">
-                <a16:creationId xmlns:a16="http://schemas.microsoft.com/office/drawing/2014/main" id="{6F15C1F7-D2FD-44DC-B1A2-2396BE537BCD}"/>
+                <a16:creationId xmlns:a16="http://schemas.microsoft.com/office/drawing/2014/main" id="{0B5BB086-BF37-4D9B-A4D6-FE9BFD148E9E}"/>
               </a:ext>
             </a:extLst>
           </p:cNvPr>
@@ -7555,7 +7550,7 @@
     </p:spTree>
     <p:extLst>
       <p:ext uri="{BB962C8B-B14F-4D97-AF65-F5344CB8AC3E}">
-        <p14:creationId xmlns:p14="http://schemas.microsoft.com/office/powerpoint/2010/main" val="999191118"/>
+        <p14:creationId xmlns:p14="http://schemas.microsoft.com/office/powerpoint/2010/main" val="607675659"/>
       </p:ext>
     </p:extLst>
   </p:cSld>
@@ -7586,7 +7581,7 @@
           <p:cNvPr id="1" name="">
             <a:extLst xmlns:a="http://schemas.openxmlformats.org/drawingml/2006/main">
               <a:ext uri="{FF2B5EF4-FFF2-40B4-BE49-F238E27FC236}">
-                <a16:creationId xmlns:a16="http://schemas.microsoft.com/office/drawing/2014/main" id="{ED3ADD3B-FFAF-42D2-9CA5-A7DE42994B9C}"/>
+                <a16:creationId xmlns:a16="http://schemas.microsoft.com/office/drawing/2014/main" id="{98E1089F-ADDA-4E42-8F9F-D8CAEF48792B}"/>
               </a:ext>
             </a:extLst>
           </p:cNvPr>
@@ -7636,7 +7631,7 @@
           <p:cNvPr id="2" name="">
             <a:extLst xmlns:a="http://schemas.openxmlformats.org/drawingml/2006/main">
               <a:ext uri="{FF2B5EF4-FFF2-40B4-BE49-F238E27FC236}">
-                <a16:creationId xmlns:a16="http://schemas.microsoft.com/office/drawing/2014/main" id="{AE3EC688-155E-4D0C-A7C9-78B74C64DDBF}"/>
+                <a16:creationId xmlns:a16="http://schemas.microsoft.com/office/drawing/2014/main" id="{639E1F14-9305-4EE9-8CEC-1E9906C87537}"/>
               </a:ext>
             </a:extLst>
           </p:cNvPr>
@@ -7686,7 +7681,7 @@
           <p:cNvPr id="3" name="">
             <a:extLst xmlns:a="http://schemas.openxmlformats.org/drawingml/2006/main">
               <a:ext uri="{FF2B5EF4-FFF2-40B4-BE49-F238E27FC236}">
-                <a16:creationId xmlns:a16="http://schemas.microsoft.com/office/drawing/2014/main" id="{BEEAA6DF-11DE-47CD-9BC4-E8B5AA95060F}"/>
+                <a16:creationId xmlns:a16="http://schemas.microsoft.com/office/drawing/2014/main" id="{E2418C3D-4FE4-4BDF-A790-DC83FA0D96D8}"/>
               </a:ext>
             </a:extLst>
           </p:cNvPr>
@@ -7719,7 +7714,7 @@
           <p:cNvPr id="4" name="">
             <a:extLst xmlns:a="http://schemas.openxmlformats.org/drawingml/2006/main">
               <a:ext uri="{FF2B5EF4-FFF2-40B4-BE49-F238E27FC236}">
-                <a16:creationId xmlns:a16="http://schemas.microsoft.com/office/drawing/2014/main" id="{E2DBBAB4-4EB9-4866-BB13-F69EC0834C27}"/>
+                <a16:creationId xmlns:a16="http://schemas.microsoft.com/office/drawing/2014/main" id="{A69A661D-6426-45BB-8FA4-169348D43AFC}"/>
               </a:ext>
             </a:extLst>
           </p:cNvPr>
@@ -7769,7 +7764,7 @@
           <p:cNvPr id="5" name="">
             <a:extLst xmlns:a="http://schemas.openxmlformats.org/drawingml/2006/main">
               <a:ext uri="{FF2B5EF4-FFF2-40B4-BE49-F238E27FC236}">
-                <a16:creationId xmlns:a16="http://schemas.microsoft.com/office/drawing/2014/main" id="{35911BAC-20D7-4F20-B2E8-268F432B41E1}"/>
+                <a16:creationId xmlns:a16="http://schemas.microsoft.com/office/drawing/2014/main" id="{6B43CD09-8A56-48B3-8AF2-5526670D6AFA}"/>
               </a:ext>
             </a:extLst>
           </p:cNvPr>
@@ -7802,7 +7797,7 @@
           <p:cNvPr id="6" name="">
             <a:extLst xmlns:a="http://schemas.openxmlformats.org/drawingml/2006/main">
               <a:ext uri="{FF2B5EF4-FFF2-40B4-BE49-F238E27FC236}">
-                <a16:creationId xmlns:a16="http://schemas.microsoft.com/office/drawing/2014/main" id="{69CF3490-60C0-4EBB-B1C4-8325DFD67903}"/>
+                <a16:creationId xmlns:a16="http://schemas.microsoft.com/office/drawing/2014/main" id="{534527D9-FDD0-4E53-A9A2-CEB8F34F7A79}"/>
               </a:ext>
             </a:extLst>
           </p:cNvPr>
@@ -7852,7 +7847,7 @@
           <p:cNvPr id="7" name="">
             <a:extLst xmlns:a="http://schemas.openxmlformats.org/drawingml/2006/main">
               <a:ext uri="{FF2B5EF4-FFF2-40B4-BE49-F238E27FC236}">
-                <a16:creationId xmlns:a16="http://schemas.microsoft.com/office/drawing/2014/main" id="{841C11B9-DBAA-40A9-BB4C-8BD87ED158EB}"/>
+                <a16:creationId xmlns:a16="http://schemas.microsoft.com/office/drawing/2014/main" id="{ADBBC1A1-E080-4F50-8768-38F8A3F19DEA}"/>
               </a:ext>
             </a:extLst>
           </p:cNvPr>
@@ -7902,7 +7897,7 @@
           <p:cNvPr id="8" name="">
             <a:extLst xmlns:a="http://schemas.openxmlformats.org/drawingml/2006/main">
               <a:ext uri="{FF2B5EF4-FFF2-40B4-BE49-F238E27FC236}">
-                <a16:creationId xmlns:a16="http://schemas.microsoft.com/office/drawing/2014/main" id="{07F0DE7C-780D-46D4-849D-81DAECBF36F4}"/>
+                <a16:creationId xmlns:a16="http://schemas.microsoft.com/office/drawing/2014/main" id="{BBA1219F-F5BD-4803-B63B-F412D55C8D03}"/>
               </a:ext>
             </a:extLst>
           </p:cNvPr>
@@ -7935,7 +7930,7 @@
           <p:cNvPr id="9" name="">
             <a:extLst xmlns:a="http://schemas.openxmlformats.org/drawingml/2006/main">
               <a:ext uri="{FF2B5EF4-FFF2-40B4-BE49-F238E27FC236}">
-                <a16:creationId xmlns:a16="http://schemas.microsoft.com/office/drawing/2014/main" id="{FCC907A5-D452-455B-B39E-455A184648B2}"/>
+                <a16:creationId xmlns:a16="http://schemas.microsoft.com/office/drawing/2014/main" id="{128B6007-69DE-47BF-B25E-4B62404691F6}"/>
               </a:ext>
             </a:extLst>
           </p:cNvPr>
@@ -7985,7 +7980,7 @@
           <p:cNvPr id="10" name="">
             <a:extLst xmlns:a="http://schemas.openxmlformats.org/drawingml/2006/main">
               <a:ext uri="{FF2B5EF4-FFF2-40B4-BE49-F238E27FC236}">
-                <a16:creationId xmlns:a16="http://schemas.microsoft.com/office/drawing/2014/main" id="{D18BE0F1-9178-4ADD-B163-AE098E0BD407}"/>
+                <a16:creationId xmlns:a16="http://schemas.microsoft.com/office/drawing/2014/main" id="{19A64324-73D5-444C-83F5-40D052125E13}"/>
               </a:ext>
             </a:extLst>
           </p:cNvPr>
@@ -8035,7 +8030,7 @@
           <p:cNvPr id="11" name="">
             <a:extLst xmlns:a="http://schemas.openxmlformats.org/drawingml/2006/main">
               <a:ext uri="{FF2B5EF4-FFF2-40B4-BE49-F238E27FC236}">
-                <a16:creationId xmlns:a16="http://schemas.microsoft.com/office/drawing/2014/main" id="{C78E31FB-B010-4F94-B3F8-85D1875BAE8D}"/>
+                <a16:creationId xmlns:a16="http://schemas.microsoft.com/office/drawing/2014/main" id="{D134B428-C775-43DB-87DB-CA267CC1C031}"/>
               </a:ext>
             </a:extLst>
           </p:cNvPr>
@@ -8068,7 +8063,7 @@
           <p:cNvPr id="12" name="">
             <a:extLst xmlns:a="http://schemas.openxmlformats.org/drawingml/2006/main">
               <a:ext uri="{FF2B5EF4-FFF2-40B4-BE49-F238E27FC236}">
-                <a16:creationId xmlns:a16="http://schemas.microsoft.com/office/drawing/2014/main" id="{F213B7A6-73AF-45B4-86DC-A5BE1732E687}"/>
+                <a16:creationId xmlns:a16="http://schemas.microsoft.com/office/drawing/2014/main" id="{437B9CB4-787D-46C4-A163-D12BC74C2CEC}"/>
               </a:ext>
             </a:extLst>
           </p:cNvPr>
@@ -8118,7 +8113,7 @@
           <p:cNvPr id="13" name="">
             <a:extLst xmlns:a="http://schemas.openxmlformats.org/drawingml/2006/main">
               <a:ext uri="{FF2B5EF4-FFF2-40B4-BE49-F238E27FC236}">
-                <a16:creationId xmlns:a16="http://schemas.microsoft.com/office/drawing/2014/main" id="{1489FA62-E32A-4E65-8042-635CD1E5F343}"/>
+                <a16:creationId xmlns:a16="http://schemas.microsoft.com/office/drawing/2014/main" id="{3BF2B393-4BF8-4E67-A36D-94BDA70C74F3}"/>
               </a:ext>
             </a:extLst>
           </p:cNvPr>
@@ -8168,7 +8163,7 @@
           <p:cNvPr id="14" name="">
             <a:extLst xmlns:a="http://schemas.openxmlformats.org/drawingml/2006/main">
               <a:ext uri="{FF2B5EF4-FFF2-40B4-BE49-F238E27FC236}">
-                <a16:creationId xmlns:a16="http://schemas.microsoft.com/office/drawing/2014/main" id="{9D34670F-23DA-4077-AAAE-F8A6068A577E}"/>
+                <a16:creationId xmlns:a16="http://schemas.microsoft.com/office/drawing/2014/main" id="{7FFABA4B-3087-4C33-A737-7D9D7D032058}"/>
               </a:ext>
             </a:extLst>
           </p:cNvPr>
@@ -8218,7 +8213,7 @@
           <p:cNvPr id="15" name="">
             <a:extLst xmlns:a="http://schemas.openxmlformats.org/drawingml/2006/main">
               <a:ext uri="{FF2B5EF4-FFF2-40B4-BE49-F238E27FC236}">
-                <a16:creationId xmlns:a16="http://schemas.microsoft.com/office/drawing/2014/main" id="{D5CCB2E5-59B3-4D09-B917-2FD3C8155373}"/>
+                <a16:creationId xmlns:a16="http://schemas.microsoft.com/office/drawing/2014/main" id="{2A4626B9-E68B-403D-89E2-816D454D1E3F}"/>
               </a:ext>
             </a:extLst>
           </p:cNvPr>
@@ -8266,7 +8261,7 @@
     </p:spTree>
     <p:extLst>
       <p:ext uri="{BB962C8B-B14F-4D97-AF65-F5344CB8AC3E}">
-        <p14:creationId xmlns:p14="http://schemas.microsoft.com/office/powerpoint/2010/main" val="1632632877"/>
+        <p14:creationId xmlns:p14="http://schemas.microsoft.com/office/powerpoint/2010/main" val="1519015789"/>
       </p:ext>
     </p:extLst>
   </p:cSld>
